--- a/exports/pptx/lessons/middle-module-07-eleven-multiplication/day-07-limits.pptx
+++ b/exports/pptx/lessons/middle-module-07-eleven-multiplication/day-07-limits.pptx
@@ -17,9 +17,16 @@
     <p:sldId id="265" r:id="rId11"/>
     <p:sldId id="266" r:id="rId12"/>
     <p:sldId id="267" r:id="rId13"/>
+    <p:sldId id="268" r:id="rId14"/>
+    <p:sldId id="269" r:id="rId15"/>
+    <p:sldId id="270" r:id="rId16"/>
+    <p:sldId id="271" r:id="rId17"/>
+    <p:sldId id="272" r:id="rId18"/>
+    <p:sldId id="273" r:id="rId19"/>
+    <p:sldId id="274" r:id="rId20"/>
   </p:sldIdLst>
   <p:notesMasterIdLst>
-    <p:notesMasterId r:id="rId14"/>
+    <p:notesMasterId r:id="rId21"/>
   </p:notesMasterIdLst>
   <p:sldSz cx="9144000" cy="5143500"/>
   <p:notesSz cx="5143500" cy="9144000"/>
@@ -801,6 +808,622 @@
             <a:fld id="{F7021451-1387-4CA6-816F-3879F97B5CBC}" type="slidenum">
               <a:rPr lang="en-US"/>
               <a:t>12</a:t>
+            </a:fld>
+            <a:endParaRPr lang="en-US"/>
+          </a:p>
+        </p:txBody>
+      </p:sp>
+    </p:spTree>
+    <p:extLst>
+      <p:ext uri="{BB962C8B-B14F-4D97-AF65-F5344CB8AC3E}">
+        <p14:creationId xmlns:p14="http://schemas.microsoft.com/office/powerpoint/2010/main" val="1024086991"/>
+      </p:ext>
+    </p:extLst>
+  </p:cSld>
+  <p:clrMapOvr>
+    <a:masterClrMapping/>
+  </p:clrMapOvr>
+</p:notes>
+</file>
+
+<file path=ppt/notesSlides/notesSlide13.xml><?xml version="1.0" encoding="utf-8"?>
+<p:notes xmlns:a="http://schemas.openxmlformats.org/drawingml/2006/main" xmlns:r="http://schemas.openxmlformats.org/officeDocument/2006/relationships" xmlns:p="http://schemas.openxmlformats.org/presentationml/2006/main">
+  <p:cSld>
+    <p:spTree>
+      <p:nvGrpSpPr>
+        <p:cNvPr id="1" name=""/>
+        <p:cNvGrpSpPr/>
+        <p:nvPr/>
+      </p:nvGrpSpPr>
+      <p:grpSpPr>
+        <a:xfrm>
+          <a:off x="0" y="0"/>
+          <a:ext cx="0" cy="0"/>
+          <a:chOff x="0" y="0"/>
+          <a:chExt cx="0" cy="0"/>
+        </a:xfrm>
+      </p:grpSpPr>
+      <p:sp>
+        <p:nvSpPr>
+          <p:cNvPr id="2" name="Slide Image Placeholder 1"/>
+          <p:cNvSpPr>
+            <a:spLocks noGrp="1" noRot="1" noChangeAspect="1"/>
+          </p:cNvSpPr>
+          <p:nvPr>
+            <p:ph type="sldImg"/>
+          </p:nvPr>
+        </p:nvSpPr>
+        <p:spPr/>
+      </p:sp>
+      <p:sp>
+        <p:nvSpPr>
+          <p:cNvPr id="3" name="Notes Placeholder 2"/>
+          <p:cNvSpPr>
+            <a:spLocks noGrp="1"/>
+          </p:cNvSpPr>
+          <p:nvPr>
+            <p:ph type="body" idx="1"/>
+          </p:nvPr>
+        </p:nvSpPr>
+        <p:spPr/>
+        <p:txBody>
+          <a:bodyPr/>
+          <a:lstStyle/>
+          <a:p>
+            <a:r>
+              <a:rPr lang="en-US" dirty="0"/>
+              <a:t/>
+            </a:r>
+            <a:endParaRPr lang="en-US" dirty="0"/>
+          </a:p>
+        </p:txBody>
+      </p:sp>
+      <p:sp>
+        <p:nvSpPr>
+          <p:cNvPr id="4" name="Slide Number Placeholder 3"/>
+          <p:cNvSpPr>
+            <a:spLocks noGrp="1"/>
+          </p:cNvSpPr>
+          <p:nvPr>
+            <p:ph type="sldNum" sz="quarter" idx="10"/>
+          </p:nvPr>
+        </p:nvSpPr>
+        <p:spPr/>
+        <p:txBody>
+          <a:bodyPr/>
+          <a:lstStyle/>
+          <a:p>
+            <a:fld id="{F7021451-1387-4CA6-816F-3879F97B5CBC}" type="slidenum">
+              <a:rPr lang="en-US"/>
+              <a:t>13</a:t>
+            </a:fld>
+            <a:endParaRPr lang="en-US"/>
+          </a:p>
+        </p:txBody>
+      </p:sp>
+    </p:spTree>
+    <p:extLst>
+      <p:ext uri="{BB962C8B-B14F-4D97-AF65-F5344CB8AC3E}">
+        <p14:creationId xmlns:p14="http://schemas.microsoft.com/office/powerpoint/2010/main" val="1024086991"/>
+      </p:ext>
+    </p:extLst>
+  </p:cSld>
+  <p:clrMapOvr>
+    <a:masterClrMapping/>
+  </p:clrMapOvr>
+</p:notes>
+</file>
+
+<file path=ppt/notesSlides/notesSlide14.xml><?xml version="1.0" encoding="utf-8"?>
+<p:notes xmlns:a="http://schemas.openxmlformats.org/drawingml/2006/main" xmlns:r="http://schemas.openxmlformats.org/officeDocument/2006/relationships" xmlns:p="http://schemas.openxmlformats.org/presentationml/2006/main">
+  <p:cSld>
+    <p:spTree>
+      <p:nvGrpSpPr>
+        <p:cNvPr id="1" name=""/>
+        <p:cNvGrpSpPr/>
+        <p:nvPr/>
+      </p:nvGrpSpPr>
+      <p:grpSpPr>
+        <a:xfrm>
+          <a:off x="0" y="0"/>
+          <a:ext cx="0" cy="0"/>
+          <a:chOff x="0" y="0"/>
+          <a:chExt cx="0" cy="0"/>
+        </a:xfrm>
+      </p:grpSpPr>
+      <p:sp>
+        <p:nvSpPr>
+          <p:cNvPr id="2" name="Slide Image Placeholder 1"/>
+          <p:cNvSpPr>
+            <a:spLocks noGrp="1" noRot="1" noChangeAspect="1"/>
+          </p:cNvSpPr>
+          <p:nvPr>
+            <p:ph type="sldImg"/>
+          </p:nvPr>
+        </p:nvSpPr>
+        <p:spPr/>
+      </p:sp>
+      <p:sp>
+        <p:nvSpPr>
+          <p:cNvPr id="3" name="Notes Placeholder 2"/>
+          <p:cNvSpPr>
+            <a:spLocks noGrp="1"/>
+          </p:cNvSpPr>
+          <p:nvPr>
+            <p:ph type="body" idx="1"/>
+          </p:nvPr>
+        </p:nvSpPr>
+        <p:spPr/>
+        <p:txBody>
+          <a:bodyPr/>
+          <a:lstStyle/>
+          <a:p>
+            <a:r>
+              <a:rPr lang="en-US" dirty="0"/>
+              <a:t/>
+            </a:r>
+            <a:endParaRPr lang="en-US" dirty="0"/>
+          </a:p>
+        </p:txBody>
+      </p:sp>
+      <p:sp>
+        <p:nvSpPr>
+          <p:cNvPr id="4" name="Slide Number Placeholder 3"/>
+          <p:cNvSpPr>
+            <a:spLocks noGrp="1"/>
+          </p:cNvSpPr>
+          <p:nvPr>
+            <p:ph type="sldNum" sz="quarter" idx="10"/>
+          </p:nvPr>
+        </p:nvSpPr>
+        <p:spPr/>
+        <p:txBody>
+          <a:bodyPr/>
+          <a:lstStyle/>
+          <a:p>
+            <a:fld id="{F7021451-1387-4CA6-816F-3879F97B5CBC}" type="slidenum">
+              <a:rPr lang="en-US"/>
+              <a:t>14</a:t>
+            </a:fld>
+            <a:endParaRPr lang="en-US"/>
+          </a:p>
+        </p:txBody>
+      </p:sp>
+    </p:spTree>
+    <p:extLst>
+      <p:ext uri="{BB962C8B-B14F-4D97-AF65-F5344CB8AC3E}">
+        <p14:creationId xmlns:p14="http://schemas.microsoft.com/office/powerpoint/2010/main" val="1024086991"/>
+      </p:ext>
+    </p:extLst>
+  </p:cSld>
+  <p:clrMapOvr>
+    <a:masterClrMapping/>
+  </p:clrMapOvr>
+</p:notes>
+</file>
+
+<file path=ppt/notesSlides/notesSlide15.xml><?xml version="1.0" encoding="utf-8"?>
+<p:notes xmlns:a="http://schemas.openxmlformats.org/drawingml/2006/main" xmlns:r="http://schemas.openxmlformats.org/officeDocument/2006/relationships" xmlns:p="http://schemas.openxmlformats.org/presentationml/2006/main">
+  <p:cSld>
+    <p:spTree>
+      <p:nvGrpSpPr>
+        <p:cNvPr id="1" name=""/>
+        <p:cNvGrpSpPr/>
+        <p:nvPr/>
+      </p:nvGrpSpPr>
+      <p:grpSpPr>
+        <a:xfrm>
+          <a:off x="0" y="0"/>
+          <a:ext cx="0" cy="0"/>
+          <a:chOff x="0" y="0"/>
+          <a:chExt cx="0" cy="0"/>
+        </a:xfrm>
+      </p:grpSpPr>
+      <p:sp>
+        <p:nvSpPr>
+          <p:cNvPr id="2" name="Slide Image Placeholder 1"/>
+          <p:cNvSpPr>
+            <a:spLocks noGrp="1" noRot="1" noChangeAspect="1"/>
+          </p:cNvSpPr>
+          <p:nvPr>
+            <p:ph type="sldImg"/>
+          </p:nvPr>
+        </p:nvSpPr>
+        <p:spPr/>
+      </p:sp>
+      <p:sp>
+        <p:nvSpPr>
+          <p:cNvPr id="3" name="Notes Placeholder 2"/>
+          <p:cNvSpPr>
+            <a:spLocks noGrp="1"/>
+          </p:cNvSpPr>
+          <p:nvPr>
+            <p:ph type="body" idx="1"/>
+          </p:nvPr>
+        </p:nvSpPr>
+        <p:spPr/>
+        <p:txBody>
+          <a:bodyPr/>
+          <a:lstStyle/>
+          <a:p>
+            <a:r>
+              <a:rPr lang="en-US" dirty="0"/>
+              <a:t/>
+            </a:r>
+            <a:endParaRPr lang="en-US" dirty="0"/>
+          </a:p>
+        </p:txBody>
+      </p:sp>
+      <p:sp>
+        <p:nvSpPr>
+          <p:cNvPr id="4" name="Slide Number Placeholder 3"/>
+          <p:cNvSpPr>
+            <a:spLocks noGrp="1"/>
+          </p:cNvSpPr>
+          <p:nvPr>
+            <p:ph type="sldNum" sz="quarter" idx="10"/>
+          </p:nvPr>
+        </p:nvSpPr>
+        <p:spPr/>
+        <p:txBody>
+          <a:bodyPr/>
+          <a:lstStyle/>
+          <a:p>
+            <a:fld id="{F7021451-1387-4CA6-816F-3879F97B5CBC}" type="slidenum">
+              <a:rPr lang="en-US"/>
+              <a:t>15</a:t>
+            </a:fld>
+            <a:endParaRPr lang="en-US"/>
+          </a:p>
+        </p:txBody>
+      </p:sp>
+    </p:spTree>
+    <p:extLst>
+      <p:ext uri="{BB962C8B-B14F-4D97-AF65-F5344CB8AC3E}">
+        <p14:creationId xmlns:p14="http://schemas.microsoft.com/office/powerpoint/2010/main" val="1024086991"/>
+      </p:ext>
+    </p:extLst>
+  </p:cSld>
+  <p:clrMapOvr>
+    <a:masterClrMapping/>
+  </p:clrMapOvr>
+</p:notes>
+</file>
+
+<file path=ppt/notesSlides/notesSlide16.xml><?xml version="1.0" encoding="utf-8"?>
+<p:notes xmlns:a="http://schemas.openxmlformats.org/drawingml/2006/main" xmlns:r="http://schemas.openxmlformats.org/officeDocument/2006/relationships" xmlns:p="http://schemas.openxmlformats.org/presentationml/2006/main">
+  <p:cSld>
+    <p:spTree>
+      <p:nvGrpSpPr>
+        <p:cNvPr id="1" name=""/>
+        <p:cNvGrpSpPr/>
+        <p:nvPr/>
+      </p:nvGrpSpPr>
+      <p:grpSpPr>
+        <a:xfrm>
+          <a:off x="0" y="0"/>
+          <a:ext cx="0" cy="0"/>
+          <a:chOff x="0" y="0"/>
+          <a:chExt cx="0" cy="0"/>
+        </a:xfrm>
+      </p:grpSpPr>
+      <p:sp>
+        <p:nvSpPr>
+          <p:cNvPr id="2" name="Slide Image Placeholder 1"/>
+          <p:cNvSpPr>
+            <a:spLocks noGrp="1" noRot="1" noChangeAspect="1"/>
+          </p:cNvSpPr>
+          <p:nvPr>
+            <p:ph type="sldImg"/>
+          </p:nvPr>
+        </p:nvSpPr>
+        <p:spPr/>
+      </p:sp>
+      <p:sp>
+        <p:nvSpPr>
+          <p:cNvPr id="3" name="Notes Placeholder 2"/>
+          <p:cNvSpPr>
+            <a:spLocks noGrp="1"/>
+          </p:cNvSpPr>
+          <p:nvPr>
+            <p:ph type="body" idx="1"/>
+          </p:nvPr>
+        </p:nvSpPr>
+        <p:spPr/>
+        <p:txBody>
+          <a:bodyPr/>
+          <a:lstStyle/>
+          <a:p>
+            <a:r>
+              <a:rPr lang="en-US" dirty="0"/>
+              <a:t/>
+            </a:r>
+            <a:endParaRPr lang="en-US" dirty="0"/>
+          </a:p>
+        </p:txBody>
+      </p:sp>
+      <p:sp>
+        <p:nvSpPr>
+          <p:cNvPr id="4" name="Slide Number Placeholder 3"/>
+          <p:cNvSpPr>
+            <a:spLocks noGrp="1"/>
+          </p:cNvSpPr>
+          <p:nvPr>
+            <p:ph type="sldNum" sz="quarter" idx="10"/>
+          </p:nvPr>
+        </p:nvSpPr>
+        <p:spPr/>
+        <p:txBody>
+          <a:bodyPr/>
+          <a:lstStyle/>
+          <a:p>
+            <a:fld id="{F7021451-1387-4CA6-816F-3879F97B5CBC}" type="slidenum">
+              <a:rPr lang="en-US"/>
+              <a:t>16</a:t>
+            </a:fld>
+            <a:endParaRPr lang="en-US"/>
+          </a:p>
+        </p:txBody>
+      </p:sp>
+    </p:spTree>
+    <p:extLst>
+      <p:ext uri="{BB962C8B-B14F-4D97-AF65-F5344CB8AC3E}">
+        <p14:creationId xmlns:p14="http://schemas.microsoft.com/office/powerpoint/2010/main" val="1024086991"/>
+      </p:ext>
+    </p:extLst>
+  </p:cSld>
+  <p:clrMapOvr>
+    <a:masterClrMapping/>
+  </p:clrMapOvr>
+</p:notes>
+</file>
+
+<file path=ppt/notesSlides/notesSlide17.xml><?xml version="1.0" encoding="utf-8"?>
+<p:notes xmlns:a="http://schemas.openxmlformats.org/drawingml/2006/main" xmlns:r="http://schemas.openxmlformats.org/officeDocument/2006/relationships" xmlns:p="http://schemas.openxmlformats.org/presentationml/2006/main">
+  <p:cSld>
+    <p:spTree>
+      <p:nvGrpSpPr>
+        <p:cNvPr id="1" name=""/>
+        <p:cNvGrpSpPr/>
+        <p:nvPr/>
+      </p:nvGrpSpPr>
+      <p:grpSpPr>
+        <a:xfrm>
+          <a:off x="0" y="0"/>
+          <a:ext cx="0" cy="0"/>
+          <a:chOff x="0" y="0"/>
+          <a:chExt cx="0" cy="0"/>
+        </a:xfrm>
+      </p:grpSpPr>
+      <p:sp>
+        <p:nvSpPr>
+          <p:cNvPr id="2" name="Slide Image Placeholder 1"/>
+          <p:cNvSpPr>
+            <a:spLocks noGrp="1" noRot="1" noChangeAspect="1"/>
+          </p:cNvSpPr>
+          <p:nvPr>
+            <p:ph type="sldImg"/>
+          </p:nvPr>
+        </p:nvSpPr>
+        <p:spPr/>
+      </p:sp>
+      <p:sp>
+        <p:nvSpPr>
+          <p:cNvPr id="3" name="Notes Placeholder 2"/>
+          <p:cNvSpPr>
+            <a:spLocks noGrp="1"/>
+          </p:cNvSpPr>
+          <p:nvPr>
+            <p:ph type="body" idx="1"/>
+          </p:nvPr>
+        </p:nvSpPr>
+        <p:spPr/>
+        <p:txBody>
+          <a:bodyPr/>
+          <a:lstStyle/>
+          <a:p>
+            <a:r>
+              <a:rPr lang="en-US" dirty="0"/>
+              <a:t/>
+            </a:r>
+            <a:endParaRPr lang="en-US" dirty="0"/>
+          </a:p>
+        </p:txBody>
+      </p:sp>
+      <p:sp>
+        <p:nvSpPr>
+          <p:cNvPr id="4" name="Slide Number Placeholder 3"/>
+          <p:cNvSpPr>
+            <a:spLocks noGrp="1"/>
+          </p:cNvSpPr>
+          <p:nvPr>
+            <p:ph type="sldNum" sz="quarter" idx="10"/>
+          </p:nvPr>
+        </p:nvSpPr>
+        <p:spPr/>
+        <p:txBody>
+          <a:bodyPr/>
+          <a:lstStyle/>
+          <a:p>
+            <a:fld id="{F7021451-1387-4CA6-816F-3879F97B5CBC}" type="slidenum">
+              <a:rPr lang="en-US"/>
+              <a:t>17</a:t>
+            </a:fld>
+            <a:endParaRPr lang="en-US"/>
+          </a:p>
+        </p:txBody>
+      </p:sp>
+    </p:spTree>
+    <p:extLst>
+      <p:ext uri="{BB962C8B-B14F-4D97-AF65-F5344CB8AC3E}">
+        <p14:creationId xmlns:p14="http://schemas.microsoft.com/office/powerpoint/2010/main" val="1024086991"/>
+      </p:ext>
+    </p:extLst>
+  </p:cSld>
+  <p:clrMapOvr>
+    <a:masterClrMapping/>
+  </p:clrMapOvr>
+</p:notes>
+</file>
+
+<file path=ppt/notesSlides/notesSlide18.xml><?xml version="1.0" encoding="utf-8"?>
+<p:notes xmlns:a="http://schemas.openxmlformats.org/drawingml/2006/main" xmlns:r="http://schemas.openxmlformats.org/officeDocument/2006/relationships" xmlns:p="http://schemas.openxmlformats.org/presentationml/2006/main">
+  <p:cSld>
+    <p:spTree>
+      <p:nvGrpSpPr>
+        <p:cNvPr id="1" name=""/>
+        <p:cNvGrpSpPr/>
+        <p:nvPr/>
+      </p:nvGrpSpPr>
+      <p:grpSpPr>
+        <a:xfrm>
+          <a:off x="0" y="0"/>
+          <a:ext cx="0" cy="0"/>
+          <a:chOff x="0" y="0"/>
+          <a:chExt cx="0" cy="0"/>
+        </a:xfrm>
+      </p:grpSpPr>
+      <p:sp>
+        <p:nvSpPr>
+          <p:cNvPr id="2" name="Slide Image Placeholder 1"/>
+          <p:cNvSpPr>
+            <a:spLocks noGrp="1" noRot="1" noChangeAspect="1"/>
+          </p:cNvSpPr>
+          <p:nvPr>
+            <p:ph type="sldImg"/>
+          </p:nvPr>
+        </p:nvSpPr>
+        <p:spPr/>
+      </p:sp>
+      <p:sp>
+        <p:nvSpPr>
+          <p:cNvPr id="3" name="Notes Placeholder 2"/>
+          <p:cNvSpPr>
+            <a:spLocks noGrp="1"/>
+          </p:cNvSpPr>
+          <p:nvPr>
+            <p:ph type="body" idx="1"/>
+          </p:nvPr>
+        </p:nvSpPr>
+        <p:spPr/>
+        <p:txBody>
+          <a:bodyPr/>
+          <a:lstStyle/>
+          <a:p>
+            <a:r>
+              <a:rPr lang="en-US" dirty="0"/>
+              <a:t/>
+            </a:r>
+            <a:endParaRPr lang="en-US" dirty="0"/>
+          </a:p>
+        </p:txBody>
+      </p:sp>
+      <p:sp>
+        <p:nvSpPr>
+          <p:cNvPr id="4" name="Slide Number Placeholder 3"/>
+          <p:cNvSpPr>
+            <a:spLocks noGrp="1"/>
+          </p:cNvSpPr>
+          <p:nvPr>
+            <p:ph type="sldNum" sz="quarter" idx="10"/>
+          </p:nvPr>
+        </p:nvSpPr>
+        <p:spPr/>
+        <p:txBody>
+          <a:bodyPr/>
+          <a:lstStyle/>
+          <a:p>
+            <a:fld id="{F7021451-1387-4CA6-816F-3879F97B5CBC}" type="slidenum">
+              <a:rPr lang="en-US"/>
+              <a:t>18</a:t>
+            </a:fld>
+            <a:endParaRPr lang="en-US"/>
+          </a:p>
+        </p:txBody>
+      </p:sp>
+    </p:spTree>
+    <p:extLst>
+      <p:ext uri="{BB962C8B-B14F-4D97-AF65-F5344CB8AC3E}">
+        <p14:creationId xmlns:p14="http://schemas.microsoft.com/office/powerpoint/2010/main" val="1024086991"/>
+      </p:ext>
+    </p:extLst>
+  </p:cSld>
+  <p:clrMapOvr>
+    <a:masterClrMapping/>
+  </p:clrMapOvr>
+</p:notes>
+</file>
+
+<file path=ppt/notesSlides/notesSlide19.xml><?xml version="1.0" encoding="utf-8"?>
+<p:notes xmlns:a="http://schemas.openxmlformats.org/drawingml/2006/main" xmlns:r="http://schemas.openxmlformats.org/officeDocument/2006/relationships" xmlns:p="http://schemas.openxmlformats.org/presentationml/2006/main">
+  <p:cSld>
+    <p:spTree>
+      <p:nvGrpSpPr>
+        <p:cNvPr id="1" name=""/>
+        <p:cNvGrpSpPr/>
+        <p:nvPr/>
+      </p:nvGrpSpPr>
+      <p:grpSpPr>
+        <a:xfrm>
+          <a:off x="0" y="0"/>
+          <a:ext cx="0" cy="0"/>
+          <a:chOff x="0" y="0"/>
+          <a:chExt cx="0" cy="0"/>
+        </a:xfrm>
+      </p:grpSpPr>
+      <p:sp>
+        <p:nvSpPr>
+          <p:cNvPr id="2" name="Slide Image Placeholder 1"/>
+          <p:cNvSpPr>
+            <a:spLocks noGrp="1" noRot="1" noChangeAspect="1"/>
+          </p:cNvSpPr>
+          <p:nvPr>
+            <p:ph type="sldImg"/>
+          </p:nvPr>
+        </p:nvSpPr>
+        <p:spPr/>
+      </p:sp>
+      <p:sp>
+        <p:nvSpPr>
+          <p:cNvPr id="3" name="Notes Placeholder 2"/>
+          <p:cNvSpPr>
+            <a:spLocks noGrp="1"/>
+          </p:cNvSpPr>
+          <p:nvPr>
+            <p:ph type="body" idx="1"/>
+          </p:nvPr>
+        </p:nvSpPr>
+        <p:spPr/>
+        <p:txBody>
+          <a:bodyPr/>
+          <a:lstStyle/>
+          <a:p>
+            <a:r>
+              <a:rPr lang="en-US" dirty="0"/>
+              <a:t/>
+            </a:r>
+            <a:endParaRPr lang="en-US" dirty="0"/>
+          </a:p>
+        </p:txBody>
+      </p:sp>
+      <p:sp>
+        <p:nvSpPr>
+          <p:cNvPr id="4" name="Slide Number Placeholder 3"/>
+          <p:cNvSpPr>
+            <a:spLocks noGrp="1"/>
+          </p:cNvSpPr>
+          <p:nvPr>
+            <p:ph type="sldNum" sz="quarter" idx="10"/>
+          </p:nvPr>
+        </p:nvSpPr>
+        <p:spPr/>
+        <p:txBody>
+          <a:bodyPr/>
+          <a:lstStyle/>
+          <a:p>
+            <a:fld id="{F7021451-1387-4CA6-816F-3879F97B5CBC}" type="slidenum">
+              <a:rPr lang="en-US"/>
+              <a:t>19</a:t>
             </a:fld>
             <a:endParaRPr lang="en-US"/>
           </a:p>
@@ -2146,286 +2769,6 @@
         </p:nvSpPr>
         <p:spPr>
           <a:xfrm>
-            <a:off x="406301" y="1223963"/>
-            <a:ext cx="8498026" cy="274290"/>
-          </a:xfrm>
-          <a:prstGeom prst="rect">
-            <a:avLst/>
-          </a:prstGeom>
-          <a:noFill/>
-          <a:ln/>
-        </p:spPr>
-        <p:txBody>
-          <a:bodyPr wrap="square" lIns="0" tIns="0" rIns="0" bIns="0" rtlCol="0" anchor="t"/>
-          <a:lstStyle/>
-          <a:p>
-            <a:pPr algn="l" indent="0" marL="0">
-              <a:lnSpc>
-                <a:spcPts val="2160"/>
-              </a:lnSpc>
-              <a:spcBef>
-                <a:spcPts val="600"/>
-              </a:spcBef>
-              <a:spcAft>
-                <a:spcPts val="800"/>
-              </a:spcAft>
-              <a:buNone/>
-            </a:pPr>
-            <a:r>
-              <a:rPr lang="en-US" sz="1800" b="1" dirty="0">
-                <a:solidFill>
-                  <a:srgbClr val="FE4447"/>
-                </a:solidFill>
-                <a:latin typeface="Georgia" pitchFamily="34" charset="0"/>
-                <a:ea typeface="Georgia" pitchFamily="34" charset="-122"/>
-                <a:cs typeface="Georgia" pitchFamily="34" charset="-120"/>
-              </a:rPr>
-              <a:t>Learning objective</a:t>
-            </a:r>
-            <a:endParaRPr lang="en-US" sz="1800" dirty="0"/>
-          </a:p>
-        </p:txBody>
-      </p:sp>
-      <p:sp>
-        <p:nvSpPr>
-          <p:cNvPr id="6" name="Text 4"/>
-          <p:cNvSpPr/>
-          <p:nvPr/>
-        </p:nvSpPr>
-        <p:spPr>
-          <a:xfrm>
-            <a:off x="406301" y="1637854"/>
-            <a:ext cx="8498026" cy="639812"/>
-          </a:xfrm>
-          <a:prstGeom prst="rect">
-            <a:avLst/>
-          </a:prstGeom>
-          <a:noFill/>
-          <a:ln/>
-        </p:spPr>
-        <p:txBody>
-          <a:bodyPr wrap="square" lIns="0" tIns="0" rIns="0" bIns="0" rtlCol="0" anchor="t"/>
-          <a:lstStyle/>
-          <a:p>
-            <a:pPr algn="l" indent="0" marL="0">
-              <a:lnSpc>
-                <a:spcPts val="1680"/>
-              </a:lnSpc>
-              <a:spcBef>
-                <a:spcPts val="300"/>
-              </a:spcBef>
-              <a:spcAft>
-                <a:spcPts val="300"/>
-              </a:spcAft>
-              <a:buNone/>
-            </a:pPr>
-            <a:r>
-              <a:rPr lang="en-US" sz="1200" dirty="0">
-                <a:solidFill>
-                  <a:srgbClr val="1C2833"/>
-                </a:solidFill>
-                <a:latin typeface="Arial" pitchFamily="34" charset="0"/>
-                <a:ea typeface="Arial" pitchFamily="34" charset="-122"/>
-                <a:cs typeface="Arial" pitchFamily="34" charset="-120"/>
-              </a:rPr>
-              <a:t>By the end of this lesson, students will identify which multiplications are well-suited to the </a:t>
-            </a:r>
-            <a:pPr algn="l" indent="0" marL="0">
-              <a:lnSpc>
-                <a:spcPts val="1680"/>
-              </a:lnSpc>
-              <a:spcBef>
-                <a:spcPts val="300"/>
-              </a:spcBef>
-              <a:spcAft>
-                <a:spcPts val="300"/>
-              </a:spcAft>
-              <a:buNone/>
-            </a:pPr>
-            <a:r>
-              <a:rPr lang="en-US" sz="1200" i="1" dirty="0">
-                <a:solidFill>
-                  <a:srgbClr val="1C2833"/>
-                </a:solidFill>
-                <a:latin typeface="Arial" pitchFamily="34" charset="0"/>
-                <a:ea typeface="Arial" pitchFamily="34" charset="-122"/>
-                <a:cs typeface="Arial" pitchFamily="34" charset="-120"/>
-              </a:rPr>
-              <a:t>Ekādhikena</a:t>
-            </a:r>
-            <a:pPr algn="l" indent="0" marL="0">
-              <a:lnSpc>
-                <a:spcPts val="1680"/>
-              </a:lnSpc>
-              <a:spcBef>
-                <a:spcPts val="300"/>
-              </a:spcBef>
-              <a:spcAft>
-                <a:spcPts val="300"/>
-              </a:spcAft>
-              <a:buNone/>
-            </a:pPr>
-            <a:r>
-              <a:rPr lang="en-US" sz="1200" dirty="0">
-                <a:solidFill>
-                  <a:srgbClr val="1C2833"/>
-                </a:solidFill>
-                <a:latin typeface="Arial" pitchFamily="34" charset="0"/>
-                <a:ea typeface="Arial" pitchFamily="34" charset="-122"/>
-                <a:cs typeface="Arial" pitchFamily="34" charset="-120"/>
-              </a:rPr>
-              <a:t>/</a:t>
-            </a:r>
-            <a:pPr algn="l" indent="0" marL="0">
-              <a:lnSpc>
-                <a:spcPts val="1680"/>
-              </a:lnSpc>
-              <a:spcBef>
-                <a:spcPts val="300"/>
-              </a:spcBef>
-              <a:spcAft>
-                <a:spcPts val="300"/>
-              </a:spcAft>
-              <a:buNone/>
-            </a:pPr>
-            <a:r>
-              <a:rPr lang="en-US" sz="1200" i="1" dirty="0">
-                <a:solidFill>
-                  <a:srgbClr val="1C2833"/>
-                </a:solidFill>
-                <a:latin typeface="Arial" pitchFamily="34" charset="0"/>
-                <a:ea typeface="Arial" pitchFamily="34" charset="-122"/>
-                <a:cs typeface="Arial" pitchFamily="34" charset="-120"/>
-              </a:rPr>
-              <a:t>Anurūpyeṇa</a:t>
-            </a:r>
-            <a:pPr algn="l" indent="0" marL="0">
-              <a:lnSpc>
-                <a:spcPts val="1680"/>
-              </a:lnSpc>
-              <a:spcBef>
-                <a:spcPts val="300"/>
-              </a:spcBef>
-              <a:spcAft>
-                <a:spcPts val="300"/>
-              </a:spcAft>
-              <a:buNone/>
-            </a:pPr>
-            <a:r>
-              <a:rPr lang="en-US" sz="1200" dirty="0">
-                <a:solidFill>
-                  <a:srgbClr val="1C2833"/>
-                </a:solidFill>
-                <a:latin typeface="Arial" pitchFamily="34" charset="0"/>
-                <a:ea typeface="Arial" pitchFamily="34" charset="-122"/>
-                <a:cs typeface="Arial" pitchFamily="34" charset="-120"/>
-              </a:rPr>
-              <a:t> family and which are not, and will articulate the conditions that make a different sūtra (</a:t>
-            </a:r>
-            <a:pPr algn="l" indent="0" marL="0">
-              <a:lnSpc>
-                <a:spcPts val="1680"/>
-              </a:lnSpc>
-              <a:spcBef>
-                <a:spcPts val="300"/>
-              </a:spcBef>
-              <a:spcAft>
-                <a:spcPts val="300"/>
-              </a:spcAft>
-              <a:buNone/>
-            </a:pPr>
-            <a:r>
-              <a:rPr lang="en-US" sz="1200" i="1" dirty="0">
-                <a:solidFill>
-                  <a:srgbClr val="1C2833"/>
-                </a:solidFill>
-                <a:latin typeface="Arial" pitchFamily="34" charset="0"/>
-                <a:ea typeface="Arial" pitchFamily="34" charset="-122"/>
-                <a:cs typeface="Arial" pitchFamily="34" charset="-120"/>
-              </a:rPr>
-              <a:t>Nikhilam</a:t>
-            </a:r>
-            <a:pPr algn="l" indent="0" marL="0">
-              <a:lnSpc>
-                <a:spcPts val="1680"/>
-              </a:lnSpc>
-              <a:spcBef>
-                <a:spcPts val="300"/>
-              </a:spcBef>
-              <a:spcAft>
-                <a:spcPts val="300"/>
-              </a:spcAft>
-              <a:buNone/>
-            </a:pPr>
-            <a:r>
-              <a:rPr lang="en-US" sz="1200" dirty="0">
-                <a:solidFill>
-                  <a:srgbClr val="1C2833"/>
-                </a:solidFill>
-                <a:latin typeface="Arial" pitchFamily="34" charset="0"/>
-                <a:ea typeface="Arial" pitchFamily="34" charset="-122"/>
-                <a:cs typeface="Arial" pitchFamily="34" charset="-120"/>
-              </a:rPr>
-              <a:t> or </a:t>
-            </a:r>
-            <a:pPr algn="l" indent="0" marL="0">
-              <a:lnSpc>
-                <a:spcPts val="1680"/>
-              </a:lnSpc>
-              <a:spcBef>
-                <a:spcPts val="300"/>
-              </a:spcBef>
-              <a:spcAft>
-                <a:spcPts val="300"/>
-              </a:spcAft>
-              <a:buNone/>
-            </a:pPr>
-            <a:r>
-              <a:rPr lang="en-US" sz="1200" i="1" dirty="0">
-                <a:solidFill>
-                  <a:srgbClr val="1C2833"/>
-                </a:solidFill>
-                <a:latin typeface="Arial" pitchFamily="34" charset="0"/>
-                <a:ea typeface="Arial" pitchFamily="34" charset="-122"/>
-                <a:cs typeface="Arial" pitchFamily="34" charset="-120"/>
-              </a:rPr>
-              <a:t>Ūrdhva-tiryagbhyāṁ</a:t>
-            </a:r>
-            <a:pPr algn="l" indent="0" marL="0">
-              <a:lnSpc>
-                <a:spcPts val="1680"/>
-              </a:lnSpc>
-              <a:spcBef>
-                <a:spcPts val="300"/>
-              </a:spcBef>
-              <a:spcAft>
-                <a:spcPts val="300"/>
-              </a:spcAft>
-              <a:buNone/>
-            </a:pPr>
-            <a:r>
-              <a:rPr lang="en-US" sz="1200" dirty="0">
-                <a:solidFill>
-                  <a:srgbClr val="1C2833"/>
-                </a:solidFill>
-                <a:latin typeface="Arial" pitchFamily="34" charset="0"/>
-                <a:ea typeface="Arial" pitchFamily="34" charset="-122"/>
-                <a:cs typeface="Arial" pitchFamily="34" charset="-120"/>
-              </a:rPr>
-              <a:t>) more appropriate.</a:t>
-            </a:r>
-            <a:endParaRPr lang="en-US" sz="1200" dirty="0"/>
-          </a:p>
-        </p:txBody>
-      </p:sp>
-      <p:sp>
-        <p:nvSpPr>
-          <p:cNvPr id="7" name="Text 5"/>
-          <p:cNvSpPr/>
-          <p:nvPr/>
-        </p:nvSpPr>
-        <p:spPr>
-          <a:xfrm>
             <a:off x="406301" y="4434929"/>
             <a:ext cx="8498026" cy="213271"/>
           </a:xfrm>
@@ -2570,7 +2913,7 @@
                 <a:ea typeface="Georgia" pitchFamily="34" charset="-122"/>
                 <a:cs typeface="Georgia" pitchFamily="34" charset="-120"/>
               </a:rPr>
-              <a:t>Differentiation</a:t>
+              <a:t>Core (20 min) — Where the trick breaks down (cont.)</a:t>
             </a:r>
             <a:endParaRPr lang="en-US" sz="1800" dirty="0"/>
           </a:p>
@@ -2585,7 +2928,7 @@
         <p:spPr>
           <a:xfrm>
             <a:off x="634901" y="883593"/>
-            <a:ext cx="8102798" cy="731341"/>
+            <a:ext cx="8102798" cy="487561"/>
           </a:xfrm>
           <a:prstGeom prst="rect">
             <a:avLst/>
@@ -2616,7 +2959,7 @@
                 <a:ea typeface="Arial" pitchFamily="34" charset="-122"/>
                 <a:cs typeface="Arial" pitchFamily="34" charset="-120"/>
               </a:rPr>
-              <a:t>Tier up:</a:t>
+              <a:t>Connect to Module 9 / 11.</a:t>
             </a:r>
             <a:pPr algn="l" indent="0" marL="0">
               <a:lnSpc>
@@ -2636,10 +2979,112 @@
                 <a:ea typeface="Arial" pitchFamily="34" charset="-122"/>
                 <a:cs typeface="Arial" pitchFamily="34" charset="-120"/>
               </a:rPr>
-              <a:t> Find any 2-digit × 2-digit multiplication where the ×11 trick is NOT optimal but a different mental-math shortcut would beat long multiplication. (Examples: 25 × 24 = 25 × 24 = 600 via 25×4×6; 75 × 12 = 900 via 75×12 = 75 × 12.)</a:t>
+              <a:t> Future modules will cover </a:t>
+            </a:r>
+            <a:pPr algn="l" indent="0" marL="0">
+              <a:lnSpc>
+                <a:spcPts val="1620"/>
+              </a:lnSpc>
+              <a:spcAft>
+                <a:spcPts val="300"/>
+              </a:spcAft>
+              <a:buNone/>
+            </a:pPr>
+            <a:r>
+              <a:rPr lang="en-US" sz="1200" i="1" dirty="0">
+                <a:solidFill>
+                  <a:srgbClr val="1C2833"/>
+                </a:solidFill>
+                <a:latin typeface="Arial" pitchFamily="34" charset="0"/>
+                <a:ea typeface="Arial" pitchFamily="34" charset="-122"/>
+                <a:cs typeface="Arial" pitchFamily="34" charset="-120"/>
+              </a:rPr>
+              <a:t>Nikhilam</a:t>
+            </a:r>
+            <a:pPr algn="l" indent="0" marL="0">
+              <a:lnSpc>
+                <a:spcPts val="1620"/>
+              </a:lnSpc>
+              <a:spcAft>
+                <a:spcPts val="300"/>
+              </a:spcAft>
+              <a:buNone/>
+            </a:pPr>
+            <a:r>
+              <a:rPr lang="en-US" sz="1200" dirty="0">
+                <a:solidFill>
+                  <a:srgbClr val="1C2833"/>
+                </a:solidFill>
+                <a:latin typeface="Arial" pitchFamily="34" charset="0"/>
+                <a:ea typeface="Arial" pitchFamily="34" charset="-122"/>
+                <a:cs typeface="Arial" pitchFamily="34" charset="-120"/>
+              </a:rPr>
+              <a:t> and </a:t>
+            </a:r>
+            <a:pPr algn="l" indent="0" marL="0">
+              <a:lnSpc>
+                <a:spcPts val="1620"/>
+              </a:lnSpc>
+              <a:spcAft>
+                <a:spcPts val="300"/>
+              </a:spcAft>
+              <a:buNone/>
+            </a:pPr>
+            <a:r>
+              <a:rPr lang="en-US" sz="1200" i="1" dirty="0">
+                <a:solidFill>
+                  <a:srgbClr val="1C2833"/>
+                </a:solidFill>
+                <a:latin typeface="Arial" pitchFamily="34" charset="0"/>
+                <a:ea typeface="Arial" pitchFamily="34" charset="-122"/>
+                <a:cs typeface="Arial" pitchFamily="34" charset="-120"/>
+              </a:rPr>
+              <a:t>Ūrdhva-tiryagbhyāṁ</a:t>
+            </a:r>
+            <a:pPr algn="l" indent="0" marL="0">
+              <a:lnSpc>
+                <a:spcPts val="1620"/>
+              </a:lnSpc>
+              <a:spcAft>
+                <a:spcPts val="300"/>
+              </a:spcAft>
+              <a:buNone/>
+            </a:pPr>
+            <a:r>
+              <a:rPr lang="en-US" sz="1200" dirty="0">
+                <a:solidFill>
+                  <a:srgbClr val="1C2833"/>
+                </a:solidFill>
+                <a:latin typeface="Arial" pitchFamily="34" charset="0"/>
+                <a:ea typeface="Arial" pitchFamily="34" charset="-122"/>
+                <a:cs typeface="Arial" pitchFamily="34" charset="-120"/>
+              </a:rPr>
+              <a:t> in depth. Today we just note their existence.</a:t>
             </a:r>
             <a:endParaRPr lang="en-US" sz="1200" dirty="0"/>
           </a:p>
+        </p:txBody>
+      </p:sp>
+      <p:sp>
+        <p:nvSpPr>
+          <p:cNvPr id="5" name="Text 3"/>
+          <p:cNvSpPr/>
+          <p:nvPr/>
+        </p:nvSpPr>
+        <p:spPr>
+          <a:xfrm>
+            <a:off x="634901" y="1472654"/>
+            <a:ext cx="8102798" cy="693241"/>
+          </a:xfrm>
+          <a:prstGeom prst="rect">
+            <a:avLst/>
+          </a:prstGeom>
+          <a:noFill/>
+          <a:ln/>
+        </p:spPr>
+        <p:txBody>
+          <a:bodyPr wrap="square" lIns="0" tIns="0" rIns="0" bIns="0" rtlCol="0" anchor="t"/>
+          <a:lstStyle/>
           <a:p>
             <a:pPr algn="l" marL="342900" indent="-342900">
               <a:lnSpc>
@@ -2660,7 +3105,7 @@
                 <a:ea typeface="Arial" pitchFamily="34" charset="-122"/>
                 <a:cs typeface="Arial" pitchFamily="34" charset="-120"/>
               </a:rPr>
-              <a:t>Tier down:</a:t>
+              <a:t>The bigger lesson.</a:t>
             </a:r>
             <a:pPr algn="l" indent="0" marL="0">
               <a:lnSpc>
@@ -2680,7 +3125,27 @@
                 <a:ea typeface="Arial" pitchFamily="34" charset="-122"/>
                 <a:cs typeface="Arial" pitchFamily="34" charset="-120"/>
               </a:rPr>
-              <a:t> Focus on identifying ×11 vs. non-×11 cases. Skip the "best alternative method" question.</a:t>
+              <a:t> </a:t>
+            </a:r>
+            <a:pPr algn="l" indent="0" marL="0">
+              <a:lnSpc>
+                <a:spcPts val="1620"/>
+              </a:lnSpc>
+              <a:spcAft>
+                <a:spcPts val="300"/>
+              </a:spcAft>
+              <a:buNone/>
+            </a:pPr>
+            <a:r>
+              <a:rPr lang="en-US" sz="1200" i="1" dirty="0">
+                <a:solidFill>
+                  <a:srgbClr val="1C2833"/>
+                </a:solidFill>
+                <a:latin typeface="Arial" pitchFamily="34" charset="0"/>
+                <a:ea typeface="Arial" pitchFamily="34" charset="-122"/>
+                <a:cs typeface="Arial" pitchFamily="34" charset="-120"/>
+              </a:rPr>
+              <a:t>"Every mental-math shortcut has a domain. Knowing WHEN a trick applies is part of being a fluent mathematician. The standard long-multiplication algorithm always works; the shortcuts are faster only inside their domain."</a:t>
             </a:r>
             <a:endParaRPr lang="en-US" sz="1200" dirty="0"/>
           </a:p>
@@ -2688,7 +3153,7 @@
       </p:sp>
       <p:sp>
         <p:nvSpPr>
-          <p:cNvPr id="5" name="Text 3"/>
+          <p:cNvPr id="6" name="Text 4"/>
           <p:cNvSpPr/>
           <p:nvPr/>
         </p:nvSpPr>
@@ -2838,7 +3303,7 @@
                 <a:ea typeface="Georgia" pitchFamily="34" charset="-122"/>
                 <a:cs typeface="Georgia" pitchFamily="34" charset="-120"/>
               </a:rPr>
-              <a:t>Teacher notes</a:t>
+              <a:t>Activity (15 min) — Comparison drill</a:t>
             </a:r>
             <a:endParaRPr lang="en-US" sz="1800" dirty="0"/>
           </a:p>
@@ -2852,8 +3317,8 @@
         </p:nvSpPr>
         <p:spPr>
           <a:xfrm>
-            <a:off x="406301" y="870942"/>
-            <a:ext cx="8498026" cy="853083"/>
+            <a:off x="634901" y="883593"/>
+            <a:ext cx="8102798" cy="487561"/>
           </a:xfrm>
           <a:prstGeom prst="rect">
             <a:avLst/>
@@ -2865,17 +3330,15 @@
           <a:bodyPr wrap="square" lIns="0" tIns="0" rIns="0" bIns="0" rtlCol="0" anchor="t"/>
           <a:lstStyle/>
           <a:p>
-            <a:pPr algn="l" indent="0" marL="0">
-              <a:lnSpc>
-                <a:spcPts val="1680"/>
-              </a:lnSpc>
-              <a:spcBef>
-                <a:spcPts val="300"/>
-              </a:spcBef>
-              <a:spcAft>
-                <a:spcPts val="300"/>
-              </a:spcAft>
-              <a:buNone/>
+            <a:pPr algn="l" marL="342900" indent="-342900">
+              <a:lnSpc>
+                <a:spcPts val="1620"/>
+              </a:lnSpc>
+              <a:spcAft>
+                <a:spcPts val="300"/>
+              </a:spcAft>
+              <a:buSzPct val="100000"/>
+              <a:buChar char="•"/>
             </a:pPr>
             <a:r>
               <a:rPr lang="en-US" sz="1200" dirty="0">
@@ -2886,15 +3349,12 @@
                 <a:ea typeface="Arial" pitchFamily="34" charset="-122"/>
                 <a:cs typeface="Arial" pitchFamily="34" charset="-120"/>
               </a:rPr>
-              <a:t>– This day is short by design — it's the honesty hour. Don't over-fill. – Some students will resist the framing </a:t>
-            </a:r>
-            <a:pPr algn="l" indent="0" marL="0">
-              <a:lnSpc>
-                <a:spcPts val="1680"/>
-              </a:lnSpc>
-              <a:spcBef>
-                <a:spcPts val="300"/>
-              </a:spcBef>
+              <a:t>8 problems. For each, decide </a:t>
+            </a:r>
+            <a:pPr algn="l" indent="0" marL="0">
+              <a:lnSpc>
+                <a:spcPts val="1620"/>
+              </a:lnSpc>
               <a:spcAft>
                 <a:spcPts val="300"/>
               </a:spcAft>
@@ -2909,15 +3369,12 @@
                 <a:ea typeface="Arial" pitchFamily="34" charset="-122"/>
                 <a:cs typeface="Arial" pitchFamily="34" charset="-120"/>
               </a:rPr>
-              <a:t>"the trick has a limited domain"</a:t>
-            </a:r>
-            <a:pPr algn="l" indent="0" marL="0">
-              <a:lnSpc>
-                <a:spcPts val="1680"/>
-              </a:lnSpc>
-              <a:spcBef>
-                <a:spcPts val="300"/>
-              </a:spcBef>
+              <a:t>before</a:t>
+            </a:r>
+            <a:pPr algn="l" indent="0" marL="0">
+              <a:lnSpc>
+                <a:spcPts val="1620"/>
+              </a:lnSpc>
               <a:spcAft>
                 <a:spcPts val="300"/>
               </a:spcAft>
@@ -2932,53 +3389,7 @@
                 <a:ea typeface="Arial" pitchFamily="34" charset="-122"/>
                 <a:cs typeface="Arial" pitchFamily="34" charset="-120"/>
               </a:rPr>
-              <a:t> and try to force-fit ×23 into a pattern. Honour the impulse, but redirect: </a:t>
-            </a:r>
-            <a:pPr algn="l" indent="0" marL="0">
-              <a:lnSpc>
-                <a:spcPts val="1680"/>
-              </a:lnSpc>
-              <a:spcBef>
-                <a:spcPts val="300"/>
-              </a:spcBef>
-              <a:spcAft>
-                <a:spcPts val="300"/>
-              </a:spcAft>
-              <a:buNone/>
-            </a:pPr>
-            <a:r>
-              <a:rPr lang="en-US" sz="1200" i="1" dirty="0">
-                <a:solidFill>
-                  <a:srgbClr val="1C2833"/>
-                </a:solidFill>
-                <a:latin typeface="Arial" pitchFamily="34" charset="0"/>
-                <a:ea typeface="Arial" pitchFamily="34" charset="-122"/>
-                <a:cs typeface="Arial" pitchFamily="34" charset="-120"/>
-              </a:rPr>
-              <a:t>"You'd be inventing your own technique — which is great, but it's not what this trick does."</a:t>
-            </a:r>
-            <a:pPr algn="l" indent="0" marL="0">
-              <a:lnSpc>
-                <a:spcPts val="1680"/>
-              </a:lnSpc>
-              <a:spcBef>
-                <a:spcPts val="300"/>
-              </a:spcBef>
-              <a:spcAft>
-                <a:spcPts val="300"/>
-              </a:spcAft>
-              <a:buNone/>
-            </a:pPr>
-            <a:r>
-              <a:rPr lang="en-US" sz="1200" dirty="0">
-                <a:solidFill>
-                  <a:srgbClr val="1C2833"/>
-                </a:solidFill>
-                <a:latin typeface="Arial" pitchFamily="34" charset="0"/>
-                <a:ea typeface="Arial" pitchFamily="34" charset="-122"/>
-                <a:cs typeface="Arial" pitchFamily="34" charset="-120"/>
-              </a:rPr>
-              <a:t> – Mention that Tirthaji's 16 sūtras collectively cover a wide territory; ×11 is just one of them. This sets up Day 8.</a:t>
+              <a:t> solving: would you use (A) the ×11 family trick, (B) long multiplication, or (C) a different mental shortcut you can articulate?</a:t>
             </a:r>
             <a:endParaRPr lang="en-US" sz="1200" dirty="0"/>
           </a:p>
@@ -3136,7 +3547,7 @@
                 <a:ea typeface="Georgia" pitchFamily="34" charset="-122"/>
                 <a:cs typeface="Georgia" pitchFamily="34" charset="-120"/>
               </a:rPr>
-              <a:t>Citation(s) used in this lesson</a:t>
+              <a:t>Activity (15 min) — Comparison drill (cont.)</a:t>
             </a:r>
             <a:endParaRPr lang="en-US" sz="1800" dirty="0"/>
           </a:p>
@@ -3150,8 +3561,61 @@
         </p:nvSpPr>
         <p:spPr>
           <a:xfrm>
-            <a:off x="406301" y="870942"/>
-            <a:ext cx="8498026" cy="213271"/>
+            <a:off x="406301" y="883593"/>
+            <a:ext cx="8331398" cy="952202"/>
+          </a:xfrm>
+          <a:prstGeom prst="rect">
+            <a:avLst/>
+          </a:prstGeom>
+          <a:solidFill>
+            <a:srgbClr val="F4F8F9"/>
+          </a:solidFill>
+          <a:ln/>
+        </p:spPr>
+        <p:txBody>
+          <a:bodyPr wrap="square" rtlCol="0" anchor="ctr"/>
+          <a:lstStyle/>
+          <a:p>
+            <a:pPr indent="0" marL="0">
+              <a:buNone/>
+            </a:pPr>
+            <a:endParaRPr lang="en-US" dirty="0"/>
+          </a:p>
+        </p:txBody>
+      </p:sp>
+      <p:sp>
+        <p:nvSpPr>
+          <p:cNvPr id="5" name="Shape 3"/>
+          <p:cNvSpPr/>
+          <p:nvPr/>
+        </p:nvSpPr>
+        <p:spPr>
+          <a:xfrm>
+            <a:off x="430113" y="883593"/>
+            <a:ext cx="0" cy="952202"/>
+          </a:xfrm>
+          <a:prstGeom prst="line">
+            <a:avLst/>
+          </a:prstGeom>
+          <a:noFill/>
+          <a:ln w="47625">
+            <a:solidFill>
+              <a:srgbClr val="277884"/>
+            </a:solidFill>
+            <a:prstDash val="solid"/>
+          </a:ln>
+        </p:spPr>
+      </p:sp>
+      <p:sp>
+        <p:nvSpPr>
+          <p:cNvPr id="6" name="Text 4"/>
+          <p:cNvSpPr/>
+          <p:nvPr/>
+        </p:nvSpPr>
+        <p:spPr>
+          <a:xfrm>
+            <a:off x="631627" y="1010543"/>
+            <a:ext cx="8086939" cy="174575"/>
           </a:xfrm>
           <a:prstGeom prst="rect">
             <a:avLst/>
@@ -3165,133 +3629,35 @@
           <a:p>
             <a:pPr algn="l" indent="0" marL="0">
               <a:lnSpc>
-                <a:spcPts val="1680"/>
-              </a:lnSpc>
-              <a:spcBef>
-                <a:spcPts val="300"/>
-              </a:spcBef>
-              <a:spcAft>
-                <a:spcPts val="300"/>
-              </a:spcAft>
-              <a:buNone/>
-            </a:pPr>
-            <a:r>
-              <a:rPr lang="en-US" sz="1200" dirty="0">
-                <a:solidFill>
-                  <a:srgbClr val="1C2833"/>
-                </a:solidFill>
-                <a:latin typeface="Arial" pitchFamily="34" charset="0"/>
-                <a:ea typeface="Arial" pitchFamily="34" charset="-122"/>
-                <a:cs typeface="Arial" pitchFamily="34" charset="-120"/>
-              </a:rPr>
-              <a:t>– Tirthaji (1965), sūtra list (especially </a:t>
-            </a:r>
-            <a:pPr algn="l" indent="0" marL="0">
-              <a:lnSpc>
-                <a:spcPts val="1680"/>
-              </a:lnSpc>
-              <a:spcBef>
-                <a:spcPts val="300"/>
-              </a:spcBef>
-              <a:spcAft>
-                <a:spcPts val="300"/>
-              </a:spcAft>
-              <a:buNone/>
-            </a:pPr>
-            <a:r>
-              <a:rPr lang="en-US" sz="1200" i="1" dirty="0">
-                <a:solidFill>
-                  <a:srgbClr val="1C2833"/>
-                </a:solidFill>
-                <a:latin typeface="Arial" pitchFamily="34" charset="0"/>
-                <a:ea typeface="Arial" pitchFamily="34" charset="-122"/>
-                <a:cs typeface="Arial" pitchFamily="34" charset="-120"/>
-              </a:rPr>
-              <a:t>Nikhilam</a:t>
-            </a:r>
-            <a:pPr algn="l" indent="0" marL="0">
-              <a:lnSpc>
-                <a:spcPts val="1680"/>
-              </a:lnSpc>
-              <a:spcBef>
-                <a:spcPts val="300"/>
-              </a:spcBef>
-              <a:spcAft>
-                <a:spcPts val="300"/>
-              </a:spcAft>
-              <a:buNone/>
-            </a:pPr>
-            <a:r>
-              <a:rPr lang="en-US" sz="1200" dirty="0">
-                <a:solidFill>
-                  <a:srgbClr val="1C2833"/>
-                </a:solidFill>
-                <a:latin typeface="Arial" pitchFamily="34" charset="0"/>
-                <a:ea typeface="Arial" pitchFamily="34" charset="-122"/>
-                <a:cs typeface="Arial" pitchFamily="34" charset="-120"/>
-              </a:rPr>
-              <a:t> — sūtra 2, and </a:t>
-            </a:r>
-            <a:pPr algn="l" indent="0" marL="0">
-              <a:lnSpc>
-                <a:spcPts val="1680"/>
-              </a:lnSpc>
-              <a:spcBef>
-                <a:spcPts val="300"/>
-              </a:spcBef>
-              <a:spcAft>
-                <a:spcPts val="300"/>
-              </a:spcAft>
-              <a:buNone/>
-            </a:pPr>
-            <a:r>
-              <a:rPr lang="en-US" sz="1200" i="1" dirty="0">
-                <a:solidFill>
-                  <a:srgbClr val="1C2833"/>
-                </a:solidFill>
-                <a:latin typeface="Arial" pitchFamily="34" charset="0"/>
-                <a:ea typeface="Arial" pitchFamily="34" charset="-122"/>
-                <a:cs typeface="Arial" pitchFamily="34" charset="-120"/>
-              </a:rPr>
-              <a:t>Ūrdhva-tiryagbhyāṁ</a:t>
-            </a:r>
-            <a:pPr algn="l" indent="0" marL="0">
-              <a:lnSpc>
-                <a:spcPts val="1680"/>
-              </a:lnSpc>
-              <a:spcBef>
-                <a:spcPts val="300"/>
-              </a:spcBef>
-              <a:spcAft>
-                <a:spcPts val="300"/>
-              </a:spcAft>
-              <a:buNone/>
-            </a:pPr>
-            <a:r>
-              <a:rPr lang="en-US" sz="1200" dirty="0">
-                <a:solidFill>
-                  <a:srgbClr val="1C2833"/>
-                </a:solidFill>
-                <a:latin typeface="Arial" pitchFamily="34" charset="0"/>
-                <a:ea typeface="Arial" pitchFamily="34" charset="-122"/>
-                <a:cs typeface="Arial" pitchFamily="34" charset="-120"/>
-              </a:rPr>
-              <a:t> — sūtra 3).</a:t>
-            </a:r>
-            <a:endParaRPr lang="en-US" sz="1200" dirty="0"/>
-          </a:p>
-        </p:txBody>
-      </p:sp>
-      <p:sp>
-        <p:nvSpPr>
-          <p:cNvPr id="5" name="Text 3"/>
-          <p:cNvSpPr/>
-          <p:nvPr/>
-        </p:nvSpPr>
-        <p:spPr>
-          <a:xfrm>
-            <a:off x="634901" y="1173063"/>
-            <a:ext cx="8102798" cy="281880"/>
+                <a:spcPts val="1375"/>
+              </a:lnSpc>
+              <a:buNone/>
+            </a:pPr>
+            <a:r>
+              <a:rPr lang="en-US" sz="1100" dirty="0">
+                <a:solidFill>
+                  <a:srgbClr val="1C2833"/>
+                </a:solidFill>
+                <a:latin typeface="Courier New" pitchFamily="34" charset="0"/>
+                <a:ea typeface="Courier New" pitchFamily="34" charset="-122"/>
+                <a:cs typeface="Courier New" pitchFamily="34" charset="-120"/>
+              </a:rPr>
+              <a:t>1. 67 × 11        5. 84 × 23</a:t>
+            </a:r>
+            <a:endParaRPr lang="en-US" sz="1100" dirty="0"/>
+          </a:p>
+        </p:txBody>
+      </p:sp>
+      <p:sp>
+        <p:nvSpPr>
+          <p:cNvPr id="7" name="Text 5"/>
+          <p:cNvSpPr/>
+          <p:nvPr/>
+        </p:nvSpPr>
+        <p:spPr>
+          <a:xfrm>
+            <a:off x="631627" y="1185118"/>
+            <a:ext cx="8086939" cy="174575"/>
           </a:xfrm>
           <a:prstGeom prst="rect">
             <a:avLst/>
@@ -3303,6 +3669,290 @@
           <a:bodyPr wrap="square" lIns="0" tIns="0" rIns="0" bIns="0" rtlCol="0" anchor="t"/>
           <a:lstStyle/>
           <a:p>
+            <a:pPr algn="l" indent="0" marL="0">
+              <a:lnSpc>
+                <a:spcPts val="1375"/>
+              </a:lnSpc>
+              <a:buNone/>
+            </a:pPr>
+            <a:r>
+              <a:rPr lang="en-US" sz="1100" dirty="0">
+                <a:solidFill>
+                  <a:srgbClr val="1C2833"/>
+                </a:solidFill>
+                <a:latin typeface="Courier New" pitchFamily="34" charset="0"/>
+                <a:ea typeface="Courier New" pitchFamily="34" charset="-122"/>
+                <a:cs typeface="Courier New" pitchFamily="34" charset="-120"/>
+              </a:rPr>
+              <a:t>2. 47 × 13        6. 99 × 99</a:t>
+            </a:r>
+            <a:endParaRPr lang="en-US" sz="1100" dirty="0"/>
+          </a:p>
+        </p:txBody>
+      </p:sp>
+      <p:sp>
+        <p:nvSpPr>
+          <p:cNvPr id="8" name="Text 6"/>
+          <p:cNvSpPr/>
+          <p:nvPr/>
+        </p:nvSpPr>
+        <p:spPr>
+          <a:xfrm>
+            <a:off x="631627" y="1359694"/>
+            <a:ext cx="8086939" cy="174575"/>
+          </a:xfrm>
+          <a:prstGeom prst="rect">
+            <a:avLst/>
+          </a:prstGeom>
+          <a:noFill/>
+          <a:ln/>
+        </p:spPr>
+        <p:txBody>
+          <a:bodyPr wrap="square" lIns="0" tIns="0" rIns="0" bIns="0" rtlCol="0" anchor="t"/>
+          <a:lstStyle/>
+          <a:p>
+            <a:pPr algn="l" indent="0" marL="0">
+              <a:lnSpc>
+                <a:spcPts val="1375"/>
+              </a:lnSpc>
+              <a:buNone/>
+            </a:pPr>
+            <a:r>
+              <a:rPr lang="en-US" sz="1100" dirty="0">
+                <a:solidFill>
+                  <a:srgbClr val="1C2833"/>
+                </a:solidFill>
+                <a:latin typeface="Courier New" pitchFamily="34" charset="0"/>
+                <a:ea typeface="Courier New" pitchFamily="34" charset="-122"/>
+                <a:cs typeface="Courier New" pitchFamily="34" charset="-120"/>
+              </a:rPr>
+              <a:t>3. 56 × 19        7. 25 × 12</a:t>
+            </a:r>
+            <a:endParaRPr lang="en-US" sz="1100" dirty="0"/>
+          </a:p>
+        </p:txBody>
+      </p:sp>
+      <p:sp>
+        <p:nvSpPr>
+          <p:cNvPr id="9" name="Text 7"/>
+          <p:cNvSpPr/>
+          <p:nvPr/>
+        </p:nvSpPr>
+        <p:spPr>
+          <a:xfrm>
+            <a:off x="631627" y="1534269"/>
+            <a:ext cx="8086939" cy="174575"/>
+          </a:xfrm>
+          <a:prstGeom prst="rect">
+            <a:avLst/>
+          </a:prstGeom>
+          <a:noFill/>
+          <a:ln/>
+        </p:spPr>
+        <p:txBody>
+          <a:bodyPr wrap="square" lIns="0" tIns="0" rIns="0" bIns="0" rtlCol="0" anchor="t"/>
+          <a:lstStyle/>
+          <a:p>
+            <a:pPr algn="l" indent="0" marL="0">
+              <a:lnSpc>
+                <a:spcPts val="1375"/>
+              </a:lnSpc>
+              <a:buNone/>
+            </a:pPr>
+            <a:r>
+              <a:rPr lang="en-US" sz="1100" dirty="0">
+                <a:solidFill>
+                  <a:srgbClr val="1C2833"/>
+                </a:solidFill>
+                <a:latin typeface="Courier New" pitchFamily="34" charset="0"/>
+                <a:ea typeface="Courier New" pitchFamily="34" charset="-122"/>
+                <a:cs typeface="Courier New" pitchFamily="34" charset="-120"/>
+              </a:rPr>
+              <a:t>4. 38 × 47        8. 102 × 11</a:t>
+            </a:r>
+            <a:endParaRPr lang="en-US" sz="1100" dirty="0"/>
+          </a:p>
+        </p:txBody>
+      </p:sp>
+      <p:sp>
+        <p:nvSpPr>
+          <p:cNvPr id="10" name="Text 8"/>
+          <p:cNvSpPr/>
+          <p:nvPr/>
+        </p:nvSpPr>
+        <p:spPr>
+          <a:xfrm>
+            <a:off x="406301" y="4434929"/>
+            <a:ext cx="8498026" cy="213271"/>
+          </a:xfrm>
+          <a:prstGeom prst="rect">
+            <a:avLst/>
+          </a:prstGeom>
+          <a:noFill/>
+          <a:ln/>
+        </p:spPr>
+        <p:txBody>
+          <a:bodyPr wrap="square" lIns="0" tIns="0" rIns="0" bIns="0" rtlCol="0" anchor="t"/>
+          <a:lstStyle/>
+          <a:p>
+            <a:pPr algn="l" indent="0" marL="0">
+              <a:lnSpc>
+                <a:spcPts val="1680"/>
+              </a:lnSpc>
+              <a:spcBef>
+                <a:spcPts val="300"/>
+              </a:spcBef>
+              <a:spcAft>
+                <a:spcPts val="300"/>
+              </a:spcAft>
+              <a:buNone/>
+            </a:pPr>
+            <a:r>
+              <a:rPr lang="en-US" sz="1200" dirty="0">
+                <a:solidFill>
+                  <a:srgbClr val="1C2833"/>
+                </a:solidFill>
+                <a:latin typeface="Arial" pitchFamily="34" charset="0"/>
+                <a:ea typeface="Arial" pitchFamily="34" charset="-122"/>
+                <a:cs typeface="Arial" pitchFamily="34" charset="-120"/>
+              </a:rPr>
+              <a:t>Middle ·  · IKS Curriculum</a:t>
+            </a:r>
+            <a:endParaRPr lang="en-US" sz="1200" dirty="0"/>
+          </a:p>
+        </p:txBody>
+      </p:sp>
+    </p:spTree>
+  </p:cSld>
+  <p:clrMapOvr>
+    <a:masterClrMapping/>
+  </p:clrMapOvr>
+</p:sld>
+</file>
+
+<file path=ppt/slides/slide13.xml><?xml version="1.0" encoding="utf-8"?>
+<p:sld xmlns:a="http://schemas.openxmlformats.org/drawingml/2006/main" xmlns:r="http://schemas.openxmlformats.org/officeDocument/2006/relationships" xmlns:p="http://schemas.openxmlformats.org/presentationml/2006/main">
+  <p:cSld name="Slide 13">
+    <p:bg>
+      <p:bgPr>
+        <a:solidFill>
+          <a:srgbClr val="FFFFFF"/>
+        </a:solidFill>
+      </p:bgPr>
+    </p:bg>
+    <p:spTree>
+      <p:nvGrpSpPr>
+        <p:cNvPr id="1" name=""/>
+        <p:cNvGrpSpPr/>
+        <p:nvPr/>
+      </p:nvGrpSpPr>
+      <p:grpSpPr>
+        <a:xfrm>
+          <a:off x="0" y="0"/>
+          <a:ext cx="0" cy="0"/>
+          <a:chOff x="0" y="0"/>
+          <a:chExt cx="0" cy="0"/>
+        </a:xfrm>
+      </p:grpSpPr>
+      <p:sp>
+        <p:nvSpPr>
+          <p:cNvPr id="2" name="Text 0"/>
+          <p:cNvSpPr/>
+          <p:nvPr/>
+        </p:nvSpPr>
+        <p:spPr>
+          <a:xfrm>
+            <a:off x="0" y="0"/>
+            <a:ext cx="9144000" cy="101501"/>
+          </a:xfrm>
+          <a:prstGeom prst="rect">
+            <a:avLst/>
+          </a:prstGeom>
+          <a:solidFill>
+            <a:srgbClr val="277884"/>
+          </a:solidFill>
+          <a:ln/>
+        </p:spPr>
+        <p:txBody>
+          <a:bodyPr wrap="square" rtlCol="0" anchor="ctr"/>
+          <a:lstStyle/>
+          <a:p>
+            <a:pPr indent="0" marL="0">
+              <a:buNone/>
+            </a:pPr>
+            <a:endParaRPr lang="en-US" dirty="0"/>
+          </a:p>
+        </p:txBody>
+      </p:sp>
+      <p:sp>
+        <p:nvSpPr>
+          <p:cNvPr id="3" name="Text 1"/>
+          <p:cNvSpPr/>
+          <p:nvPr/>
+        </p:nvSpPr>
+        <p:spPr>
+          <a:xfrm>
+            <a:off x="406301" y="457051"/>
+            <a:ext cx="8498026" cy="274290"/>
+          </a:xfrm>
+          <a:prstGeom prst="rect">
+            <a:avLst/>
+          </a:prstGeom>
+          <a:noFill/>
+          <a:ln/>
+        </p:spPr>
+        <p:txBody>
+          <a:bodyPr wrap="square" lIns="0" tIns="0" rIns="0" bIns="0" rtlCol="0" anchor="t"/>
+          <a:lstStyle/>
+          <a:p>
+            <a:pPr algn="l" indent="0" marL="0">
+              <a:lnSpc>
+                <a:spcPts val="2160"/>
+              </a:lnSpc>
+              <a:spcBef>
+                <a:spcPts val="600"/>
+              </a:spcBef>
+              <a:spcAft>
+                <a:spcPts val="800"/>
+              </a:spcAft>
+              <a:buNone/>
+            </a:pPr>
+            <a:r>
+              <a:rPr lang="en-US" sz="1800" b="1" dirty="0">
+                <a:solidFill>
+                  <a:srgbClr val="FE4447"/>
+                </a:solidFill>
+                <a:latin typeface="Georgia" pitchFamily="34" charset="0"/>
+                <a:ea typeface="Georgia" pitchFamily="34" charset="-122"/>
+                <a:cs typeface="Georgia" pitchFamily="34" charset="-120"/>
+              </a:rPr>
+              <a:t>Activity (15 min) — Comparison drill (cont.)</a:t>
+            </a:r>
+            <a:endParaRPr lang="en-US" sz="1800" dirty="0"/>
+          </a:p>
+        </p:txBody>
+      </p:sp>
+      <p:sp>
+        <p:nvSpPr>
+          <p:cNvPr id="4" name="Text 2"/>
+          <p:cNvSpPr/>
+          <p:nvPr/>
+        </p:nvSpPr>
+        <p:spPr>
+          <a:xfrm>
+            <a:off x="634901" y="883593"/>
+            <a:ext cx="8102798" cy="525661"/>
+          </a:xfrm>
+          <a:prstGeom prst="rect">
+            <a:avLst/>
+          </a:prstGeom>
+          <a:noFill/>
+          <a:ln/>
+        </p:spPr>
+        <p:txBody>
+          <a:bodyPr wrap="square" lIns="0" tIns="0" rIns="0" bIns="0" rtlCol="0" anchor="t"/>
+          <a:lstStyle/>
+          <a:p>
             <a:pPr algn="l" marL="342900" indent="-342900">
               <a:lnSpc>
                 <a:spcPts val="1620"/>
@@ -3314,6 +3964,254 @@
               <a:buChar char="•"/>
             </a:pPr>
             <a:r>
+              <a:rPr lang="en-US" sz="1200" dirty="0">
+                <a:solidFill>
+                  <a:srgbClr val="1C2833"/>
+                </a:solidFill>
+                <a:latin typeface="Arial" pitchFamily="34" charset="0"/>
+                <a:ea typeface="Arial" pitchFamily="34" charset="-122"/>
+                <a:cs typeface="Arial" pitchFamily="34" charset="-120"/>
+              </a:rPr>
+              <a:t>Pair work. Solve and discuss your method choice.</a:t>
+            </a:r>
+            <a:endParaRPr lang="en-US" sz="1200" dirty="0"/>
+          </a:p>
+          <a:p>
+            <a:pPr algn="l" marL="342900" indent="-342900">
+              <a:lnSpc>
+                <a:spcPts val="1620"/>
+              </a:lnSpc>
+              <a:spcAft>
+                <a:spcPts val="300"/>
+              </a:spcAft>
+              <a:buSzPct val="100000"/>
+              <a:buChar char="•"/>
+            </a:pPr>
+            <a:r>
+              <a:rPr lang="en-US" sz="1200" dirty="0">
+                <a:solidFill>
+                  <a:srgbClr val="1C2833"/>
+                </a:solidFill>
+                <a:latin typeface="Arial" pitchFamily="34" charset="0"/>
+                <a:ea typeface="Arial" pitchFamily="34" charset="-122"/>
+                <a:cs typeface="Arial" pitchFamily="34" charset="-120"/>
+              </a:rPr>
+              <a:t>Answers and "best method" given on the back.</a:t>
+            </a:r>
+            <a:endParaRPr lang="en-US" sz="1200" dirty="0"/>
+          </a:p>
+        </p:txBody>
+      </p:sp>
+      <p:sp>
+        <p:nvSpPr>
+          <p:cNvPr id="5" name="Text 3"/>
+          <p:cNvSpPr/>
+          <p:nvPr/>
+        </p:nvSpPr>
+        <p:spPr>
+          <a:xfrm>
+            <a:off x="406301" y="4434929"/>
+            <a:ext cx="8498026" cy="213271"/>
+          </a:xfrm>
+          <a:prstGeom prst="rect">
+            <a:avLst/>
+          </a:prstGeom>
+          <a:noFill/>
+          <a:ln/>
+        </p:spPr>
+        <p:txBody>
+          <a:bodyPr wrap="square" lIns="0" tIns="0" rIns="0" bIns="0" rtlCol="0" anchor="t"/>
+          <a:lstStyle/>
+          <a:p>
+            <a:pPr algn="l" indent="0" marL="0">
+              <a:lnSpc>
+                <a:spcPts val="1680"/>
+              </a:lnSpc>
+              <a:spcBef>
+                <a:spcPts val="300"/>
+              </a:spcBef>
+              <a:spcAft>
+                <a:spcPts val="300"/>
+              </a:spcAft>
+              <a:buNone/>
+            </a:pPr>
+            <a:r>
+              <a:rPr lang="en-US" sz="1200" dirty="0">
+                <a:solidFill>
+                  <a:srgbClr val="1C2833"/>
+                </a:solidFill>
+                <a:latin typeface="Arial" pitchFamily="34" charset="0"/>
+                <a:ea typeface="Arial" pitchFamily="34" charset="-122"/>
+                <a:cs typeface="Arial" pitchFamily="34" charset="-120"/>
+              </a:rPr>
+              <a:t>Middle ·  · IKS Curriculum</a:t>
+            </a:r>
+            <a:endParaRPr lang="en-US" sz="1200" dirty="0"/>
+          </a:p>
+        </p:txBody>
+      </p:sp>
+    </p:spTree>
+  </p:cSld>
+  <p:clrMapOvr>
+    <a:masterClrMapping/>
+  </p:clrMapOvr>
+</p:sld>
+</file>
+
+<file path=ppt/slides/slide14.xml><?xml version="1.0" encoding="utf-8"?>
+<p:sld xmlns:a="http://schemas.openxmlformats.org/drawingml/2006/main" xmlns:r="http://schemas.openxmlformats.org/officeDocument/2006/relationships" xmlns:p="http://schemas.openxmlformats.org/presentationml/2006/main">
+  <p:cSld name="Slide 14">
+    <p:bg>
+      <p:bgPr>
+        <a:solidFill>
+          <a:srgbClr val="FFFFFF"/>
+        </a:solidFill>
+      </p:bgPr>
+    </p:bg>
+    <p:spTree>
+      <p:nvGrpSpPr>
+        <p:cNvPr id="1" name=""/>
+        <p:cNvGrpSpPr/>
+        <p:nvPr/>
+      </p:nvGrpSpPr>
+      <p:grpSpPr>
+        <a:xfrm>
+          <a:off x="0" y="0"/>
+          <a:ext cx="0" cy="0"/>
+          <a:chOff x="0" y="0"/>
+          <a:chExt cx="0" cy="0"/>
+        </a:xfrm>
+      </p:grpSpPr>
+      <p:sp>
+        <p:nvSpPr>
+          <p:cNvPr id="2" name="Text 0"/>
+          <p:cNvSpPr/>
+          <p:nvPr/>
+        </p:nvSpPr>
+        <p:spPr>
+          <a:xfrm>
+            <a:off x="0" y="0"/>
+            <a:ext cx="9144000" cy="101501"/>
+          </a:xfrm>
+          <a:prstGeom prst="rect">
+            <a:avLst/>
+          </a:prstGeom>
+          <a:solidFill>
+            <a:srgbClr val="277884"/>
+          </a:solidFill>
+          <a:ln/>
+        </p:spPr>
+        <p:txBody>
+          <a:bodyPr wrap="square" rtlCol="0" anchor="ctr"/>
+          <a:lstStyle/>
+          <a:p>
+            <a:pPr indent="0" marL="0">
+              <a:buNone/>
+            </a:pPr>
+            <a:endParaRPr lang="en-US" dirty="0"/>
+          </a:p>
+        </p:txBody>
+      </p:sp>
+      <p:sp>
+        <p:nvSpPr>
+          <p:cNvPr id="3" name="Text 1"/>
+          <p:cNvSpPr/>
+          <p:nvPr/>
+        </p:nvSpPr>
+        <p:spPr>
+          <a:xfrm>
+            <a:off x="406301" y="457051"/>
+            <a:ext cx="8498026" cy="274290"/>
+          </a:xfrm>
+          <a:prstGeom prst="rect">
+            <a:avLst/>
+          </a:prstGeom>
+          <a:noFill/>
+          <a:ln/>
+        </p:spPr>
+        <p:txBody>
+          <a:bodyPr wrap="square" lIns="0" tIns="0" rIns="0" bIns="0" rtlCol="0" anchor="t"/>
+          <a:lstStyle/>
+          <a:p>
+            <a:pPr algn="l" indent="0" marL="0">
+              <a:lnSpc>
+                <a:spcPts val="2160"/>
+              </a:lnSpc>
+              <a:spcBef>
+                <a:spcPts val="600"/>
+              </a:spcBef>
+              <a:spcAft>
+                <a:spcPts val="800"/>
+              </a:spcAft>
+              <a:buNone/>
+            </a:pPr>
+            <a:r>
+              <a:rPr lang="en-US" sz="1800" b="1" dirty="0">
+                <a:solidFill>
+                  <a:srgbClr val="FE4447"/>
+                </a:solidFill>
+                <a:latin typeface="Georgia" pitchFamily="34" charset="0"/>
+                <a:ea typeface="Georgia" pitchFamily="34" charset="-122"/>
+                <a:cs typeface="Georgia" pitchFamily="34" charset="-120"/>
+              </a:rPr>
+              <a:t>Wrap-up (5 min)</a:t>
+            </a:r>
+            <a:endParaRPr lang="en-US" sz="1800" dirty="0"/>
+          </a:p>
+        </p:txBody>
+      </p:sp>
+      <p:sp>
+        <p:nvSpPr>
+          <p:cNvPr id="4" name="Text 2"/>
+          <p:cNvSpPr/>
+          <p:nvPr/>
+        </p:nvSpPr>
+        <p:spPr>
+          <a:xfrm>
+            <a:off x="634901" y="883593"/>
+            <a:ext cx="8102798" cy="731341"/>
+          </a:xfrm>
+          <a:prstGeom prst="rect">
+            <a:avLst/>
+          </a:prstGeom>
+          <a:noFill/>
+          <a:ln/>
+        </p:spPr>
+        <p:txBody>
+          <a:bodyPr wrap="square" lIns="0" tIns="0" rIns="0" bIns="0" rtlCol="0" anchor="t"/>
+          <a:lstStyle/>
+          <a:p>
+            <a:pPr algn="l" marL="342900" indent="-342900">
+              <a:lnSpc>
+                <a:spcPts val="1620"/>
+              </a:lnSpc>
+              <a:spcAft>
+                <a:spcPts val="300"/>
+              </a:spcAft>
+              <a:buSzPct val="100000"/>
+              <a:buChar char="•"/>
+            </a:pPr>
+            <a:r>
+              <a:rPr lang="en-US" sz="1200" dirty="0">
+                <a:solidFill>
+                  <a:srgbClr val="1C2833"/>
+                </a:solidFill>
+                <a:latin typeface="Arial" pitchFamily="34" charset="0"/>
+                <a:ea typeface="Arial" pitchFamily="34" charset="-122"/>
+                <a:cs typeface="Arial" pitchFamily="34" charset="-120"/>
+              </a:rPr>
+              <a:t>Class compiles "the ×11 family domain": </a:t>
+            </a:r>
+            <a:pPr algn="l" indent="0" marL="0">
+              <a:lnSpc>
+                <a:spcPts val="1620"/>
+              </a:lnSpc>
+              <a:spcAft>
+                <a:spcPts val="300"/>
+              </a:spcAft>
+              <a:buNone/>
+            </a:pPr>
+            <a:r>
               <a:rPr lang="en-US" sz="1200" i="1" dirty="0">
                 <a:solidFill>
                   <a:srgbClr val="1C2833"/>
@@ -3322,6 +4220,1979 @@
                 <a:ea typeface="Arial" pitchFamily="34" charset="-122"/>
                 <a:cs typeface="Arial" pitchFamily="34" charset="-120"/>
               </a:rPr>
+              <a:t>all 2-digit numbers × (11, 12, 13, …, 19)</a:t>
+            </a:r>
+            <a:pPr algn="l" indent="0" marL="0">
+              <a:lnSpc>
+                <a:spcPts val="1620"/>
+              </a:lnSpc>
+              <a:spcAft>
+                <a:spcPts val="300"/>
+              </a:spcAft>
+              <a:buNone/>
+            </a:pPr>
+            <a:r>
+              <a:rPr lang="en-US" sz="1200" dirty="0">
+                <a:solidFill>
+                  <a:srgbClr val="1C2833"/>
+                </a:solidFill>
+                <a:latin typeface="Arial" pitchFamily="34" charset="0"/>
+                <a:ea typeface="Arial" pitchFamily="34" charset="-122"/>
+                <a:cs typeface="Arial" pitchFamily="34" charset="-120"/>
+              </a:rPr>
+              <a:t> — about 90 × 9 = 810 distinct problems. That's a significant mental-math territory.</a:t>
+            </a:r>
+            <a:endParaRPr lang="en-US" sz="1200" dirty="0"/>
+          </a:p>
+          <a:p>
+            <a:pPr algn="l" marL="342900" indent="-342900">
+              <a:lnSpc>
+                <a:spcPts val="1620"/>
+              </a:lnSpc>
+              <a:spcAft>
+                <a:spcPts val="300"/>
+              </a:spcAft>
+              <a:buSzPct val="100000"/>
+              <a:buChar char="•"/>
+            </a:pPr>
+            <a:r>
+              <a:rPr lang="en-US" sz="1200" dirty="0">
+                <a:solidFill>
+                  <a:srgbClr val="1C2833"/>
+                </a:solidFill>
+                <a:latin typeface="Arial" pitchFamily="34" charset="0"/>
+                <a:ea typeface="Arial" pitchFamily="34" charset="-122"/>
+                <a:cs typeface="Arial" pitchFamily="34" charset="-120"/>
+              </a:rPr>
+              <a:t>Preview Day 8: </a:t>
+            </a:r>
+            <a:pPr algn="l" indent="0" marL="0">
+              <a:lnSpc>
+                <a:spcPts val="1620"/>
+              </a:lnSpc>
+              <a:spcAft>
+                <a:spcPts val="300"/>
+              </a:spcAft>
+              <a:buNone/>
+            </a:pPr>
+            <a:r>
+              <a:rPr lang="en-US" sz="1200" i="1" dirty="0">
+                <a:solidFill>
+                  <a:srgbClr val="1C2833"/>
+                </a:solidFill>
+                <a:latin typeface="Arial" pitchFamily="34" charset="0"/>
+                <a:ea typeface="Arial" pitchFamily="34" charset="-122"/>
+                <a:cs typeface="Arial" pitchFamily="34" charset="-120"/>
+              </a:rPr>
+              <a:t>"Tomorrow — where do these 16 sūtras come from? The honest history."</a:t>
+            </a:r>
+            <a:endParaRPr lang="en-US" sz="1200" dirty="0"/>
+          </a:p>
+        </p:txBody>
+      </p:sp>
+      <p:sp>
+        <p:nvSpPr>
+          <p:cNvPr id="5" name="Text 3"/>
+          <p:cNvSpPr/>
+          <p:nvPr/>
+        </p:nvSpPr>
+        <p:spPr>
+          <a:xfrm>
+            <a:off x="406301" y="4434929"/>
+            <a:ext cx="8498026" cy="213271"/>
+          </a:xfrm>
+          <a:prstGeom prst="rect">
+            <a:avLst/>
+          </a:prstGeom>
+          <a:noFill/>
+          <a:ln/>
+        </p:spPr>
+        <p:txBody>
+          <a:bodyPr wrap="square" lIns="0" tIns="0" rIns="0" bIns="0" rtlCol="0" anchor="t"/>
+          <a:lstStyle/>
+          <a:p>
+            <a:pPr algn="l" indent="0" marL="0">
+              <a:lnSpc>
+                <a:spcPts val="1680"/>
+              </a:lnSpc>
+              <a:spcBef>
+                <a:spcPts val="300"/>
+              </a:spcBef>
+              <a:spcAft>
+                <a:spcPts val="300"/>
+              </a:spcAft>
+              <a:buNone/>
+            </a:pPr>
+            <a:r>
+              <a:rPr lang="en-US" sz="1200" dirty="0">
+                <a:solidFill>
+                  <a:srgbClr val="1C2833"/>
+                </a:solidFill>
+                <a:latin typeface="Arial" pitchFamily="34" charset="0"/>
+                <a:ea typeface="Arial" pitchFamily="34" charset="-122"/>
+                <a:cs typeface="Arial" pitchFamily="34" charset="-120"/>
+              </a:rPr>
+              <a:t>Middle ·  · IKS Curriculum</a:t>
+            </a:r>
+            <a:endParaRPr lang="en-US" sz="1200" dirty="0"/>
+          </a:p>
+        </p:txBody>
+      </p:sp>
+    </p:spTree>
+  </p:cSld>
+  <p:clrMapOvr>
+    <a:masterClrMapping/>
+  </p:clrMapOvr>
+</p:sld>
+</file>
+
+<file path=ppt/slides/slide15.xml><?xml version="1.0" encoding="utf-8"?>
+<p:sld xmlns:a="http://schemas.openxmlformats.org/drawingml/2006/main" xmlns:r="http://schemas.openxmlformats.org/officeDocument/2006/relationships" xmlns:p="http://schemas.openxmlformats.org/presentationml/2006/main">
+  <p:cSld name="Slide 15">
+    <p:bg>
+      <p:bgPr>
+        <a:solidFill>
+          <a:srgbClr val="FFFFFF"/>
+        </a:solidFill>
+      </p:bgPr>
+    </p:bg>
+    <p:spTree>
+      <p:nvGrpSpPr>
+        <p:cNvPr id="1" name=""/>
+        <p:cNvGrpSpPr/>
+        <p:nvPr/>
+      </p:nvGrpSpPr>
+      <p:grpSpPr>
+        <a:xfrm>
+          <a:off x="0" y="0"/>
+          <a:ext cx="0" cy="0"/>
+          <a:chOff x="0" y="0"/>
+          <a:chExt cx="0" cy="0"/>
+        </a:xfrm>
+      </p:grpSpPr>
+      <p:sp>
+        <p:nvSpPr>
+          <p:cNvPr id="2" name="Text 0"/>
+          <p:cNvSpPr/>
+          <p:nvPr/>
+        </p:nvSpPr>
+        <p:spPr>
+          <a:xfrm>
+            <a:off x="0" y="0"/>
+            <a:ext cx="9144000" cy="101501"/>
+          </a:xfrm>
+          <a:prstGeom prst="rect">
+            <a:avLst/>
+          </a:prstGeom>
+          <a:solidFill>
+            <a:srgbClr val="277884"/>
+          </a:solidFill>
+          <a:ln/>
+        </p:spPr>
+        <p:txBody>
+          <a:bodyPr wrap="square" rtlCol="0" anchor="ctr"/>
+          <a:lstStyle/>
+          <a:p>
+            <a:pPr indent="0" marL="0">
+              <a:buNone/>
+            </a:pPr>
+            <a:endParaRPr lang="en-US" dirty="0"/>
+          </a:p>
+        </p:txBody>
+      </p:sp>
+      <p:sp>
+        <p:nvSpPr>
+          <p:cNvPr id="3" name="Text 1"/>
+          <p:cNvSpPr/>
+          <p:nvPr/>
+        </p:nvSpPr>
+        <p:spPr>
+          <a:xfrm>
+            <a:off x="406301" y="457051"/>
+            <a:ext cx="8498026" cy="274290"/>
+          </a:xfrm>
+          <a:prstGeom prst="rect">
+            <a:avLst/>
+          </a:prstGeom>
+          <a:noFill/>
+          <a:ln/>
+        </p:spPr>
+        <p:txBody>
+          <a:bodyPr wrap="square" lIns="0" tIns="0" rIns="0" bIns="0" rtlCol="0" anchor="t"/>
+          <a:lstStyle/>
+          <a:p>
+            <a:pPr algn="l" indent="0" marL="0">
+              <a:lnSpc>
+                <a:spcPts val="2160"/>
+              </a:lnSpc>
+              <a:spcBef>
+                <a:spcPts val="600"/>
+              </a:spcBef>
+              <a:spcAft>
+                <a:spcPts val="800"/>
+              </a:spcAft>
+              <a:buNone/>
+            </a:pPr>
+            <a:r>
+              <a:rPr lang="en-US" sz="1800" b="1" dirty="0">
+                <a:solidFill>
+                  <a:srgbClr val="FE4447"/>
+                </a:solidFill>
+                <a:latin typeface="Georgia" pitchFamily="34" charset="0"/>
+                <a:ea typeface="Georgia" pitchFamily="34" charset="-122"/>
+                <a:cs typeface="Georgia" pitchFamily="34" charset="-120"/>
+              </a:rPr>
+              <a:t>Student-facing content</a:t>
+            </a:r>
+            <a:endParaRPr lang="en-US" sz="1800" dirty="0"/>
+          </a:p>
+        </p:txBody>
+      </p:sp>
+      <p:sp>
+        <p:nvSpPr>
+          <p:cNvPr id="4" name="Text 2"/>
+          <p:cNvSpPr/>
+          <p:nvPr/>
+        </p:nvSpPr>
+        <p:spPr>
+          <a:xfrm>
+            <a:off x="406301" y="883593"/>
+            <a:ext cx="8331398" cy="2457450"/>
+          </a:xfrm>
+          <a:prstGeom prst="rect">
+            <a:avLst/>
+          </a:prstGeom>
+          <a:solidFill>
+            <a:srgbClr val="F4F8F9"/>
+          </a:solidFill>
+          <a:ln/>
+        </p:spPr>
+        <p:txBody>
+          <a:bodyPr wrap="square" rtlCol="0" anchor="ctr"/>
+          <a:lstStyle/>
+          <a:p>
+            <a:pPr indent="0" marL="0">
+              <a:buNone/>
+            </a:pPr>
+            <a:endParaRPr lang="en-US" dirty="0"/>
+          </a:p>
+        </p:txBody>
+      </p:sp>
+      <p:sp>
+        <p:nvSpPr>
+          <p:cNvPr id="5" name="Shape 3"/>
+          <p:cNvSpPr/>
+          <p:nvPr/>
+        </p:nvSpPr>
+        <p:spPr>
+          <a:xfrm>
+            <a:off x="434876" y="883593"/>
+            <a:ext cx="0" cy="2457450"/>
+          </a:xfrm>
+          <a:prstGeom prst="line">
+            <a:avLst/>
+          </a:prstGeom>
+          <a:noFill/>
+          <a:ln w="57150">
+            <a:solidFill>
+              <a:srgbClr val="FE4447"/>
+            </a:solidFill>
+            <a:prstDash val="solid"/>
+          </a:ln>
+        </p:spPr>
+      </p:sp>
+      <p:sp>
+        <p:nvSpPr>
+          <p:cNvPr id="6" name="Text 4"/>
+          <p:cNvSpPr/>
+          <p:nvPr/>
+        </p:nvSpPr>
+        <p:spPr>
+          <a:xfrm>
+            <a:off x="692051" y="1074093"/>
+            <a:ext cx="7973389" cy="230981"/>
+          </a:xfrm>
+          <a:prstGeom prst="rect">
+            <a:avLst/>
+          </a:prstGeom>
+          <a:noFill/>
+          <a:ln/>
+        </p:spPr>
+        <p:txBody>
+          <a:bodyPr wrap="square" lIns="0" tIns="0" rIns="0" bIns="0" rtlCol="0" anchor="t"/>
+          <a:lstStyle/>
+          <a:p>
+            <a:pPr algn="l" indent="0" marL="0">
+              <a:lnSpc>
+                <a:spcPts val="1820"/>
+              </a:lnSpc>
+              <a:spcBef>
+                <a:spcPts val="300"/>
+              </a:spcBef>
+              <a:spcAft>
+                <a:spcPts val="300"/>
+              </a:spcAft>
+              <a:buNone/>
+            </a:pPr>
+            <a:r>
+              <a:rPr lang="en-US" sz="1300" b="1" i="1" dirty="0">
+                <a:solidFill>
+                  <a:srgbClr val="1C2833"/>
+                </a:solidFill>
+                <a:latin typeface="Georgia" pitchFamily="34" charset="0"/>
+                <a:ea typeface="Georgia" pitchFamily="34" charset="-122"/>
+                <a:cs typeface="Georgia" pitchFamily="34" charset="-120"/>
+              </a:rPr>
+              <a:t>The domain of the ×11 trick</a:t>
+            </a:r>
+            <a:endParaRPr lang="en-US" sz="1300" dirty="0"/>
+          </a:p>
+        </p:txBody>
+      </p:sp>
+      <p:sp>
+        <p:nvSpPr>
+          <p:cNvPr id="7" name="Text 5"/>
+          <p:cNvSpPr/>
+          <p:nvPr/>
+        </p:nvSpPr>
+        <p:spPr>
+          <a:xfrm>
+            <a:off x="692051" y="1343174"/>
+            <a:ext cx="7973389" cy="461963"/>
+          </a:xfrm>
+          <a:prstGeom prst="rect">
+            <a:avLst/>
+          </a:prstGeom>
+          <a:noFill/>
+          <a:ln/>
+        </p:spPr>
+        <p:txBody>
+          <a:bodyPr wrap="square" lIns="0" tIns="0" rIns="0" bIns="0" rtlCol="0" anchor="t"/>
+          <a:lstStyle/>
+          <a:p>
+            <a:pPr algn="l" indent="0" marL="0">
+              <a:lnSpc>
+                <a:spcPts val="1820"/>
+              </a:lnSpc>
+              <a:spcBef>
+                <a:spcPts val="300"/>
+              </a:spcBef>
+              <a:spcAft>
+                <a:spcPts val="300"/>
+              </a:spcAft>
+              <a:buNone/>
+            </a:pPr>
+            <a:r>
+              <a:rPr lang="en-US" sz="1300" dirty="0">
+                <a:solidFill>
+                  <a:srgbClr val="1C2833"/>
+                </a:solidFill>
+                <a:latin typeface="Georgia" pitchFamily="34" charset="0"/>
+                <a:ea typeface="Georgia" pitchFamily="34" charset="-122"/>
+                <a:cs typeface="Georgia" pitchFamily="34" charset="-120"/>
+              </a:rPr>
+              <a:t>The "split and add" trick works for multipliers of the form *</a:t>
+            </a:r>
+            <a:pPr algn="l" indent="0" marL="0">
+              <a:lnSpc>
+                <a:spcPts val="1820"/>
+              </a:lnSpc>
+              <a:spcBef>
+                <a:spcPts val="300"/>
+              </a:spcBef>
+              <a:spcAft>
+                <a:spcPts val="300"/>
+              </a:spcAft>
+              <a:buNone/>
+            </a:pPr>
+            <a:r>
+              <a:rPr lang="en-US" sz="1300" i="1" dirty="0">
+                <a:solidFill>
+                  <a:srgbClr val="1C2833"/>
+                </a:solidFill>
+                <a:latin typeface="Georgia" pitchFamily="34" charset="0"/>
+                <a:ea typeface="Georgia" pitchFamily="34" charset="-122"/>
+                <a:cs typeface="Georgia" pitchFamily="34" charset="-120"/>
+              </a:rPr>
+              <a:t>10 +</a:t>
+            </a:r>
+            <a:pPr algn="l" indent="0" marL="0">
+              <a:lnSpc>
+                <a:spcPts val="1820"/>
+              </a:lnSpc>
+              <a:spcBef>
+                <a:spcPts val="300"/>
+              </a:spcBef>
+              <a:spcAft>
+                <a:spcPts val="300"/>
+              </a:spcAft>
+              <a:buNone/>
+            </a:pPr>
+            <a:r>
+              <a:rPr lang="en-US" sz="1300" dirty="0">
+                <a:solidFill>
+                  <a:srgbClr val="1C2833"/>
+                </a:solidFill>
+                <a:latin typeface="Georgia" pitchFamily="34" charset="0"/>
+                <a:ea typeface="Georgia" pitchFamily="34" charset="-122"/>
+                <a:cs typeface="Georgia" pitchFamily="34" charset="-120"/>
+              </a:rPr>
+              <a:t>k**</a:t>
+            </a:r>
+            <a:pPr algn="l" indent="0" marL="0">
+              <a:lnSpc>
+                <a:spcPts val="1820"/>
+              </a:lnSpc>
+              <a:spcBef>
+                <a:spcPts val="300"/>
+              </a:spcBef>
+              <a:spcAft>
+                <a:spcPts val="300"/>
+              </a:spcAft>
+              <a:buNone/>
+            </a:pPr>
+            <a:r>
+              <a:rPr lang="en-US" sz="1300" i="1" dirty="0">
+                <a:solidFill>
+                  <a:srgbClr val="1C2833"/>
+                </a:solidFill>
+                <a:latin typeface="Georgia" pitchFamily="34" charset="0"/>
+                <a:ea typeface="Georgia" pitchFamily="34" charset="-122"/>
+                <a:cs typeface="Georgia" pitchFamily="34" charset="-120"/>
+              </a:rPr>
+              <a:t> where</a:t>
+            </a:r>
+            <a:pPr algn="l" indent="0" marL="0">
+              <a:lnSpc>
+                <a:spcPts val="1820"/>
+              </a:lnSpc>
+              <a:spcBef>
+                <a:spcPts val="300"/>
+              </a:spcBef>
+              <a:spcAft>
+                <a:spcPts val="300"/>
+              </a:spcAft>
+              <a:buNone/>
+            </a:pPr>
+            <a:r>
+              <a:rPr lang="en-US" sz="1300" dirty="0">
+                <a:solidFill>
+                  <a:srgbClr val="1C2833"/>
+                </a:solidFill>
+                <a:latin typeface="Georgia" pitchFamily="34" charset="0"/>
+                <a:ea typeface="Georgia" pitchFamily="34" charset="-122"/>
+                <a:cs typeface="Georgia" pitchFamily="34" charset="-120"/>
+              </a:rPr>
+              <a:t>k* is a single digit (so ×11 through ×19).</a:t>
+            </a:r>
+            <a:endParaRPr lang="en-US" sz="1300" dirty="0"/>
+          </a:p>
+        </p:txBody>
+      </p:sp>
+      <p:sp>
+        <p:nvSpPr>
+          <p:cNvPr id="8" name="Text 6"/>
+          <p:cNvSpPr/>
+          <p:nvPr/>
+        </p:nvSpPr>
+        <p:spPr>
+          <a:xfrm>
+            <a:off x="692051" y="1843236"/>
+            <a:ext cx="7973389" cy="230981"/>
+          </a:xfrm>
+          <a:prstGeom prst="rect">
+            <a:avLst/>
+          </a:prstGeom>
+          <a:noFill/>
+          <a:ln/>
+        </p:spPr>
+        <p:txBody>
+          <a:bodyPr wrap="square" lIns="0" tIns="0" rIns="0" bIns="0" rtlCol="0" anchor="t"/>
+          <a:lstStyle/>
+          <a:p>
+            <a:pPr algn="l" indent="0" marL="0">
+              <a:lnSpc>
+                <a:spcPts val="1820"/>
+              </a:lnSpc>
+              <a:spcBef>
+                <a:spcPts val="300"/>
+              </a:spcBef>
+              <a:spcAft>
+                <a:spcPts val="300"/>
+              </a:spcAft>
+              <a:buNone/>
+            </a:pPr>
+            <a:r>
+              <a:rPr lang="en-US" sz="1300" i="1" dirty="0">
+                <a:solidFill>
+                  <a:srgbClr val="1C2833"/>
+                </a:solidFill>
+                <a:latin typeface="Georgia" pitchFamily="34" charset="0"/>
+                <a:ea typeface="Georgia" pitchFamily="34" charset="-122"/>
+                <a:cs typeface="Georgia" pitchFamily="34" charset="-120"/>
+              </a:rPr>
+              <a:t>For other multipliers, use:</a:t>
+            </a:r>
+            <a:endParaRPr lang="en-US" sz="1300" dirty="0"/>
+          </a:p>
+        </p:txBody>
+      </p:sp>
+      <p:sp>
+        <p:nvSpPr>
+          <p:cNvPr id="9" name="Text 7"/>
+          <p:cNvSpPr/>
+          <p:nvPr/>
+        </p:nvSpPr>
+        <p:spPr>
+          <a:xfrm>
+            <a:off x="692051" y="2112318"/>
+            <a:ext cx="7973389" cy="230981"/>
+          </a:xfrm>
+          <a:prstGeom prst="rect">
+            <a:avLst/>
+          </a:prstGeom>
+          <a:noFill/>
+          <a:ln/>
+        </p:spPr>
+        <p:txBody>
+          <a:bodyPr wrap="square" lIns="0" tIns="0" rIns="0" bIns="0" rtlCol="0" anchor="t"/>
+          <a:lstStyle/>
+          <a:p>
+            <a:pPr algn="l" indent="0" marL="0">
+              <a:lnSpc>
+                <a:spcPts val="1820"/>
+              </a:lnSpc>
+              <a:spcBef>
+                <a:spcPts val="300"/>
+              </a:spcBef>
+              <a:spcAft>
+                <a:spcPts val="300"/>
+              </a:spcAft>
+              <a:buNone/>
+            </a:pPr>
+            <a:r>
+              <a:rPr lang="en-US" sz="1300" i="1" dirty="0">
+                <a:solidFill>
+                  <a:srgbClr val="1C2833"/>
+                </a:solidFill>
+                <a:latin typeface="Georgia" pitchFamily="34" charset="0"/>
+                <a:ea typeface="Georgia" pitchFamily="34" charset="-122"/>
+                <a:cs typeface="Georgia" pitchFamily="34" charset="-120"/>
+              </a:rPr>
+              <a:t>Long multiplication (always works).</a:t>
+            </a:r>
+            <a:endParaRPr lang="en-US" sz="1300" dirty="0"/>
+          </a:p>
+        </p:txBody>
+      </p:sp>
+      <p:sp>
+        <p:nvSpPr>
+          <p:cNvPr id="10" name="Text 8"/>
+          <p:cNvSpPr/>
+          <p:nvPr/>
+        </p:nvSpPr>
+        <p:spPr>
+          <a:xfrm>
+            <a:off x="692051" y="2381399"/>
+            <a:ext cx="7973389" cy="230981"/>
+          </a:xfrm>
+          <a:prstGeom prst="rect">
+            <a:avLst/>
+          </a:prstGeom>
+          <a:noFill/>
+          <a:ln/>
+        </p:spPr>
+        <p:txBody>
+          <a:bodyPr wrap="square" lIns="0" tIns="0" rIns="0" bIns="0" rtlCol="0" anchor="t"/>
+          <a:lstStyle/>
+          <a:p>
+            <a:pPr algn="l" indent="0" marL="0">
+              <a:lnSpc>
+                <a:spcPts val="1820"/>
+              </a:lnSpc>
+              <a:spcBef>
+                <a:spcPts val="300"/>
+              </a:spcBef>
+              <a:spcAft>
+                <a:spcPts val="300"/>
+              </a:spcAft>
+              <a:buNone/>
+            </a:pPr>
+            <a:r>
+              <a:rPr lang="en-US" sz="1300" i="1" dirty="0">
+                <a:solidFill>
+                  <a:srgbClr val="1C2833"/>
+                </a:solidFill>
+                <a:latin typeface="Georgia" pitchFamily="34" charset="0"/>
+                <a:ea typeface="Georgia" pitchFamily="34" charset="-122"/>
+                <a:cs typeface="Georgia" pitchFamily="34" charset="-120"/>
+              </a:rPr>
+              <a:t>Nikhilam</a:t>
+            </a:r>
+            <a:pPr algn="l" indent="0" marL="0">
+              <a:lnSpc>
+                <a:spcPts val="1820"/>
+              </a:lnSpc>
+              <a:spcBef>
+                <a:spcPts val="300"/>
+              </a:spcBef>
+              <a:spcAft>
+                <a:spcPts val="300"/>
+              </a:spcAft>
+              <a:buNone/>
+            </a:pPr>
+            <a:r>
+              <a:rPr lang="en-US" sz="1300" dirty="0">
+                <a:solidFill>
+                  <a:srgbClr val="1C2833"/>
+                </a:solidFill>
+                <a:latin typeface="Georgia" pitchFamily="34" charset="0"/>
+                <a:ea typeface="Georgia" pitchFamily="34" charset="-122"/>
+                <a:cs typeface="Georgia" pitchFamily="34" charset="-120"/>
+              </a:rPr>
+              <a:t> "all from 9, last from 10" — when both numbers are near 100 (e.g. 98 × 97).</a:t>
+            </a:r>
+            <a:endParaRPr lang="en-US" sz="1300" dirty="0"/>
+          </a:p>
+        </p:txBody>
+      </p:sp>
+      <p:sp>
+        <p:nvSpPr>
+          <p:cNvPr id="11" name="Text 9"/>
+          <p:cNvSpPr/>
+          <p:nvPr/>
+        </p:nvSpPr>
+        <p:spPr>
+          <a:xfrm>
+            <a:off x="692051" y="2650480"/>
+            <a:ext cx="7973389" cy="230981"/>
+          </a:xfrm>
+          <a:prstGeom prst="rect">
+            <a:avLst/>
+          </a:prstGeom>
+          <a:noFill/>
+          <a:ln/>
+        </p:spPr>
+        <p:txBody>
+          <a:bodyPr wrap="square" lIns="0" tIns="0" rIns="0" bIns="0" rtlCol="0" anchor="t"/>
+          <a:lstStyle/>
+          <a:p>
+            <a:pPr algn="l" indent="0" marL="0">
+              <a:lnSpc>
+                <a:spcPts val="1820"/>
+              </a:lnSpc>
+              <a:spcBef>
+                <a:spcPts val="300"/>
+              </a:spcBef>
+              <a:spcAft>
+                <a:spcPts val="300"/>
+              </a:spcAft>
+              <a:buNone/>
+            </a:pPr>
+            <a:r>
+              <a:rPr lang="en-US" sz="1300" i="1" dirty="0">
+                <a:solidFill>
+                  <a:srgbClr val="1C2833"/>
+                </a:solidFill>
+                <a:latin typeface="Georgia" pitchFamily="34" charset="0"/>
+                <a:ea typeface="Georgia" pitchFamily="34" charset="-122"/>
+                <a:cs typeface="Georgia" pitchFamily="34" charset="-120"/>
+              </a:rPr>
+              <a:t>Ūrdhva-tiryagbhyāṁ</a:t>
+            </a:r>
+            <a:pPr algn="l" indent="0" marL="0">
+              <a:lnSpc>
+                <a:spcPts val="1820"/>
+              </a:lnSpc>
+              <a:spcBef>
+                <a:spcPts val="300"/>
+              </a:spcBef>
+              <a:spcAft>
+                <a:spcPts val="300"/>
+              </a:spcAft>
+              <a:buNone/>
+            </a:pPr>
+            <a:r>
+              <a:rPr lang="en-US" sz="1300" dirty="0">
+                <a:solidFill>
+                  <a:srgbClr val="1C2833"/>
+                </a:solidFill>
+                <a:latin typeface="Georgia" pitchFamily="34" charset="0"/>
+                <a:ea typeface="Georgia" pitchFamily="34" charset="-122"/>
+                <a:cs typeface="Georgia" pitchFamily="34" charset="-120"/>
+              </a:rPr>
+              <a:t> "vertically and crosswise" — general multiplication.</a:t>
+            </a:r>
+            <a:endParaRPr lang="en-US" sz="1300" dirty="0"/>
+          </a:p>
+        </p:txBody>
+      </p:sp>
+      <p:sp>
+        <p:nvSpPr>
+          <p:cNvPr id="12" name="Text 10"/>
+          <p:cNvSpPr/>
+          <p:nvPr/>
+        </p:nvSpPr>
+        <p:spPr>
+          <a:xfrm>
+            <a:off x="692051" y="2919561"/>
+            <a:ext cx="7973389" cy="230981"/>
+          </a:xfrm>
+          <a:prstGeom prst="rect">
+            <a:avLst/>
+          </a:prstGeom>
+          <a:noFill/>
+          <a:ln/>
+        </p:spPr>
+        <p:txBody>
+          <a:bodyPr wrap="square" lIns="0" tIns="0" rIns="0" bIns="0" rtlCol="0" anchor="t"/>
+          <a:lstStyle/>
+          <a:p>
+            <a:pPr algn="l" indent="0" marL="0">
+              <a:lnSpc>
+                <a:spcPts val="1820"/>
+              </a:lnSpc>
+              <a:spcBef>
+                <a:spcPts val="300"/>
+              </a:spcBef>
+              <a:spcAft>
+                <a:spcPts val="300"/>
+              </a:spcAft>
+              <a:buNone/>
+            </a:pPr>
+            <a:r>
+              <a:rPr lang="en-US" sz="1300" dirty="0">
+                <a:solidFill>
+                  <a:srgbClr val="1C2833"/>
+                </a:solidFill>
+                <a:latin typeface="Georgia" pitchFamily="34" charset="0"/>
+                <a:ea typeface="Georgia" pitchFamily="34" charset="-122"/>
+                <a:cs typeface="Georgia" pitchFamily="34" charset="-120"/>
+              </a:rPr>
+              <a:t>Knowing </a:t>
+            </a:r>
+            <a:pPr algn="l" indent="0" marL="0">
+              <a:lnSpc>
+                <a:spcPts val="1820"/>
+              </a:lnSpc>
+              <a:spcBef>
+                <a:spcPts val="300"/>
+              </a:spcBef>
+              <a:spcAft>
+                <a:spcPts val="300"/>
+              </a:spcAft>
+              <a:buNone/>
+            </a:pPr>
+            <a:r>
+              <a:rPr lang="en-US" sz="1300" b="1" i="1" dirty="0">
+                <a:solidFill>
+                  <a:srgbClr val="1C2833"/>
+                </a:solidFill>
+                <a:latin typeface="Georgia" pitchFamily="34" charset="0"/>
+                <a:ea typeface="Georgia" pitchFamily="34" charset="-122"/>
+                <a:cs typeface="Georgia" pitchFamily="34" charset="-120"/>
+              </a:rPr>
+              <a:t>when to use</a:t>
+            </a:r>
+            <a:pPr algn="l" indent="0" marL="0">
+              <a:lnSpc>
+                <a:spcPts val="1820"/>
+              </a:lnSpc>
+              <a:spcBef>
+                <a:spcPts val="300"/>
+              </a:spcBef>
+              <a:spcAft>
+                <a:spcPts val="300"/>
+              </a:spcAft>
+              <a:buNone/>
+            </a:pPr>
+            <a:r>
+              <a:rPr lang="en-US" sz="1300" dirty="0">
+                <a:solidFill>
+                  <a:srgbClr val="1C2833"/>
+                </a:solidFill>
+                <a:latin typeface="Georgia" pitchFamily="34" charset="0"/>
+                <a:ea typeface="Georgia" pitchFamily="34" charset="-122"/>
+                <a:cs typeface="Georgia" pitchFamily="34" charset="-120"/>
+              </a:rPr>
+              <a:t> a trick is as important as knowing </a:t>
+            </a:r>
+            <a:pPr algn="l" indent="0" marL="0">
+              <a:lnSpc>
+                <a:spcPts val="1820"/>
+              </a:lnSpc>
+              <a:spcBef>
+                <a:spcPts val="300"/>
+              </a:spcBef>
+              <a:spcAft>
+                <a:spcPts val="300"/>
+              </a:spcAft>
+              <a:buNone/>
+            </a:pPr>
+            <a:r>
+              <a:rPr lang="en-US" sz="1300" b="1" i="1" dirty="0">
+                <a:solidFill>
+                  <a:srgbClr val="1C2833"/>
+                </a:solidFill>
+                <a:latin typeface="Georgia" pitchFamily="34" charset="0"/>
+                <a:ea typeface="Georgia" pitchFamily="34" charset="-122"/>
+                <a:cs typeface="Georgia" pitchFamily="34" charset="-120"/>
+              </a:rPr>
+              <a:t>how</a:t>
+            </a:r>
+            <a:pPr algn="l" indent="0" marL="0">
+              <a:lnSpc>
+                <a:spcPts val="1820"/>
+              </a:lnSpc>
+              <a:spcBef>
+                <a:spcPts val="300"/>
+              </a:spcBef>
+              <a:spcAft>
+                <a:spcPts val="300"/>
+              </a:spcAft>
+              <a:buNone/>
+            </a:pPr>
+            <a:r>
+              <a:rPr lang="en-US" sz="1300" dirty="0">
+                <a:solidFill>
+                  <a:srgbClr val="1C2833"/>
+                </a:solidFill>
+                <a:latin typeface="Georgia" pitchFamily="34" charset="0"/>
+                <a:ea typeface="Georgia" pitchFamily="34" charset="-122"/>
+                <a:cs typeface="Georgia" pitchFamily="34" charset="-120"/>
+              </a:rPr>
+              <a:t>.</a:t>
+            </a:r>
+            <a:endParaRPr lang="en-US" sz="1300" dirty="0"/>
+          </a:p>
+        </p:txBody>
+      </p:sp>
+      <p:sp>
+        <p:nvSpPr>
+          <p:cNvPr id="13" name="Text 11"/>
+          <p:cNvSpPr/>
+          <p:nvPr/>
+        </p:nvSpPr>
+        <p:spPr>
+          <a:xfrm>
+            <a:off x="406301" y="4434929"/>
+            <a:ext cx="8498026" cy="213271"/>
+          </a:xfrm>
+          <a:prstGeom prst="rect">
+            <a:avLst/>
+          </a:prstGeom>
+          <a:noFill/>
+          <a:ln/>
+        </p:spPr>
+        <p:txBody>
+          <a:bodyPr wrap="square" lIns="0" tIns="0" rIns="0" bIns="0" rtlCol="0" anchor="t"/>
+          <a:lstStyle/>
+          <a:p>
+            <a:pPr algn="l" indent="0" marL="0">
+              <a:lnSpc>
+                <a:spcPts val="1680"/>
+              </a:lnSpc>
+              <a:spcBef>
+                <a:spcPts val="300"/>
+              </a:spcBef>
+              <a:spcAft>
+                <a:spcPts val="300"/>
+              </a:spcAft>
+              <a:buNone/>
+            </a:pPr>
+            <a:r>
+              <a:rPr lang="en-US" sz="1200" dirty="0">
+                <a:solidFill>
+                  <a:srgbClr val="1C2833"/>
+                </a:solidFill>
+                <a:latin typeface="Arial" pitchFamily="34" charset="0"/>
+                <a:ea typeface="Arial" pitchFamily="34" charset="-122"/>
+                <a:cs typeface="Arial" pitchFamily="34" charset="-120"/>
+              </a:rPr>
+              <a:t>Middle ·  · IKS Curriculum</a:t>
+            </a:r>
+            <a:endParaRPr lang="en-US" sz="1200" dirty="0"/>
+          </a:p>
+        </p:txBody>
+      </p:sp>
+    </p:spTree>
+  </p:cSld>
+  <p:clrMapOvr>
+    <a:masterClrMapping/>
+  </p:clrMapOvr>
+</p:sld>
+</file>
+
+<file path=ppt/slides/slide16.xml><?xml version="1.0" encoding="utf-8"?>
+<p:sld xmlns:a="http://schemas.openxmlformats.org/drawingml/2006/main" xmlns:r="http://schemas.openxmlformats.org/officeDocument/2006/relationships" xmlns:p="http://schemas.openxmlformats.org/presentationml/2006/main">
+  <p:cSld name="Slide 16">
+    <p:bg>
+      <p:bgPr>
+        <a:solidFill>
+          <a:srgbClr val="FFFFFF"/>
+        </a:solidFill>
+      </p:bgPr>
+    </p:bg>
+    <p:spTree>
+      <p:nvGrpSpPr>
+        <p:cNvPr id="1" name=""/>
+        <p:cNvGrpSpPr/>
+        <p:nvPr/>
+      </p:nvGrpSpPr>
+      <p:grpSpPr>
+        <a:xfrm>
+          <a:off x="0" y="0"/>
+          <a:ext cx="0" cy="0"/>
+          <a:chOff x="0" y="0"/>
+          <a:chExt cx="0" cy="0"/>
+        </a:xfrm>
+      </p:grpSpPr>
+      <p:sp>
+        <p:nvSpPr>
+          <p:cNvPr id="2" name="Text 0"/>
+          <p:cNvSpPr/>
+          <p:nvPr/>
+        </p:nvSpPr>
+        <p:spPr>
+          <a:xfrm>
+            <a:off x="0" y="0"/>
+            <a:ext cx="9144000" cy="101501"/>
+          </a:xfrm>
+          <a:prstGeom prst="rect">
+            <a:avLst/>
+          </a:prstGeom>
+          <a:solidFill>
+            <a:srgbClr val="277884"/>
+          </a:solidFill>
+          <a:ln/>
+        </p:spPr>
+        <p:txBody>
+          <a:bodyPr wrap="square" rtlCol="0" anchor="ctr"/>
+          <a:lstStyle/>
+          <a:p>
+            <a:pPr indent="0" marL="0">
+              <a:buNone/>
+            </a:pPr>
+            <a:endParaRPr lang="en-US" dirty="0"/>
+          </a:p>
+        </p:txBody>
+      </p:sp>
+      <p:sp>
+        <p:nvSpPr>
+          <p:cNvPr id="3" name="Text 1"/>
+          <p:cNvSpPr/>
+          <p:nvPr/>
+        </p:nvSpPr>
+        <p:spPr>
+          <a:xfrm>
+            <a:off x="406301" y="457051"/>
+            <a:ext cx="8498026" cy="274290"/>
+          </a:xfrm>
+          <a:prstGeom prst="rect">
+            <a:avLst/>
+          </a:prstGeom>
+          <a:noFill/>
+          <a:ln/>
+        </p:spPr>
+        <p:txBody>
+          <a:bodyPr wrap="square" lIns="0" tIns="0" rIns="0" bIns="0" rtlCol="0" anchor="t"/>
+          <a:lstStyle/>
+          <a:p>
+            <a:pPr algn="l" indent="0" marL="0">
+              <a:lnSpc>
+                <a:spcPts val="2160"/>
+              </a:lnSpc>
+              <a:spcBef>
+                <a:spcPts val="600"/>
+              </a:spcBef>
+              <a:spcAft>
+                <a:spcPts val="800"/>
+              </a:spcAft>
+              <a:buNone/>
+            </a:pPr>
+            <a:r>
+              <a:rPr lang="en-US" sz="1800" b="1" dirty="0">
+                <a:solidFill>
+                  <a:srgbClr val="FE4447"/>
+                </a:solidFill>
+                <a:latin typeface="Georgia" pitchFamily="34" charset="0"/>
+                <a:ea typeface="Georgia" pitchFamily="34" charset="-122"/>
+                <a:cs typeface="Georgia" pitchFamily="34" charset="-120"/>
+              </a:rPr>
+              <a:t>Homework</a:t>
+            </a:r>
+            <a:endParaRPr lang="en-US" sz="1800" dirty="0"/>
+          </a:p>
+        </p:txBody>
+      </p:sp>
+      <p:sp>
+        <p:nvSpPr>
+          <p:cNvPr id="4" name="Text 2"/>
+          <p:cNvSpPr/>
+          <p:nvPr/>
+        </p:nvSpPr>
+        <p:spPr>
+          <a:xfrm>
+            <a:off x="634901" y="883593"/>
+            <a:ext cx="8102798" cy="487561"/>
+          </a:xfrm>
+          <a:prstGeom prst="rect">
+            <a:avLst/>
+          </a:prstGeom>
+          <a:noFill/>
+          <a:ln/>
+        </p:spPr>
+        <p:txBody>
+          <a:bodyPr wrap="square" lIns="0" tIns="0" rIns="0" bIns="0" rtlCol="0" anchor="t"/>
+          <a:lstStyle/>
+          <a:p>
+            <a:pPr algn="l" marL="342900" indent="-342900">
+              <a:lnSpc>
+                <a:spcPts val="1620"/>
+              </a:lnSpc>
+              <a:spcAft>
+                <a:spcPts val="300"/>
+              </a:spcAft>
+              <a:buSzPct val="100000"/>
+              <a:buChar char="•"/>
+            </a:pPr>
+            <a:r>
+              <a:rPr lang="en-US" sz="1200" dirty="0">
+                <a:solidFill>
+                  <a:srgbClr val="1C2833"/>
+                </a:solidFill>
+                <a:latin typeface="Arial" pitchFamily="34" charset="0"/>
+                <a:ea typeface="Arial" pitchFamily="34" charset="-122"/>
+                <a:cs typeface="Arial" pitchFamily="34" charset="-120"/>
+              </a:rPr>
+              <a:t>Find any 3 multiplication problems in your homework or a textbook. For each, decide which method (×11 family / long / other) you'd use and </a:t>
+            </a:r>
+            <a:pPr algn="l" indent="0" marL="0">
+              <a:lnSpc>
+                <a:spcPts val="1620"/>
+              </a:lnSpc>
+              <a:spcAft>
+                <a:spcPts val="300"/>
+              </a:spcAft>
+              <a:buNone/>
+            </a:pPr>
+            <a:r>
+              <a:rPr lang="en-US" sz="1200" b="1" dirty="0">
+                <a:solidFill>
+                  <a:srgbClr val="1C2833"/>
+                </a:solidFill>
+                <a:latin typeface="Arial" pitchFamily="34" charset="0"/>
+                <a:ea typeface="Arial" pitchFamily="34" charset="-122"/>
+                <a:cs typeface="Arial" pitchFamily="34" charset="-120"/>
+              </a:rPr>
+              <a:t>why</a:t>
+            </a:r>
+            <a:pPr algn="l" indent="0" marL="0">
+              <a:lnSpc>
+                <a:spcPts val="1620"/>
+              </a:lnSpc>
+              <a:spcAft>
+                <a:spcPts val="300"/>
+              </a:spcAft>
+              <a:buNone/>
+            </a:pPr>
+            <a:r>
+              <a:rPr lang="en-US" sz="1200" dirty="0">
+                <a:solidFill>
+                  <a:srgbClr val="1C2833"/>
+                </a:solidFill>
+                <a:latin typeface="Arial" pitchFamily="34" charset="0"/>
+                <a:ea typeface="Arial" pitchFamily="34" charset="-122"/>
+                <a:cs typeface="Arial" pitchFamily="34" charset="-120"/>
+              </a:rPr>
+              <a:t>. Write 1 sentence of justification per problem.</a:t>
+            </a:r>
+            <a:endParaRPr lang="en-US" sz="1200" dirty="0"/>
+          </a:p>
+        </p:txBody>
+      </p:sp>
+      <p:sp>
+        <p:nvSpPr>
+          <p:cNvPr id="5" name="Text 3"/>
+          <p:cNvSpPr/>
+          <p:nvPr/>
+        </p:nvSpPr>
+        <p:spPr>
+          <a:xfrm>
+            <a:off x="406301" y="4434929"/>
+            <a:ext cx="8498026" cy="213271"/>
+          </a:xfrm>
+          <a:prstGeom prst="rect">
+            <a:avLst/>
+          </a:prstGeom>
+          <a:noFill/>
+          <a:ln/>
+        </p:spPr>
+        <p:txBody>
+          <a:bodyPr wrap="square" lIns="0" tIns="0" rIns="0" bIns="0" rtlCol="0" anchor="t"/>
+          <a:lstStyle/>
+          <a:p>
+            <a:pPr algn="l" indent="0" marL="0">
+              <a:lnSpc>
+                <a:spcPts val="1680"/>
+              </a:lnSpc>
+              <a:spcBef>
+                <a:spcPts val="300"/>
+              </a:spcBef>
+              <a:spcAft>
+                <a:spcPts val="300"/>
+              </a:spcAft>
+              <a:buNone/>
+            </a:pPr>
+            <a:r>
+              <a:rPr lang="en-US" sz="1200" dirty="0">
+                <a:solidFill>
+                  <a:srgbClr val="1C2833"/>
+                </a:solidFill>
+                <a:latin typeface="Arial" pitchFamily="34" charset="0"/>
+                <a:ea typeface="Arial" pitchFamily="34" charset="-122"/>
+                <a:cs typeface="Arial" pitchFamily="34" charset="-120"/>
+              </a:rPr>
+              <a:t>Middle ·  · IKS Curriculum</a:t>
+            </a:r>
+            <a:endParaRPr lang="en-US" sz="1200" dirty="0"/>
+          </a:p>
+        </p:txBody>
+      </p:sp>
+    </p:spTree>
+  </p:cSld>
+  <p:clrMapOvr>
+    <a:masterClrMapping/>
+  </p:clrMapOvr>
+</p:sld>
+</file>
+
+<file path=ppt/slides/slide17.xml><?xml version="1.0" encoding="utf-8"?>
+<p:sld xmlns:a="http://schemas.openxmlformats.org/drawingml/2006/main" xmlns:r="http://schemas.openxmlformats.org/officeDocument/2006/relationships" xmlns:p="http://schemas.openxmlformats.org/presentationml/2006/main">
+  <p:cSld name="Slide 17">
+    <p:bg>
+      <p:bgPr>
+        <a:solidFill>
+          <a:srgbClr val="FFFFFF"/>
+        </a:solidFill>
+      </p:bgPr>
+    </p:bg>
+    <p:spTree>
+      <p:nvGrpSpPr>
+        <p:cNvPr id="1" name=""/>
+        <p:cNvGrpSpPr/>
+        <p:nvPr/>
+      </p:nvGrpSpPr>
+      <p:grpSpPr>
+        <a:xfrm>
+          <a:off x="0" y="0"/>
+          <a:ext cx="0" cy="0"/>
+          <a:chOff x="0" y="0"/>
+          <a:chExt cx="0" cy="0"/>
+        </a:xfrm>
+      </p:grpSpPr>
+      <p:sp>
+        <p:nvSpPr>
+          <p:cNvPr id="2" name="Text 0"/>
+          <p:cNvSpPr/>
+          <p:nvPr/>
+        </p:nvSpPr>
+        <p:spPr>
+          <a:xfrm>
+            <a:off x="0" y="0"/>
+            <a:ext cx="9144000" cy="101501"/>
+          </a:xfrm>
+          <a:prstGeom prst="rect">
+            <a:avLst/>
+          </a:prstGeom>
+          <a:solidFill>
+            <a:srgbClr val="277884"/>
+          </a:solidFill>
+          <a:ln/>
+        </p:spPr>
+        <p:txBody>
+          <a:bodyPr wrap="square" rtlCol="0" anchor="ctr"/>
+          <a:lstStyle/>
+          <a:p>
+            <a:pPr indent="0" marL="0">
+              <a:buNone/>
+            </a:pPr>
+            <a:endParaRPr lang="en-US" dirty="0"/>
+          </a:p>
+        </p:txBody>
+      </p:sp>
+      <p:sp>
+        <p:nvSpPr>
+          <p:cNvPr id="3" name="Text 1"/>
+          <p:cNvSpPr/>
+          <p:nvPr/>
+        </p:nvSpPr>
+        <p:spPr>
+          <a:xfrm>
+            <a:off x="406301" y="457051"/>
+            <a:ext cx="8498026" cy="274290"/>
+          </a:xfrm>
+          <a:prstGeom prst="rect">
+            <a:avLst/>
+          </a:prstGeom>
+          <a:noFill/>
+          <a:ln/>
+        </p:spPr>
+        <p:txBody>
+          <a:bodyPr wrap="square" lIns="0" tIns="0" rIns="0" bIns="0" rtlCol="0" anchor="t"/>
+          <a:lstStyle/>
+          <a:p>
+            <a:pPr algn="l" indent="0" marL="0">
+              <a:lnSpc>
+                <a:spcPts val="2160"/>
+              </a:lnSpc>
+              <a:spcBef>
+                <a:spcPts val="600"/>
+              </a:spcBef>
+              <a:spcAft>
+                <a:spcPts val="800"/>
+              </a:spcAft>
+              <a:buNone/>
+            </a:pPr>
+            <a:r>
+              <a:rPr lang="en-US" sz="1800" b="1" dirty="0">
+                <a:solidFill>
+                  <a:srgbClr val="FE4447"/>
+                </a:solidFill>
+                <a:latin typeface="Georgia" pitchFamily="34" charset="0"/>
+                <a:ea typeface="Georgia" pitchFamily="34" charset="-122"/>
+                <a:cs typeface="Georgia" pitchFamily="34" charset="-120"/>
+              </a:rPr>
+              <a:t>Differentiation</a:t>
+            </a:r>
+            <a:endParaRPr lang="en-US" sz="1800" dirty="0"/>
+          </a:p>
+        </p:txBody>
+      </p:sp>
+      <p:sp>
+        <p:nvSpPr>
+          <p:cNvPr id="4" name="Text 2"/>
+          <p:cNvSpPr/>
+          <p:nvPr/>
+        </p:nvSpPr>
+        <p:spPr>
+          <a:xfrm>
+            <a:off x="634901" y="883593"/>
+            <a:ext cx="8102798" cy="731341"/>
+          </a:xfrm>
+          <a:prstGeom prst="rect">
+            <a:avLst/>
+          </a:prstGeom>
+          <a:noFill/>
+          <a:ln/>
+        </p:spPr>
+        <p:txBody>
+          <a:bodyPr wrap="square" lIns="0" tIns="0" rIns="0" bIns="0" rtlCol="0" anchor="t"/>
+          <a:lstStyle/>
+          <a:p>
+            <a:pPr algn="l" marL="342900" indent="-342900">
+              <a:lnSpc>
+                <a:spcPts val="1620"/>
+              </a:lnSpc>
+              <a:spcAft>
+                <a:spcPts val="300"/>
+              </a:spcAft>
+              <a:buSzPct val="100000"/>
+              <a:buChar char="•"/>
+            </a:pPr>
+            <a:r>
+              <a:rPr lang="en-US" sz="1200" b="1" dirty="0">
+                <a:solidFill>
+                  <a:srgbClr val="1C2833"/>
+                </a:solidFill>
+                <a:latin typeface="Arial" pitchFamily="34" charset="0"/>
+                <a:ea typeface="Arial" pitchFamily="34" charset="-122"/>
+                <a:cs typeface="Arial" pitchFamily="34" charset="-120"/>
+              </a:rPr>
+              <a:t>Tier up:</a:t>
+            </a:r>
+            <a:pPr algn="l" indent="0" marL="0">
+              <a:lnSpc>
+                <a:spcPts val="1620"/>
+              </a:lnSpc>
+              <a:spcAft>
+                <a:spcPts val="300"/>
+              </a:spcAft>
+              <a:buNone/>
+            </a:pPr>
+            <a:r>
+              <a:rPr lang="en-US" sz="1200" dirty="0">
+                <a:solidFill>
+                  <a:srgbClr val="1C2833"/>
+                </a:solidFill>
+                <a:latin typeface="Arial" pitchFamily="34" charset="0"/>
+                <a:ea typeface="Arial" pitchFamily="34" charset="-122"/>
+                <a:cs typeface="Arial" pitchFamily="34" charset="-120"/>
+              </a:rPr>
+              <a:t> Find any 2-digit × 2-digit multiplication where the ×11 trick is NOT optimal but a different mental-math shortcut would beat long multiplication. (Examples: 25 × 24 = 25 × 24 = 600 via 25×4×6; 75 × 12 = 900 via 75×12 = 75 × 12.)</a:t>
+            </a:r>
+            <a:endParaRPr lang="en-US" sz="1200" dirty="0"/>
+          </a:p>
+          <a:p>
+            <a:pPr algn="l" marL="342900" indent="-342900">
+              <a:lnSpc>
+                <a:spcPts val="1620"/>
+              </a:lnSpc>
+              <a:spcAft>
+                <a:spcPts val="300"/>
+              </a:spcAft>
+              <a:buSzPct val="100000"/>
+              <a:buChar char="•"/>
+            </a:pPr>
+            <a:r>
+              <a:rPr lang="en-US" sz="1200" b="1" dirty="0">
+                <a:solidFill>
+                  <a:srgbClr val="1C2833"/>
+                </a:solidFill>
+                <a:latin typeface="Arial" pitchFamily="34" charset="0"/>
+                <a:ea typeface="Arial" pitchFamily="34" charset="-122"/>
+                <a:cs typeface="Arial" pitchFamily="34" charset="-120"/>
+              </a:rPr>
+              <a:t>Tier down:</a:t>
+            </a:r>
+            <a:pPr algn="l" indent="0" marL="0">
+              <a:lnSpc>
+                <a:spcPts val="1620"/>
+              </a:lnSpc>
+              <a:spcAft>
+                <a:spcPts val="300"/>
+              </a:spcAft>
+              <a:buNone/>
+            </a:pPr>
+            <a:r>
+              <a:rPr lang="en-US" sz="1200" dirty="0">
+                <a:solidFill>
+                  <a:srgbClr val="1C2833"/>
+                </a:solidFill>
+                <a:latin typeface="Arial" pitchFamily="34" charset="0"/>
+                <a:ea typeface="Arial" pitchFamily="34" charset="-122"/>
+                <a:cs typeface="Arial" pitchFamily="34" charset="-120"/>
+              </a:rPr>
+              <a:t> Focus on identifying ×11 vs. non-×11 cases. Skip the "best alternative method" question.</a:t>
+            </a:r>
+            <a:endParaRPr lang="en-US" sz="1200" dirty="0"/>
+          </a:p>
+        </p:txBody>
+      </p:sp>
+      <p:sp>
+        <p:nvSpPr>
+          <p:cNvPr id="5" name="Text 3"/>
+          <p:cNvSpPr/>
+          <p:nvPr/>
+        </p:nvSpPr>
+        <p:spPr>
+          <a:xfrm>
+            <a:off x="406301" y="4434929"/>
+            <a:ext cx="8498026" cy="213271"/>
+          </a:xfrm>
+          <a:prstGeom prst="rect">
+            <a:avLst/>
+          </a:prstGeom>
+          <a:noFill/>
+          <a:ln/>
+        </p:spPr>
+        <p:txBody>
+          <a:bodyPr wrap="square" lIns="0" tIns="0" rIns="0" bIns="0" rtlCol="0" anchor="t"/>
+          <a:lstStyle/>
+          <a:p>
+            <a:pPr algn="l" indent="0" marL="0">
+              <a:lnSpc>
+                <a:spcPts val="1680"/>
+              </a:lnSpc>
+              <a:spcBef>
+                <a:spcPts val="300"/>
+              </a:spcBef>
+              <a:spcAft>
+                <a:spcPts val="300"/>
+              </a:spcAft>
+              <a:buNone/>
+            </a:pPr>
+            <a:r>
+              <a:rPr lang="en-US" sz="1200" dirty="0">
+                <a:solidFill>
+                  <a:srgbClr val="1C2833"/>
+                </a:solidFill>
+                <a:latin typeface="Arial" pitchFamily="34" charset="0"/>
+                <a:ea typeface="Arial" pitchFamily="34" charset="-122"/>
+                <a:cs typeface="Arial" pitchFamily="34" charset="-120"/>
+              </a:rPr>
+              <a:t>Middle ·  · IKS Curriculum</a:t>
+            </a:r>
+            <a:endParaRPr lang="en-US" sz="1200" dirty="0"/>
+          </a:p>
+        </p:txBody>
+      </p:sp>
+    </p:spTree>
+  </p:cSld>
+  <p:clrMapOvr>
+    <a:masterClrMapping/>
+  </p:clrMapOvr>
+</p:sld>
+</file>
+
+<file path=ppt/slides/slide18.xml><?xml version="1.0" encoding="utf-8"?>
+<p:sld xmlns:a="http://schemas.openxmlformats.org/drawingml/2006/main" xmlns:r="http://schemas.openxmlformats.org/officeDocument/2006/relationships" xmlns:p="http://schemas.openxmlformats.org/presentationml/2006/main">
+  <p:cSld name="Slide 18">
+    <p:bg>
+      <p:bgPr>
+        <a:solidFill>
+          <a:srgbClr val="FFFFFF"/>
+        </a:solidFill>
+      </p:bgPr>
+    </p:bg>
+    <p:spTree>
+      <p:nvGrpSpPr>
+        <p:cNvPr id="1" name=""/>
+        <p:cNvGrpSpPr/>
+        <p:nvPr/>
+      </p:nvGrpSpPr>
+      <p:grpSpPr>
+        <a:xfrm>
+          <a:off x="0" y="0"/>
+          <a:ext cx="0" cy="0"/>
+          <a:chOff x="0" y="0"/>
+          <a:chExt cx="0" cy="0"/>
+        </a:xfrm>
+      </p:grpSpPr>
+      <p:sp>
+        <p:nvSpPr>
+          <p:cNvPr id="2" name="Text 0"/>
+          <p:cNvSpPr/>
+          <p:nvPr/>
+        </p:nvSpPr>
+        <p:spPr>
+          <a:xfrm>
+            <a:off x="0" y="0"/>
+            <a:ext cx="9144000" cy="101501"/>
+          </a:xfrm>
+          <a:prstGeom prst="rect">
+            <a:avLst/>
+          </a:prstGeom>
+          <a:solidFill>
+            <a:srgbClr val="277884"/>
+          </a:solidFill>
+          <a:ln/>
+        </p:spPr>
+        <p:txBody>
+          <a:bodyPr wrap="square" rtlCol="0" anchor="ctr"/>
+          <a:lstStyle/>
+          <a:p>
+            <a:pPr indent="0" marL="0">
+              <a:buNone/>
+            </a:pPr>
+            <a:endParaRPr lang="en-US" dirty="0"/>
+          </a:p>
+        </p:txBody>
+      </p:sp>
+      <p:sp>
+        <p:nvSpPr>
+          <p:cNvPr id="3" name="Text 1"/>
+          <p:cNvSpPr/>
+          <p:nvPr/>
+        </p:nvSpPr>
+        <p:spPr>
+          <a:xfrm>
+            <a:off x="406301" y="457051"/>
+            <a:ext cx="8498026" cy="274290"/>
+          </a:xfrm>
+          <a:prstGeom prst="rect">
+            <a:avLst/>
+          </a:prstGeom>
+          <a:noFill/>
+          <a:ln/>
+        </p:spPr>
+        <p:txBody>
+          <a:bodyPr wrap="square" lIns="0" tIns="0" rIns="0" bIns="0" rtlCol="0" anchor="t"/>
+          <a:lstStyle/>
+          <a:p>
+            <a:pPr algn="l" indent="0" marL="0">
+              <a:lnSpc>
+                <a:spcPts val="2160"/>
+              </a:lnSpc>
+              <a:spcBef>
+                <a:spcPts val="600"/>
+              </a:spcBef>
+              <a:spcAft>
+                <a:spcPts val="800"/>
+              </a:spcAft>
+              <a:buNone/>
+            </a:pPr>
+            <a:r>
+              <a:rPr lang="en-US" sz="1800" b="1" dirty="0">
+                <a:solidFill>
+                  <a:srgbClr val="FE4447"/>
+                </a:solidFill>
+                <a:latin typeface="Georgia" pitchFamily="34" charset="0"/>
+                <a:ea typeface="Georgia" pitchFamily="34" charset="-122"/>
+                <a:cs typeface="Georgia" pitchFamily="34" charset="-120"/>
+              </a:rPr>
+              <a:t>Teacher notes</a:t>
+            </a:r>
+            <a:endParaRPr lang="en-US" sz="1800" dirty="0"/>
+          </a:p>
+        </p:txBody>
+      </p:sp>
+      <p:sp>
+        <p:nvSpPr>
+          <p:cNvPr id="4" name="Text 2"/>
+          <p:cNvSpPr/>
+          <p:nvPr/>
+        </p:nvSpPr>
+        <p:spPr>
+          <a:xfrm>
+            <a:off x="634901" y="883593"/>
+            <a:ext cx="8102798" cy="975122"/>
+          </a:xfrm>
+          <a:prstGeom prst="rect">
+            <a:avLst/>
+          </a:prstGeom>
+          <a:noFill/>
+          <a:ln/>
+        </p:spPr>
+        <p:txBody>
+          <a:bodyPr wrap="square" lIns="0" tIns="0" rIns="0" bIns="0" rtlCol="0" anchor="t"/>
+          <a:lstStyle/>
+          <a:p>
+            <a:pPr algn="l" marL="342900" indent="-342900">
+              <a:lnSpc>
+                <a:spcPts val="1620"/>
+              </a:lnSpc>
+              <a:spcAft>
+                <a:spcPts val="300"/>
+              </a:spcAft>
+              <a:buSzPct val="100000"/>
+              <a:buChar char="•"/>
+            </a:pPr>
+            <a:r>
+              <a:rPr lang="en-US" sz="1200" dirty="0">
+                <a:solidFill>
+                  <a:srgbClr val="1C2833"/>
+                </a:solidFill>
+                <a:latin typeface="Arial" pitchFamily="34" charset="0"/>
+                <a:ea typeface="Arial" pitchFamily="34" charset="-122"/>
+                <a:cs typeface="Arial" pitchFamily="34" charset="-120"/>
+              </a:rPr>
+              <a:t>This day is short by design — it's the honesty hour. Don't over-fill.</a:t>
+            </a:r>
+            <a:endParaRPr lang="en-US" sz="1200" dirty="0"/>
+          </a:p>
+          <a:p>
+            <a:pPr algn="l" marL="342900" indent="-342900">
+              <a:lnSpc>
+                <a:spcPts val="1620"/>
+              </a:lnSpc>
+              <a:spcAft>
+                <a:spcPts val="300"/>
+              </a:spcAft>
+              <a:buSzPct val="100000"/>
+              <a:buChar char="•"/>
+            </a:pPr>
+            <a:r>
+              <a:rPr lang="en-US" sz="1200" dirty="0">
+                <a:solidFill>
+                  <a:srgbClr val="1C2833"/>
+                </a:solidFill>
+                <a:latin typeface="Arial" pitchFamily="34" charset="0"/>
+                <a:ea typeface="Arial" pitchFamily="34" charset="-122"/>
+                <a:cs typeface="Arial" pitchFamily="34" charset="-120"/>
+              </a:rPr>
+              <a:t>Some students will resist the framing </a:t>
+            </a:r>
+            <a:pPr algn="l" indent="0" marL="0">
+              <a:lnSpc>
+                <a:spcPts val="1620"/>
+              </a:lnSpc>
+              <a:spcAft>
+                <a:spcPts val="300"/>
+              </a:spcAft>
+              <a:buNone/>
+            </a:pPr>
+            <a:r>
+              <a:rPr lang="en-US" sz="1200" i="1" dirty="0">
+                <a:solidFill>
+                  <a:srgbClr val="1C2833"/>
+                </a:solidFill>
+                <a:latin typeface="Arial" pitchFamily="34" charset="0"/>
+                <a:ea typeface="Arial" pitchFamily="34" charset="-122"/>
+                <a:cs typeface="Arial" pitchFamily="34" charset="-120"/>
+              </a:rPr>
+              <a:t>"the trick has a limited domain"</a:t>
+            </a:r>
+            <a:pPr algn="l" indent="0" marL="0">
+              <a:lnSpc>
+                <a:spcPts val="1620"/>
+              </a:lnSpc>
+              <a:spcAft>
+                <a:spcPts val="300"/>
+              </a:spcAft>
+              <a:buNone/>
+            </a:pPr>
+            <a:r>
+              <a:rPr lang="en-US" sz="1200" dirty="0">
+                <a:solidFill>
+                  <a:srgbClr val="1C2833"/>
+                </a:solidFill>
+                <a:latin typeface="Arial" pitchFamily="34" charset="0"/>
+                <a:ea typeface="Arial" pitchFamily="34" charset="-122"/>
+                <a:cs typeface="Arial" pitchFamily="34" charset="-120"/>
+              </a:rPr>
+              <a:t> and try to force-fit ×23 into a pattern. Honour the impulse, but redirect: </a:t>
+            </a:r>
+            <a:pPr algn="l" indent="0" marL="0">
+              <a:lnSpc>
+                <a:spcPts val="1620"/>
+              </a:lnSpc>
+              <a:spcAft>
+                <a:spcPts val="300"/>
+              </a:spcAft>
+              <a:buNone/>
+            </a:pPr>
+            <a:r>
+              <a:rPr lang="en-US" sz="1200" i="1" dirty="0">
+                <a:solidFill>
+                  <a:srgbClr val="1C2833"/>
+                </a:solidFill>
+                <a:latin typeface="Arial" pitchFamily="34" charset="0"/>
+                <a:ea typeface="Arial" pitchFamily="34" charset="-122"/>
+                <a:cs typeface="Arial" pitchFamily="34" charset="-120"/>
+              </a:rPr>
+              <a:t>"You'd be inventing your own technique — which is great, but it's not what this trick does."</a:t>
+            </a:r>
+            <a:endParaRPr lang="en-US" sz="1200" dirty="0"/>
+          </a:p>
+          <a:p>
+            <a:pPr algn="l" marL="342900" indent="-342900">
+              <a:lnSpc>
+                <a:spcPts val="1620"/>
+              </a:lnSpc>
+              <a:spcAft>
+                <a:spcPts val="300"/>
+              </a:spcAft>
+              <a:buSzPct val="100000"/>
+              <a:buChar char="•"/>
+            </a:pPr>
+            <a:r>
+              <a:rPr lang="en-US" sz="1200" dirty="0">
+                <a:solidFill>
+                  <a:srgbClr val="1C2833"/>
+                </a:solidFill>
+                <a:latin typeface="Arial" pitchFamily="34" charset="0"/>
+                <a:ea typeface="Arial" pitchFamily="34" charset="-122"/>
+                <a:cs typeface="Arial" pitchFamily="34" charset="-120"/>
+              </a:rPr>
+              <a:t>Mention that Tirthaji's 16 sūtras collectively cover a wide territory; ×11 is just one of them. This sets up Day 8.</a:t>
+            </a:r>
+            <a:endParaRPr lang="en-US" sz="1200" dirty="0"/>
+          </a:p>
+        </p:txBody>
+      </p:sp>
+      <p:sp>
+        <p:nvSpPr>
+          <p:cNvPr id="5" name="Text 3"/>
+          <p:cNvSpPr/>
+          <p:nvPr/>
+        </p:nvSpPr>
+        <p:spPr>
+          <a:xfrm>
+            <a:off x="406301" y="4434929"/>
+            <a:ext cx="8498026" cy="213271"/>
+          </a:xfrm>
+          <a:prstGeom prst="rect">
+            <a:avLst/>
+          </a:prstGeom>
+          <a:noFill/>
+          <a:ln/>
+        </p:spPr>
+        <p:txBody>
+          <a:bodyPr wrap="square" lIns="0" tIns="0" rIns="0" bIns="0" rtlCol="0" anchor="t"/>
+          <a:lstStyle/>
+          <a:p>
+            <a:pPr algn="l" indent="0" marL="0">
+              <a:lnSpc>
+                <a:spcPts val="1680"/>
+              </a:lnSpc>
+              <a:spcBef>
+                <a:spcPts val="300"/>
+              </a:spcBef>
+              <a:spcAft>
+                <a:spcPts val="300"/>
+              </a:spcAft>
+              <a:buNone/>
+            </a:pPr>
+            <a:r>
+              <a:rPr lang="en-US" sz="1200" dirty="0">
+                <a:solidFill>
+                  <a:srgbClr val="1C2833"/>
+                </a:solidFill>
+                <a:latin typeface="Arial" pitchFamily="34" charset="0"/>
+                <a:ea typeface="Arial" pitchFamily="34" charset="-122"/>
+                <a:cs typeface="Arial" pitchFamily="34" charset="-120"/>
+              </a:rPr>
+              <a:t>Middle ·  · IKS Curriculum</a:t>
+            </a:r>
+            <a:endParaRPr lang="en-US" sz="1200" dirty="0"/>
+          </a:p>
+        </p:txBody>
+      </p:sp>
+    </p:spTree>
+  </p:cSld>
+  <p:clrMapOvr>
+    <a:masterClrMapping/>
+  </p:clrMapOvr>
+</p:sld>
+</file>
+
+<file path=ppt/slides/slide19.xml><?xml version="1.0" encoding="utf-8"?>
+<p:sld xmlns:a="http://schemas.openxmlformats.org/drawingml/2006/main" xmlns:r="http://schemas.openxmlformats.org/officeDocument/2006/relationships" xmlns:p="http://schemas.openxmlformats.org/presentationml/2006/main">
+  <p:cSld name="Slide 19">
+    <p:bg>
+      <p:bgPr>
+        <a:solidFill>
+          <a:srgbClr val="FFFFFF"/>
+        </a:solidFill>
+      </p:bgPr>
+    </p:bg>
+    <p:spTree>
+      <p:nvGrpSpPr>
+        <p:cNvPr id="1" name=""/>
+        <p:cNvGrpSpPr/>
+        <p:nvPr/>
+      </p:nvGrpSpPr>
+      <p:grpSpPr>
+        <a:xfrm>
+          <a:off x="0" y="0"/>
+          <a:ext cx="0" cy="0"/>
+          <a:chOff x="0" y="0"/>
+          <a:chExt cx="0" cy="0"/>
+        </a:xfrm>
+      </p:grpSpPr>
+      <p:sp>
+        <p:nvSpPr>
+          <p:cNvPr id="2" name="Text 0"/>
+          <p:cNvSpPr/>
+          <p:nvPr/>
+        </p:nvSpPr>
+        <p:spPr>
+          <a:xfrm>
+            <a:off x="0" y="0"/>
+            <a:ext cx="9144000" cy="101501"/>
+          </a:xfrm>
+          <a:prstGeom prst="rect">
+            <a:avLst/>
+          </a:prstGeom>
+          <a:solidFill>
+            <a:srgbClr val="277884"/>
+          </a:solidFill>
+          <a:ln/>
+        </p:spPr>
+        <p:txBody>
+          <a:bodyPr wrap="square" rtlCol="0" anchor="ctr"/>
+          <a:lstStyle/>
+          <a:p>
+            <a:pPr indent="0" marL="0">
+              <a:buNone/>
+            </a:pPr>
+            <a:endParaRPr lang="en-US" dirty="0"/>
+          </a:p>
+        </p:txBody>
+      </p:sp>
+      <p:sp>
+        <p:nvSpPr>
+          <p:cNvPr id="3" name="Text 1"/>
+          <p:cNvSpPr/>
+          <p:nvPr/>
+        </p:nvSpPr>
+        <p:spPr>
+          <a:xfrm>
+            <a:off x="406301" y="457051"/>
+            <a:ext cx="8498026" cy="274290"/>
+          </a:xfrm>
+          <a:prstGeom prst="rect">
+            <a:avLst/>
+          </a:prstGeom>
+          <a:noFill/>
+          <a:ln/>
+        </p:spPr>
+        <p:txBody>
+          <a:bodyPr wrap="square" lIns="0" tIns="0" rIns="0" bIns="0" rtlCol="0" anchor="t"/>
+          <a:lstStyle/>
+          <a:p>
+            <a:pPr algn="l" indent="0" marL="0">
+              <a:lnSpc>
+                <a:spcPts val="2160"/>
+              </a:lnSpc>
+              <a:spcBef>
+                <a:spcPts val="600"/>
+              </a:spcBef>
+              <a:spcAft>
+                <a:spcPts val="800"/>
+              </a:spcAft>
+              <a:buNone/>
+            </a:pPr>
+            <a:r>
+              <a:rPr lang="en-US" sz="1800" b="1" dirty="0">
+                <a:solidFill>
+                  <a:srgbClr val="FE4447"/>
+                </a:solidFill>
+                <a:latin typeface="Georgia" pitchFamily="34" charset="0"/>
+                <a:ea typeface="Georgia" pitchFamily="34" charset="-122"/>
+                <a:cs typeface="Georgia" pitchFamily="34" charset="-120"/>
+              </a:rPr>
+              <a:t>Citation(s) used in this lesson</a:t>
+            </a:r>
+            <a:endParaRPr lang="en-US" sz="1800" dirty="0"/>
+          </a:p>
+        </p:txBody>
+      </p:sp>
+      <p:sp>
+        <p:nvSpPr>
+          <p:cNvPr id="4" name="Text 2"/>
+          <p:cNvSpPr/>
+          <p:nvPr/>
+        </p:nvSpPr>
+        <p:spPr>
+          <a:xfrm>
+            <a:off x="634901" y="883593"/>
+            <a:ext cx="8102798" cy="525661"/>
+          </a:xfrm>
+          <a:prstGeom prst="rect">
+            <a:avLst/>
+          </a:prstGeom>
+          <a:noFill/>
+          <a:ln/>
+        </p:spPr>
+        <p:txBody>
+          <a:bodyPr wrap="square" lIns="0" tIns="0" rIns="0" bIns="0" rtlCol="0" anchor="t"/>
+          <a:lstStyle/>
+          <a:p>
+            <a:pPr algn="l" marL="342900" indent="-342900">
+              <a:lnSpc>
+                <a:spcPts val="1620"/>
+              </a:lnSpc>
+              <a:spcAft>
+                <a:spcPts val="300"/>
+              </a:spcAft>
+              <a:buSzPct val="100000"/>
+              <a:buChar char="•"/>
+            </a:pPr>
+            <a:r>
+              <a:rPr lang="en-US" sz="1200" dirty="0">
+                <a:solidFill>
+                  <a:srgbClr val="1C2833"/>
+                </a:solidFill>
+                <a:latin typeface="Arial" pitchFamily="34" charset="0"/>
+                <a:ea typeface="Arial" pitchFamily="34" charset="-122"/>
+                <a:cs typeface="Arial" pitchFamily="34" charset="-120"/>
+              </a:rPr>
+              <a:t>Tirthaji (1965), sūtra list (especially </a:t>
+            </a:r>
+            <a:pPr algn="l" indent="0" marL="0">
+              <a:lnSpc>
+                <a:spcPts val="1620"/>
+              </a:lnSpc>
+              <a:spcAft>
+                <a:spcPts val="300"/>
+              </a:spcAft>
+              <a:buNone/>
+            </a:pPr>
+            <a:r>
+              <a:rPr lang="en-US" sz="1200" i="1" dirty="0">
+                <a:solidFill>
+                  <a:srgbClr val="1C2833"/>
+                </a:solidFill>
+                <a:latin typeface="Arial" pitchFamily="34" charset="0"/>
+                <a:ea typeface="Arial" pitchFamily="34" charset="-122"/>
+                <a:cs typeface="Arial" pitchFamily="34" charset="-120"/>
+              </a:rPr>
+              <a:t>Nikhilam</a:t>
+            </a:r>
+            <a:pPr algn="l" indent="0" marL="0">
+              <a:lnSpc>
+                <a:spcPts val="1620"/>
+              </a:lnSpc>
+              <a:spcAft>
+                <a:spcPts val="300"/>
+              </a:spcAft>
+              <a:buNone/>
+            </a:pPr>
+            <a:r>
+              <a:rPr lang="en-US" sz="1200" dirty="0">
+                <a:solidFill>
+                  <a:srgbClr val="1C2833"/>
+                </a:solidFill>
+                <a:latin typeface="Arial" pitchFamily="34" charset="0"/>
+                <a:ea typeface="Arial" pitchFamily="34" charset="-122"/>
+                <a:cs typeface="Arial" pitchFamily="34" charset="-120"/>
+              </a:rPr>
+              <a:t> — sūtra 2, and </a:t>
+            </a:r>
+            <a:pPr algn="l" indent="0" marL="0">
+              <a:lnSpc>
+                <a:spcPts val="1620"/>
+              </a:lnSpc>
+              <a:spcAft>
+                <a:spcPts val="300"/>
+              </a:spcAft>
+              <a:buNone/>
+            </a:pPr>
+            <a:r>
+              <a:rPr lang="en-US" sz="1200" i="1" dirty="0">
+                <a:solidFill>
+                  <a:srgbClr val="1C2833"/>
+                </a:solidFill>
+                <a:latin typeface="Arial" pitchFamily="34" charset="0"/>
+                <a:ea typeface="Arial" pitchFamily="34" charset="-122"/>
+                <a:cs typeface="Arial" pitchFamily="34" charset="-120"/>
+              </a:rPr>
+              <a:t>Ūrdhva-tiryagbhyāṁ</a:t>
+            </a:r>
+            <a:pPr algn="l" indent="0" marL="0">
+              <a:lnSpc>
+                <a:spcPts val="1620"/>
+              </a:lnSpc>
+              <a:spcAft>
+                <a:spcPts val="300"/>
+              </a:spcAft>
+              <a:buNone/>
+            </a:pPr>
+            <a:r>
+              <a:rPr lang="en-US" sz="1200" dirty="0">
+                <a:solidFill>
+                  <a:srgbClr val="1C2833"/>
+                </a:solidFill>
+                <a:latin typeface="Arial" pitchFamily="34" charset="0"/>
+                <a:ea typeface="Arial" pitchFamily="34" charset="-122"/>
+                <a:cs typeface="Arial" pitchFamily="34" charset="-120"/>
+              </a:rPr>
+              <a:t> — sūtra 3).</a:t>
+            </a:r>
+            <a:endParaRPr lang="en-US" sz="1200" dirty="0"/>
+          </a:p>
+          <a:p>
+            <a:pPr algn="l" marL="342900" indent="-342900">
+              <a:lnSpc>
+                <a:spcPts val="1620"/>
+              </a:lnSpc>
+              <a:spcAft>
+                <a:spcPts val="300"/>
+              </a:spcAft>
+              <a:buSzPct val="100000"/>
+              <a:buChar char="•"/>
+            </a:pPr>
+            <a:r>
+              <a:rPr lang="en-US" sz="1200" i="1" dirty="0">
+                <a:solidFill>
+                  <a:srgbClr val="1C2833"/>
+                </a:solidFill>
+                <a:latin typeface="Arial" pitchFamily="34" charset="0"/>
+                <a:ea typeface="Arial" pitchFamily="34" charset="-122"/>
+                <a:cs typeface="Arial" pitchFamily="34" charset="-120"/>
+              </a:rPr>
               <a:t>Microsoft Word - sutras1.pdf</a:t>
             </a:r>
             <a:pPr algn="l" indent="0" marL="0">
@@ -3350,7 +6221,7 @@
       </p:sp>
       <p:sp>
         <p:nvSpPr>
-          <p:cNvPr id="6" name="Text 4"/>
+          <p:cNvPr id="5" name="Text 3"/>
           <p:cNvSpPr/>
           <p:nvPr/>
         </p:nvSpPr>
@@ -3500,7 +6371,7 @@
                 <a:ea typeface="Georgia" pitchFamily="34" charset="-122"/>
                 <a:cs typeface="Georgia" pitchFamily="34" charset="-120"/>
               </a:rPr>
-              <a:t>Materials</a:t>
+              <a:t>Learning objective</a:t>
             </a:r>
             <a:endParaRPr lang="en-US" sz="1800" dirty="0"/>
           </a:p>
@@ -3515,7 +6386,7 @@
         <p:spPr>
           <a:xfrm>
             <a:off x="406301" y="870942"/>
-            <a:ext cx="8498026" cy="213271"/>
+            <a:ext cx="8498026" cy="639812"/>
           </a:xfrm>
           <a:prstGeom prst="rect">
             <a:avLst/>
@@ -3548,7 +6419,7 @@
                 <a:ea typeface="Arial" pitchFamily="34" charset="-122"/>
                 <a:cs typeface="Arial" pitchFamily="34" charset="-120"/>
               </a:rPr>
-              <a:t>– Whiteboard. – 8-problem comparison worksheet (×11 trick vs. long multiplication vs. </a:t>
+              <a:t>By the end of this lesson, students will identify which multiplications are well-suited to the </a:t>
             </a:r>
             <a:pPr algn="l" indent="0" marL="0">
               <a:lnSpc>
@@ -3571,6 +6442,98 @@
                 <a:ea typeface="Arial" pitchFamily="34" charset="-122"/>
                 <a:cs typeface="Arial" pitchFamily="34" charset="-120"/>
               </a:rPr>
+              <a:t>Ekādhikena</a:t>
+            </a:r>
+            <a:pPr algn="l" indent="0" marL="0">
+              <a:lnSpc>
+                <a:spcPts val="1680"/>
+              </a:lnSpc>
+              <a:spcBef>
+                <a:spcPts val="300"/>
+              </a:spcBef>
+              <a:spcAft>
+                <a:spcPts val="300"/>
+              </a:spcAft>
+              <a:buNone/>
+            </a:pPr>
+            <a:r>
+              <a:rPr lang="en-US" sz="1200" dirty="0">
+                <a:solidFill>
+                  <a:srgbClr val="1C2833"/>
+                </a:solidFill>
+                <a:latin typeface="Arial" pitchFamily="34" charset="0"/>
+                <a:ea typeface="Arial" pitchFamily="34" charset="-122"/>
+                <a:cs typeface="Arial" pitchFamily="34" charset="-120"/>
+              </a:rPr>
+              <a:t>/</a:t>
+            </a:r>
+            <a:pPr algn="l" indent="0" marL="0">
+              <a:lnSpc>
+                <a:spcPts val="1680"/>
+              </a:lnSpc>
+              <a:spcBef>
+                <a:spcPts val="300"/>
+              </a:spcBef>
+              <a:spcAft>
+                <a:spcPts val="300"/>
+              </a:spcAft>
+              <a:buNone/>
+            </a:pPr>
+            <a:r>
+              <a:rPr lang="en-US" sz="1200" i="1" dirty="0">
+                <a:solidFill>
+                  <a:srgbClr val="1C2833"/>
+                </a:solidFill>
+                <a:latin typeface="Arial" pitchFamily="34" charset="0"/>
+                <a:ea typeface="Arial" pitchFamily="34" charset="-122"/>
+                <a:cs typeface="Arial" pitchFamily="34" charset="-120"/>
+              </a:rPr>
+              <a:t>Anurūpyeṇa</a:t>
+            </a:r>
+            <a:pPr algn="l" indent="0" marL="0">
+              <a:lnSpc>
+                <a:spcPts val="1680"/>
+              </a:lnSpc>
+              <a:spcBef>
+                <a:spcPts val="300"/>
+              </a:spcBef>
+              <a:spcAft>
+                <a:spcPts val="300"/>
+              </a:spcAft>
+              <a:buNone/>
+            </a:pPr>
+            <a:r>
+              <a:rPr lang="en-US" sz="1200" dirty="0">
+                <a:solidFill>
+                  <a:srgbClr val="1C2833"/>
+                </a:solidFill>
+                <a:latin typeface="Arial" pitchFamily="34" charset="0"/>
+                <a:ea typeface="Arial" pitchFamily="34" charset="-122"/>
+                <a:cs typeface="Arial" pitchFamily="34" charset="-120"/>
+              </a:rPr>
+              <a:t> family and which are not, and will articulate the conditions that make a different sūtra (</a:t>
+            </a:r>
+            <a:pPr algn="l" indent="0" marL="0">
+              <a:lnSpc>
+                <a:spcPts val="1680"/>
+              </a:lnSpc>
+              <a:spcBef>
+                <a:spcPts val="300"/>
+              </a:spcBef>
+              <a:spcAft>
+                <a:spcPts val="300"/>
+              </a:spcAft>
+              <a:buNone/>
+            </a:pPr>
+            <a:r>
+              <a:rPr lang="en-US" sz="1200" i="1" dirty="0">
+                <a:solidFill>
+                  <a:srgbClr val="1C2833"/>
+                </a:solidFill>
+                <a:latin typeface="Arial" pitchFamily="34" charset="0"/>
+                <a:ea typeface="Arial" pitchFamily="34" charset="-122"/>
+                <a:cs typeface="Arial" pitchFamily="34" charset="-120"/>
+              </a:rPr>
               <a:t>Nikhilam</a:t>
             </a:r>
             <a:pPr algn="l" indent="0" marL="0">
@@ -3594,7 +6557,53 @@
                 <a:ea typeface="Arial" pitchFamily="34" charset="-122"/>
                 <a:cs typeface="Arial" pitchFamily="34" charset="-120"/>
               </a:rPr>
-              <a:t>-style).</a:t>
+              <a:t> or </a:t>
+            </a:r>
+            <a:pPr algn="l" indent="0" marL="0">
+              <a:lnSpc>
+                <a:spcPts val="1680"/>
+              </a:lnSpc>
+              <a:spcBef>
+                <a:spcPts val="300"/>
+              </a:spcBef>
+              <a:spcAft>
+                <a:spcPts val="300"/>
+              </a:spcAft>
+              <a:buNone/>
+            </a:pPr>
+            <a:r>
+              <a:rPr lang="en-US" sz="1200" i="1" dirty="0">
+                <a:solidFill>
+                  <a:srgbClr val="1C2833"/>
+                </a:solidFill>
+                <a:latin typeface="Arial" pitchFamily="34" charset="0"/>
+                <a:ea typeface="Arial" pitchFamily="34" charset="-122"/>
+                <a:cs typeface="Arial" pitchFamily="34" charset="-120"/>
+              </a:rPr>
+              <a:t>Ūrdhva-tiryagbhyāṁ</a:t>
+            </a:r>
+            <a:pPr algn="l" indent="0" marL="0">
+              <a:lnSpc>
+                <a:spcPts val="1680"/>
+              </a:lnSpc>
+              <a:spcBef>
+                <a:spcPts val="300"/>
+              </a:spcBef>
+              <a:spcAft>
+                <a:spcPts val="300"/>
+              </a:spcAft>
+              <a:buNone/>
+            </a:pPr>
+            <a:r>
+              <a:rPr lang="en-US" sz="1200" dirty="0">
+                <a:solidFill>
+                  <a:srgbClr val="1C2833"/>
+                </a:solidFill>
+                <a:latin typeface="Arial" pitchFamily="34" charset="0"/>
+                <a:ea typeface="Arial" pitchFamily="34" charset="-122"/>
+                <a:cs typeface="Arial" pitchFamily="34" charset="-120"/>
+              </a:rPr>
+              <a:t>) more appropriate.</a:t>
             </a:r>
             <a:endParaRPr lang="en-US" sz="1200" dirty="0"/>
           </a:p>
@@ -3752,7 +6761,7 @@
                 <a:ea typeface="Georgia" pitchFamily="34" charset="-122"/>
                 <a:cs typeface="Georgia" pitchFamily="34" charset="-120"/>
               </a:rPr>
-              <a:t>Lesson flow</a:t>
+              <a:t>Materials</a:t>
             </a:r>
             <a:endParaRPr lang="en-US" sz="1800" dirty="0"/>
           </a:p>
@@ -3761,6 +6770,116 @@
       <p:sp>
         <p:nvSpPr>
           <p:cNvPr id="4" name="Text 2"/>
+          <p:cNvSpPr/>
+          <p:nvPr/>
+        </p:nvSpPr>
+        <p:spPr>
+          <a:xfrm>
+            <a:off x="634901" y="883593"/>
+            <a:ext cx="8102798" cy="525661"/>
+          </a:xfrm>
+          <a:prstGeom prst="rect">
+            <a:avLst/>
+          </a:prstGeom>
+          <a:noFill/>
+          <a:ln/>
+        </p:spPr>
+        <p:txBody>
+          <a:bodyPr wrap="square" lIns="0" tIns="0" rIns="0" bIns="0" rtlCol="0" anchor="t"/>
+          <a:lstStyle/>
+          <a:p>
+            <a:pPr algn="l" marL="342900" indent="-342900">
+              <a:lnSpc>
+                <a:spcPts val="1620"/>
+              </a:lnSpc>
+              <a:spcAft>
+                <a:spcPts val="300"/>
+              </a:spcAft>
+              <a:buSzPct val="100000"/>
+              <a:buChar char="•"/>
+            </a:pPr>
+            <a:r>
+              <a:rPr lang="en-US" sz="1200" dirty="0">
+                <a:solidFill>
+                  <a:srgbClr val="1C2833"/>
+                </a:solidFill>
+                <a:latin typeface="Arial" pitchFamily="34" charset="0"/>
+                <a:ea typeface="Arial" pitchFamily="34" charset="-122"/>
+                <a:cs typeface="Arial" pitchFamily="34" charset="-120"/>
+              </a:rPr>
+              <a:t>Whiteboard.</a:t>
+            </a:r>
+            <a:endParaRPr lang="en-US" sz="1200" dirty="0"/>
+          </a:p>
+          <a:p>
+            <a:pPr algn="l" marL="342900" indent="-342900">
+              <a:lnSpc>
+                <a:spcPts val="1620"/>
+              </a:lnSpc>
+              <a:spcAft>
+                <a:spcPts val="300"/>
+              </a:spcAft>
+              <a:buSzPct val="100000"/>
+              <a:buChar char="•"/>
+            </a:pPr>
+            <a:r>
+              <a:rPr lang="en-US" sz="1200" dirty="0">
+                <a:solidFill>
+                  <a:srgbClr val="1C2833"/>
+                </a:solidFill>
+                <a:latin typeface="Arial" pitchFamily="34" charset="0"/>
+                <a:ea typeface="Arial" pitchFamily="34" charset="-122"/>
+                <a:cs typeface="Arial" pitchFamily="34" charset="-120"/>
+              </a:rPr>
+              <a:t>8-problem comparison worksheet (×11 trick vs. long multiplication vs. </a:t>
+            </a:r>
+            <a:pPr algn="l" indent="0" marL="0">
+              <a:lnSpc>
+                <a:spcPts val="1620"/>
+              </a:lnSpc>
+              <a:spcAft>
+                <a:spcPts val="300"/>
+              </a:spcAft>
+              <a:buNone/>
+            </a:pPr>
+            <a:r>
+              <a:rPr lang="en-US" sz="1200" i="1" dirty="0">
+                <a:solidFill>
+                  <a:srgbClr val="1C2833"/>
+                </a:solidFill>
+                <a:latin typeface="Arial" pitchFamily="34" charset="0"/>
+                <a:ea typeface="Arial" pitchFamily="34" charset="-122"/>
+                <a:cs typeface="Arial" pitchFamily="34" charset="-120"/>
+              </a:rPr>
+              <a:t>Nikhilam</a:t>
+            </a:r>
+            <a:pPr algn="l" indent="0" marL="0">
+              <a:lnSpc>
+                <a:spcPts val="1620"/>
+              </a:lnSpc>
+              <a:spcAft>
+                <a:spcPts val="300"/>
+              </a:spcAft>
+              <a:buNone/>
+            </a:pPr>
+            <a:r>
+              <a:rPr lang="en-US" sz="1200" dirty="0">
+                <a:solidFill>
+                  <a:srgbClr val="1C2833"/>
+                </a:solidFill>
+                <a:latin typeface="Arial" pitchFamily="34" charset="0"/>
+                <a:ea typeface="Arial" pitchFamily="34" charset="-122"/>
+                <a:cs typeface="Arial" pitchFamily="34" charset="-120"/>
+              </a:rPr>
+              <a:t>-style).</a:t>
+            </a:r>
+            <a:endParaRPr lang="en-US" sz="1200" dirty="0"/>
+          </a:p>
+        </p:txBody>
+      </p:sp>
+      <p:sp>
+        <p:nvSpPr>
+          <p:cNvPr id="5" name="Text 3"/>
           <p:cNvSpPr/>
           <p:nvPr/>
         </p:nvSpPr>
@@ -3910,7 +7029,7 @@
                 <a:ea typeface="Georgia" pitchFamily="34" charset="-122"/>
                 <a:cs typeface="Georgia" pitchFamily="34" charset="-120"/>
               </a:rPr>
-              <a:t>Warm-up (5 min)</a:t>
+              <a:t>Lesson flow</a:t>
             </a:r>
             <a:endParaRPr lang="en-US" sz="1800" dirty="0"/>
           </a:p>
@@ -3919,54 +7038,6 @@
       <p:sp>
         <p:nvSpPr>
           <p:cNvPr id="4" name="Text 2"/>
-          <p:cNvSpPr/>
-          <p:nvPr/>
-        </p:nvSpPr>
-        <p:spPr>
-          <a:xfrm>
-            <a:off x="406301" y="870942"/>
-            <a:ext cx="8498026" cy="213271"/>
-          </a:xfrm>
-          <a:prstGeom prst="rect">
-            <a:avLst/>
-          </a:prstGeom>
-          <a:noFill/>
-          <a:ln/>
-        </p:spPr>
-        <p:txBody>
-          <a:bodyPr wrap="square" lIns="0" tIns="0" rIns="0" bIns="0" rtlCol="0" anchor="t"/>
-          <a:lstStyle/>
-          <a:p>
-            <a:pPr algn="l" indent="0" marL="0">
-              <a:lnSpc>
-                <a:spcPts val="1680"/>
-              </a:lnSpc>
-              <a:spcBef>
-                <a:spcPts val="300"/>
-              </a:spcBef>
-              <a:spcAft>
-                <a:spcPts val="300"/>
-              </a:spcAft>
-              <a:buNone/>
-            </a:pPr>
-            <a:r>
-              <a:rPr lang="en-US" sz="1200" dirty="0">
-                <a:solidFill>
-                  <a:srgbClr val="1C2833"/>
-                </a:solidFill>
-                <a:latin typeface="Arial" pitchFamily="34" charset="0"/>
-                <a:ea typeface="Arial" pitchFamily="34" charset="-122"/>
-                <a:cs typeface="Arial" pitchFamily="34" charset="-120"/>
-              </a:rPr>
-              <a:t>– Quick chorus: 10 problems from Day 6's ×12–×19 family.</a:t>
-            </a:r>
-            <a:endParaRPr lang="en-US" sz="1200" dirty="0"/>
-          </a:p>
-        </p:txBody>
-      </p:sp>
-      <p:sp>
-        <p:nvSpPr>
-          <p:cNvPr id="5" name="Text 3"/>
           <p:cNvSpPr/>
           <p:nvPr/>
         </p:nvSpPr>
@@ -4116,7 +7187,7 @@
                 <a:ea typeface="Georgia" pitchFamily="34" charset="-122"/>
                 <a:cs typeface="Georgia" pitchFamily="34" charset="-120"/>
               </a:rPr>
-              <a:t>Core (20 min) — Where the trick breaks down</a:t>
+              <a:t>Warm-up (5 min)</a:t>
             </a:r>
             <a:endParaRPr lang="en-US" sz="1800" dirty="0"/>
           </a:p>
@@ -4154,26 +7225,6 @@
               <a:buChar char="•"/>
             </a:pPr>
             <a:r>
-              <a:rPr lang="en-US" sz="1200" b="1" dirty="0">
-                <a:solidFill>
-                  <a:srgbClr val="1C2833"/>
-                </a:solidFill>
-                <a:latin typeface="Arial" pitchFamily="34" charset="0"/>
-                <a:ea typeface="Arial" pitchFamily="34" charset="-122"/>
-                <a:cs typeface="Arial" pitchFamily="34" charset="-120"/>
-              </a:rPr>
-              <a:t>Try ×23.</a:t>
-            </a:r>
-            <a:pPr algn="l" indent="0" marL="0">
-              <a:lnSpc>
-                <a:spcPts val="1620"/>
-              </a:lnSpc>
-              <a:spcAft>
-                <a:spcPts val="300"/>
-              </a:spcAft>
-              <a:buNone/>
-            </a:pPr>
-            <a:r>
               <a:rPr lang="en-US" sz="1200" dirty="0">
                 <a:solidFill>
                   <a:srgbClr val="1C2833"/>
@@ -4182,27 +7233,7 @@
                 <a:ea typeface="Arial" pitchFamily="34" charset="-122"/>
                 <a:cs typeface="Arial" pitchFamily="34" charset="-120"/>
               </a:rPr>
-              <a:t> </a:t>
-            </a:r>
-            <a:pPr algn="l" indent="0" marL="0">
-              <a:lnSpc>
-                <a:spcPts val="1620"/>
-              </a:lnSpc>
-              <a:spcAft>
-                <a:spcPts val="300"/>
-              </a:spcAft>
-              <a:buNone/>
-            </a:pPr>
-            <a:r>
-              <a:rPr lang="en-US" sz="1200" i="1" dirty="0">
-                <a:solidFill>
-                  <a:srgbClr val="1C2833"/>
-                </a:solidFill>
-                <a:latin typeface="Arial" pitchFamily="34" charset="0"/>
-                <a:ea typeface="Arial" pitchFamily="34" charset="-122"/>
-                <a:cs typeface="Arial" pitchFamily="34" charset="-120"/>
-              </a:rPr>
-              <a:t>"Let's try the same proportional pattern with multiplier 23 = 20 + 3."</a:t>
+              <a:t>Quick chorus: 10 problems from Day 6's ×12–×19 family.</a:t>
             </a:r>
             <a:endParaRPr lang="en-US" sz="1200" dirty="0"/>
           </a:p>
@@ -4216,1253 +7247,7 @@
         </p:nvSpPr>
         <p:spPr>
           <a:xfrm>
-            <a:off x="406301" y="1254323"/>
-            <a:ext cx="8498026" cy="426541"/>
-          </a:xfrm>
-          <a:prstGeom prst="rect">
-            <a:avLst/>
-          </a:prstGeom>
-          <a:noFill/>
-          <a:ln/>
-        </p:spPr>
-        <p:txBody>
-          <a:bodyPr wrap="square" lIns="0" tIns="0" rIns="0" bIns="0" rtlCol="0" anchor="t"/>
-          <a:lstStyle/>
-          <a:p>
-            <a:pPr algn="l" indent="0" marL="0">
-              <a:lnSpc>
-                <a:spcPts val="1680"/>
-              </a:lnSpc>
-              <a:spcBef>
-                <a:spcPts val="300"/>
-              </a:spcBef>
-              <a:spcAft>
-                <a:spcPts val="300"/>
-              </a:spcAft>
-              <a:buNone/>
-            </a:pPr>
-            <a:r>
-              <a:rPr lang="en-US" sz="1200" dirty="0">
-                <a:solidFill>
-                  <a:srgbClr val="1C2833"/>
-                </a:solidFill>
-                <a:latin typeface="Arial" pitchFamily="34" charset="0"/>
-                <a:ea typeface="Arial" pitchFamily="34" charset="-122"/>
-                <a:cs typeface="Arial" pitchFamily="34" charset="-120"/>
-              </a:rPr>
-              <a:t>– For 14 × 23, would the trick scale?    - (14)(20 + 3) = 280 + 42 = 322. Long way works.    – The "proportional middle" pattern doesn't extend cleanly past 19 because the multiplier has two non-trivial digits.</a:t>
-            </a:r>
-            <a:endParaRPr lang="en-US" sz="1200" dirty="0"/>
-          </a:p>
-        </p:txBody>
-      </p:sp>
-      <p:sp>
-        <p:nvSpPr>
-          <p:cNvPr id="6" name="Text 4"/>
-          <p:cNvSpPr/>
-          <p:nvPr/>
-        </p:nvSpPr>
-        <p:spPr>
-          <a:xfrm>
-            <a:off x="634901" y="1769715"/>
-            <a:ext cx="8102798" cy="487561"/>
-          </a:xfrm>
-          <a:prstGeom prst="rect">
-            <a:avLst/>
-          </a:prstGeom>
-          <a:noFill/>
-          <a:ln/>
-        </p:spPr>
-        <p:txBody>
-          <a:bodyPr wrap="square" lIns="0" tIns="0" rIns="0" bIns="0" rtlCol="0" anchor="t"/>
-          <a:lstStyle/>
-          <a:p>
-            <a:pPr algn="l" marL="342900" indent="-342900">
-              <a:lnSpc>
-                <a:spcPts val="1620"/>
-              </a:lnSpc>
-              <a:spcAft>
-                <a:spcPts val="300"/>
-              </a:spcAft>
-              <a:buSzPct val="100000"/>
-              <a:buChar char="•"/>
-            </a:pPr>
-            <a:r>
-              <a:rPr lang="en-US" sz="1200" b="1" dirty="0">
-                <a:solidFill>
-                  <a:srgbClr val="1C2833"/>
-                </a:solidFill>
-                <a:latin typeface="Arial" pitchFamily="34" charset="0"/>
-                <a:ea typeface="Arial" pitchFamily="34" charset="-122"/>
-                <a:cs typeface="Arial" pitchFamily="34" charset="-120"/>
-              </a:rPr>
-              <a:t>Why?</a:t>
-            </a:r>
-            <a:pPr algn="l" indent="0" marL="0">
-              <a:lnSpc>
-                <a:spcPts val="1620"/>
-              </a:lnSpc>
-              <a:spcAft>
-                <a:spcPts val="300"/>
-              </a:spcAft>
-              <a:buNone/>
-            </a:pPr>
-            <a:r>
-              <a:rPr lang="en-US" sz="1200" dirty="0">
-                <a:solidFill>
-                  <a:srgbClr val="1C2833"/>
-                </a:solidFill>
-                <a:latin typeface="Arial" pitchFamily="34" charset="0"/>
-                <a:ea typeface="Arial" pitchFamily="34" charset="-122"/>
-                <a:cs typeface="Arial" pitchFamily="34" charset="-120"/>
-              </a:rPr>
-              <a:t> Recall the identity: ×(10 + </a:t>
-            </a:r>
-            <a:pPr algn="l" indent="0" marL="0">
-              <a:lnSpc>
-                <a:spcPts val="1620"/>
-              </a:lnSpc>
-              <a:spcAft>
-                <a:spcPts val="300"/>
-              </a:spcAft>
-              <a:buNone/>
-            </a:pPr>
-            <a:r>
-              <a:rPr lang="en-US" sz="1200" i="1" dirty="0">
-                <a:solidFill>
-                  <a:srgbClr val="1C2833"/>
-                </a:solidFill>
-                <a:latin typeface="Arial" pitchFamily="34" charset="0"/>
-                <a:ea typeface="Arial" pitchFamily="34" charset="-122"/>
-                <a:cs typeface="Arial" pitchFamily="34" charset="-120"/>
-              </a:rPr>
-              <a:t>k</a:t>
-            </a:r>
-            <a:pPr algn="l" indent="0" marL="0">
-              <a:lnSpc>
-                <a:spcPts val="1620"/>
-              </a:lnSpc>
-              <a:spcAft>
-                <a:spcPts val="300"/>
-              </a:spcAft>
-              <a:buNone/>
-            </a:pPr>
-            <a:r>
-              <a:rPr lang="en-US" sz="1200" dirty="0">
-                <a:solidFill>
-                  <a:srgbClr val="1C2833"/>
-                </a:solidFill>
-                <a:latin typeface="Arial" pitchFamily="34" charset="0"/>
-                <a:ea typeface="Arial" pitchFamily="34" charset="-122"/>
-                <a:cs typeface="Arial" pitchFamily="34" charset="-120"/>
-              </a:rPr>
-              <a:t>) → 100</a:t>
-            </a:r>
-            <a:pPr algn="l" indent="0" marL="0">
-              <a:lnSpc>
-                <a:spcPts val="1620"/>
-              </a:lnSpc>
-              <a:spcAft>
-                <a:spcPts val="300"/>
-              </a:spcAft>
-              <a:buNone/>
-            </a:pPr>
-            <a:r>
-              <a:rPr lang="en-US" sz="1200" i="1" dirty="0">
-                <a:solidFill>
-                  <a:srgbClr val="1C2833"/>
-                </a:solidFill>
-                <a:latin typeface="Arial" pitchFamily="34" charset="0"/>
-                <a:ea typeface="Arial" pitchFamily="34" charset="-122"/>
-                <a:cs typeface="Arial" pitchFamily="34" charset="-120"/>
-              </a:rPr>
-              <a:t>a</a:t>
-            </a:r>
-            <a:pPr algn="l" indent="0" marL="0">
-              <a:lnSpc>
-                <a:spcPts val="1620"/>
-              </a:lnSpc>
-              <a:spcAft>
-                <a:spcPts val="300"/>
-              </a:spcAft>
-              <a:buNone/>
-            </a:pPr>
-            <a:r>
-              <a:rPr lang="en-US" sz="1200" dirty="0">
-                <a:solidFill>
-                  <a:srgbClr val="1C2833"/>
-                </a:solidFill>
-                <a:latin typeface="Arial" pitchFamily="34" charset="0"/>
-                <a:ea typeface="Arial" pitchFamily="34" charset="-122"/>
-                <a:cs typeface="Arial" pitchFamily="34" charset="-120"/>
-              </a:rPr>
-              <a:t> + 10(</a:t>
-            </a:r>
-            <a:pPr algn="l" indent="0" marL="0">
-              <a:lnSpc>
-                <a:spcPts val="1620"/>
-              </a:lnSpc>
-              <a:spcAft>
-                <a:spcPts val="300"/>
-              </a:spcAft>
-              <a:buNone/>
-            </a:pPr>
-            <a:r>
-              <a:rPr lang="en-US" sz="1200" i="1" dirty="0">
-                <a:solidFill>
-                  <a:srgbClr val="1C2833"/>
-                </a:solidFill>
-                <a:latin typeface="Arial" pitchFamily="34" charset="0"/>
-                <a:ea typeface="Arial" pitchFamily="34" charset="-122"/>
-                <a:cs typeface="Arial" pitchFamily="34" charset="-120"/>
-              </a:rPr>
-              <a:t>ak</a:t>
-            </a:r>
-            <a:pPr algn="l" indent="0" marL="0">
-              <a:lnSpc>
-                <a:spcPts val="1620"/>
-              </a:lnSpc>
-              <a:spcAft>
-                <a:spcPts val="300"/>
-              </a:spcAft>
-              <a:buNone/>
-            </a:pPr>
-            <a:r>
-              <a:rPr lang="en-US" sz="1200" dirty="0">
-                <a:solidFill>
-                  <a:srgbClr val="1C2833"/>
-                </a:solidFill>
-                <a:latin typeface="Arial" pitchFamily="34" charset="0"/>
-                <a:ea typeface="Arial" pitchFamily="34" charset="-122"/>
-                <a:cs typeface="Arial" pitchFamily="34" charset="-120"/>
-              </a:rPr>
-              <a:t> + </a:t>
-            </a:r>
-            <a:pPr algn="l" indent="0" marL="0">
-              <a:lnSpc>
-                <a:spcPts val="1620"/>
-              </a:lnSpc>
-              <a:spcAft>
-                <a:spcPts val="300"/>
-              </a:spcAft>
-              <a:buNone/>
-            </a:pPr>
-            <a:r>
-              <a:rPr lang="en-US" sz="1200" i="1" dirty="0">
-                <a:solidFill>
-                  <a:srgbClr val="1C2833"/>
-                </a:solidFill>
-                <a:latin typeface="Arial" pitchFamily="34" charset="0"/>
-                <a:ea typeface="Arial" pitchFamily="34" charset="-122"/>
-                <a:cs typeface="Arial" pitchFamily="34" charset="-120"/>
-              </a:rPr>
-              <a:t>b</a:t>
-            </a:r>
-            <a:pPr algn="l" indent="0" marL="0">
-              <a:lnSpc>
-                <a:spcPts val="1620"/>
-              </a:lnSpc>
-              <a:spcAft>
-                <a:spcPts val="300"/>
-              </a:spcAft>
-              <a:buNone/>
-            </a:pPr>
-            <a:r>
-              <a:rPr lang="en-US" sz="1200" dirty="0">
-                <a:solidFill>
-                  <a:srgbClr val="1C2833"/>
-                </a:solidFill>
-                <a:latin typeface="Arial" pitchFamily="34" charset="0"/>
-                <a:ea typeface="Arial" pitchFamily="34" charset="-122"/>
-                <a:cs typeface="Arial" pitchFamily="34" charset="-120"/>
-              </a:rPr>
-              <a:t>) + </a:t>
-            </a:r>
-            <a:pPr algn="l" indent="0" marL="0">
-              <a:lnSpc>
-                <a:spcPts val="1620"/>
-              </a:lnSpc>
-              <a:spcAft>
-                <a:spcPts val="300"/>
-              </a:spcAft>
-              <a:buNone/>
-            </a:pPr>
-            <a:r>
-              <a:rPr lang="en-US" sz="1200" i="1" dirty="0">
-                <a:solidFill>
-                  <a:srgbClr val="1C2833"/>
-                </a:solidFill>
-                <a:latin typeface="Arial" pitchFamily="34" charset="0"/>
-                <a:ea typeface="Arial" pitchFamily="34" charset="-122"/>
-                <a:cs typeface="Arial" pitchFamily="34" charset="-120"/>
-              </a:rPr>
-              <a:t>bk</a:t>
-            </a:r>
-            <a:pPr algn="l" indent="0" marL="0">
-              <a:lnSpc>
-                <a:spcPts val="1620"/>
-              </a:lnSpc>
-              <a:spcAft>
-                <a:spcPts val="300"/>
-              </a:spcAft>
-              <a:buNone/>
-            </a:pPr>
-            <a:r>
-              <a:rPr lang="en-US" sz="1200" dirty="0">
-                <a:solidFill>
-                  <a:srgbClr val="1C2833"/>
-                </a:solidFill>
-                <a:latin typeface="Arial" pitchFamily="34" charset="0"/>
-                <a:ea typeface="Arial" pitchFamily="34" charset="-122"/>
-                <a:cs typeface="Arial" pitchFamily="34" charset="-120"/>
-              </a:rPr>
-              <a:t>. Clean because the "tens" part of the multiplier is </a:t>
-            </a:r>
-            <a:pPr algn="l" indent="0" marL="0">
-              <a:lnSpc>
-                <a:spcPts val="1620"/>
-              </a:lnSpc>
-              <a:spcAft>
-                <a:spcPts val="300"/>
-              </a:spcAft>
-              <a:buNone/>
-            </a:pPr>
-            <a:r>
-              <a:rPr lang="en-US" sz="1200" b="1" dirty="0">
-                <a:solidFill>
-                  <a:srgbClr val="1C2833"/>
-                </a:solidFill>
-                <a:latin typeface="Arial" pitchFamily="34" charset="0"/>
-                <a:ea typeface="Arial" pitchFamily="34" charset="-122"/>
-                <a:cs typeface="Arial" pitchFamily="34" charset="-120"/>
-              </a:rPr>
-              <a:t>just 1</a:t>
-            </a:r>
-            <a:pPr algn="l" indent="0" marL="0">
-              <a:lnSpc>
-                <a:spcPts val="1620"/>
-              </a:lnSpc>
-              <a:spcAft>
-                <a:spcPts val="300"/>
-              </a:spcAft>
-              <a:buNone/>
-            </a:pPr>
-            <a:r>
-              <a:rPr lang="en-US" sz="1200" dirty="0">
-                <a:solidFill>
-                  <a:srgbClr val="1C2833"/>
-                </a:solidFill>
-                <a:latin typeface="Arial" pitchFamily="34" charset="0"/>
-                <a:ea typeface="Arial" pitchFamily="34" charset="-122"/>
-                <a:cs typeface="Arial" pitchFamily="34" charset="-120"/>
-              </a:rPr>
-              <a:t>. For ×23, the algebra is:</a:t>
-            </a:r>
-            <a:endParaRPr lang="en-US" sz="1200" dirty="0"/>
-          </a:p>
-        </p:txBody>
-      </p:sp>
-      <p:sp>
-        <p:nvSpPr>
-          <p:cNvPr id="7" name="Text 5"/>
-          <p:cNvSpPr/>
-          <p:nvPr/>
-        </p:nvSpPr>
-        <p:spPr>
-          <a:xfrm>
-            <a:off x="406301" y="2358777"/>
-            <a:ext cx="8331398" cy="952202"/>
-          </a:xfrm>
-          <a:prstGeom prst="rect">
-            <a:avLst/>
-          </a:prstGeom>
-          <a:solidFill>
-            <a:srgbClr val="F4F8F9"/>
-          </a:solidFill>
-          <a:ln/>
-        </p:spPr>
-        <p:txBody>
-          <a:bodyPr wrap="square" rtlCol="0" anchor="ctr"/>
-          <a:lstStyle/>
-          <a:p>
-            <a:pPr indent="0" marL="0">
-              <a:buNone/>
-            </a:pPr>
-            <a:endParaRPr lang="en-US" dirty="0"/>
-          </a:p>
-        </p:txBody>
-      </p:sp>
-      <p:sp>
-        <p:nvSpPr>
-          <p:cNvPr id="8" name="Shape 6"/>
-          <p:cNvSpPr/>
-          <p:nvPr/>
-        </p:nvSpPr>
-        <p:spPr>
-          <a:xfrm>
-            <a:off x="430113" y="2358777"/>
-            <a:ext cx="0" cy="952202"/>
-          </a:xfrm>
-          <a:prstGeom prst="line">
-            <a:avLst/>
-          </a:prstGeom>
-          <a:noFill/>
-          <a:ln w="47625">
-            <a:solidFill>
-              <a:srgbClr val="277884"/>
-            </a:solidFill>
-            <a:prstDash val="solid"/>
-          </a:ln>
-        </p:spPr>
-      </p:sp>
-      <p:sp>
-        <p:nvSpPr>
-          <p:cNvPr id="9" name="Text 7"/>
-          <p:cNvSpPr/>
-          <p:nvPr/>
-        </p:nvSpPr>
-        <p:spPr>
-          <a:xfrm>
-            <a:off x="631627" y="2485727"/>
-            <a:ext cx="8086939" cy="174575"/>
-          </a:xfrm>
-          <a:prstGeom prst="rect">
-            <a:avLst/>
-          </a:prstGeom>
-          <a:noFill/>
-          <a:ln/>
-        </p:spPr>
-        <p:txBody>
-          <a:bodyPr wrap="square" lIns="0" tIns="0" rIns="0" bIns="0" rtlCol="0" anchor="t"/>
-          <a:lstStyle/>
-          <a:p>
-            <a:pPr algn="l" indent="0" marL="0">
-              <a:lnSpc>
-                <a:spcPts val="1375"/>
-              </a:lnSpc>
-              <a:buNone/>
-            </a:pPr>
-            <a:r>
-              <a:rPr lang="en-US" sz="1100" dirty="0">
-                <a:solidFill>
-                  <a:srgbClr val="1C2833"/>
-                </a:solidFill>
-                <a:latin typeface="Courier New" pitchFamily="34" charset="0"/>
-                <a:ea typeface="Courier New" pitchFamily="34" charset="-122"/>
-                <a:cs typeface="Courier New" pitchFamily="34" charset="-120"/>
-              </a:rPr>
-              <a:t>(10a + b)(20 + 3)</a:t>
-            </a:r>
-            <a:endParaRPr lang="en-US" sz="1100" dirty="0"/>
-          </a:p>
-        </p:txBody>
-      </p:sp>
-      <p:sp>
-        <p:nvSpPr>
-          <p:cNvPr id="10" name="Text 8"/>
-          <p:cNvSpPr/>
-          <p:nvPr/>
-        </p:nvSpPr>
-        <p:spPr>
-          <a:xfrm>
-            <a:off x="631627" y="2660303"/>
-            <a:ext cx="8086939" cy="174575"/>
-          </a:xfrm>
-          <a:prstGeom prst="rect">
-            <a:avLst/>
-          </a:prstGeom>
-          <a:noFill/>
-          <a:ln/>
-        </p:spPr>
-        <p:txBody>
-          <a:bodyPr wrap="square" lIns="0" tIns="0" rIns="0" bIns="0" rtlCol="0" anchor="t"/>
-          <a:lstStyle/>
-          <a:p>
-            <a:pPr algn="l" indent="0" marL="0">
-              <a:lnSpc>
-                <a:spcPts val="1375"/>
-              </a:lnSpc>
-              <a:buNone/>
-            </a:pPr>
-            <a:r>
-              <a:rPr lang="en-US" sz="1100" dirty="0">
-                <a:solidFill>
-                  <a:srgbClr val="1C2833"/>
-                </a:solidFill>
-                <a:latin typeface="Courier New" pitchFamily="34" charset="0"/>
-                <a:ea typeface="Courier New" pitchFamily="34" charset="-122"/>
-                <a:cs typeface="Courier New" pitchFamily="34" charset="-120"/>
-              </a:rPr>
-              <a:t>= 200a + 20b + 30a + 3b</a:t>
-            </a:r>
-            <a:endParaRPr lang="en-US" sz="1100" dirty="0"/>
-          </a:p>
-        </p:txBody>
-      </p:sp>
-      <p:sp>
-        <p:nvSpPr>
-          <p:cNvPr id="11" name="Text 9"/>
-          <p:cNvSpPr/>
-          <p:nvPr/>
-        </p:nvSpPr>
-        <p:spPr>
-          <a:xfrm>
-            <a:off x="631627" y="2834878"/>
-            <a:ext cx="8086939" cy="174575"/>
-          </a:xfrm>
-          <a:prstGeom prst="rect">
-            <a:avLst/>
-          </a:prstGeom>
-          <a:noFill/>
-          <a:ln/>
-        </p:spPr>
-        <p:txBody>
-          <a:bodyPr wrap="square" lIns="0" tIns="0" rIns="0" bIns="0" rtlCol="0" anchor="t"/>
-          <a:lstStyle/>
-          <a:p>
-            <a:pPr algn="l" indent="0" marL="0">
-              <a:lnSpc>
-                <a:spcPts val="1375"/>
-              </a:lnSpc>
-              <a:buNone/>
-            </a:pPr>
-            <a:r>
-              <a:rPr lang="en-US" sz="1100" dirty="0">
-                <a:solidFill>
-                  <a:srgbClr val="1C2833"/>
-                </a:solidFill>
-                <a:latin typeface="Courier New" pitchFamily="34" charset="0"/>
-                <a:ea typeface="Courier New" pitchFamily="34" charset="-122"/>
-                <a:cs typeface="Courier New" pitchFamily="34" charset="-120"/>
-              </a:rPr>
-              <a:t>= 200a + 30a + 20b + 3b</a:t>
-            </a:r>
-            <a:endParaRPr lang="en-US" sz="1100" dirty="0"/>
-          </a:p>
-        </p:txBody>
-      </p:sp>
-      <p:sp>
-        <p:nvSpPr>
-          <p:cNvPr id="12" name="Text 10"/>
-          <p:cNvSpPr/>
-          <p:nvPr/>
-        </p:nvSpPr>
-        <p:spPr>
-          <a:xfrm>
-            <a:off x="631627" y="3009454"/>
-            <a:ext cx="8086939" cy="174575"/>
-          </a:xfrm>
-          <a:prstGeom prst="rect">
-            <a:avLst/>
-          </a:prstGeom>
-          <a:noFill/>
-          <a:ln/>
-        </p:spPr>
-        <p:txBody>
-          <a:bodyPr wrap="square" lIns="0" tIns="0" rIns="0" bIns="0" rtlCol="0" anchor="t"/>
-          <a:lstStyle/>
-          <a:p>
-            <a:pPr algn="l" indent="0" marL="0">
-              <a:lnSpc>
-                <a:spcPts val="1375"/>
-              </a:lnSpc>
-              <a:buNone/>
-            </a:pPr>
-            <a:r>
-              <a:rPr lang="en-US" sz="1100" dirty="0">
-                <a:solidFill>
-                  <a:srgbClr val="1C2833"/>
-                </a:solidFill>
-                <a:latin typeface="Courier New" pitchFamily="34" charset="0"/>
-                <a:ea typeface="Courier New" pitchFamily="34" charset="-122"/>
-                <a:cs typeface="Courier New" pitchFamily="34" charset="-120"/>
-              </a:rPr>
-              <a:t>= (100·2 + 100·0 + ...) — no longer a tidy "outer-stays, inner-sums" pattern.</a:t>
-            </a:r>
-            <a:endParaRPr lang="en-US" sz="1100" dirty="0"/>
-          </a:p>
-        </p:txBody>
-      </p:sp>
-      <p:sp>
-        <p:nvSpPr>
-          <p:cNvPr id="13" name="Text 11"/>
-          <p:cNvSpPr/>
-          <p:nvPr/>
-        </p:nvSpPr>
-        <p:spPr>
-          <a:xfrm>
-            <a:off x="634901" y="3412480"/>
-            <a:ext cx="8102798" cy="281880"/>
-          </a:xfrm>
-          <a:prstGeom prst="rect">
-            <a:avLst/>
-          </a:prstGeom>
-          <a:noFill/>
-          <a:ln/>
-        </p:spPr>
-        <p:txBody>
-          <a:bodyPr wrap="square" lIns="0" tIns="0" rIns="0" bIns="0" rtlCol="0" anchor="t"/>
-          <a:lstStyle/>
-          <a:p>
-            <a:pPr algn="l" marL="342900" indent="-342900">
-              <a:lnSpc>
-                <a:spcPts val="1620"/>
-              </a:lnSpc>
-              <a:spcAft>
-                <a:spcPts val="300"/>
-              </a:spcAft>
-              <a:buSzPct val="100000"/>
-              <a:buChar char="•"/>
-            </a:pPr>
-            <a:r>
-              <a:rPr lang="en-US" sz="1200" b="1" dirty="0">
-                <a:solidFill>
-                  <a:srgbClr val="1C2833"/>
-                </a:solidFill>
-                <a:latin typeface="Arial" pitchFamily="34" charset="0"/>
-                <a:ea typeface="Arial" pitchFamily="34" charset="-122"/>
-                <a:cs typeface="Arial" pitchFamily="34" charset="-120"/>
-              </a:rPr>
-              <a:t>The honest summary.</a:t>
-            </a:r>
-            <a:endParaRPr lang="en-US" sz="1200" dirty="0"/>
-          </a:p>
-        </p:txBody>
-      </p:sp>
-      <p:sp>
-        <p:nvSpPr>
-          <p:cNvPr id="14" name="Text 12"/>
-          <p:cNvSpPr/>
-          <p:nvPr/>
-        </p:nvSpPr>
-        <p:spPr>
-          <a:xfrm>
-            <a:off x="406301" y="3783211"/>
-            <a:ext cx="8498026" cy="853083"/>
-          </a:xfrm>
-          <a:prstGeom prst="rect">
-            <a:avLst/>
-          </a:prstGeom>
-          <a:noFill/>
-          <a:ln/>
-        </p:spPr>
-        <p:txBody>
-          <a:bodyPr wrap="square" lIns="0" tIns="0" rIns="0" bIns="0" rtlCol="0" anchor="t"/>
-          <a:lstStyle/>
-          <a:p>
-            <a:pPr algn="l" indent="0" marL="0">
-              <a:lnSpc>
-                <a:spcPts val="1680"/>
-              </a:lnSpc>
-              <a:spcBef>
-                <a:spcPts val="300"/>
-              </a:spcBef>
-              <a:spcAft>
-                <a:spcPts val="300"/>
-              </a:spcAft>
-              <a:buNone/>
-            </a:pPr>
-            <a:r>
-              <a:rPr lang="en-US" sz="1200" dirty="0">
-                <a:solidFill>
-                  <a:srgbClr val="1C2833"/>
-                </a:solidFill>
-                <a:latin typeface="Arial" pitchFamily="34" charset="0"/>
-                <a:ea typeface="Arial" pitchFamily="34" charset="-122"/>
-                <a:cs typeface="Arial" pitchFamily="34" charset="-120"/>
-              </a:rPr>
-              <a:t>&gt; *</a:t>
-            </a:r>
-            <a:pPr algn="l" indent="0" marL="0">
-              <a:lnSpc>
-                <a:spcPts val="1680"/>
-              </a:lnSpc>
-              <a:spcBef>
-                <a:spcPts val="300"/>
-              </a:spcBef>
-              <a:spcAft>
-                <a:spcPts val="300"/>
-              </a:spcAft>
-              <a:buNone/>
-            </a:pPr>
-            <a:r>
-              <a:rPr lang="en-US" sz="1200" i="1" dirty="0">
-                <a:solidFill>
-                  <a:srgbClr val="1C2833"/>
-                </a:solidFill>
-                <a:latin typeface="Arial" pitchFamily="34" charset="0"/>
-                <a:ea typeface="Arial" pitchFamily="34" charset="-122"/>
-                <a:cs typeface="Arial" pitchFamily="34" charset="-120"/>
-              </a:rPr>
-              <a:t>The ×11 trick (</a:t>
-            </a:r>
-            <a:pPr algn="l" indent="0" marL="0">
-              <a:lnSpc>
-                <a:spcPts val="1680"/>
-              </a:lnSpc>
-              <a:spcBef>
-                <a:spcPts val="300"/>
-              </a:spcBef>
-              <a:spcAft>
-                <a:spcPts val="300"/>
-              </a:spcAft>
-              <a:buNone/>
-            </a:pPr>
-            <a:r>
-              <a:rPr lang="en-US" sz="1200" dirty="0">
-                <a:solidFill>
-                  <a:srgbClr val="1C2833"/>
-                </a:solidFill>
-                <a:latin typeface="Arial" pitchFamily="34" charset="0"/>
-                <a:ea typeface="Arial" pitchFamily="34" charset="-122"/>
-                <a:cs typeface="Arial" pitchFamily="34" charset="-120"/>
-              </a:rPr>
-              <a:t>Ekādhikena Pūrveṇa</a:t>
-            </a:r>
-            <a:pPr algn="l" indent="0" marL="0">
-              <a:lnSpc>
-                <a:spcPts val="1680"/>
-              </a:lnSpc>
-              <a:spcBef>
-                <a:spcPts val="300"/>
-              </a:spcBef>
-              <a:spcAft>
-                <a:spcPts val="300"/>
-              </a:spcAft>
-              <a:buNone/>
-            </a:pPr>
-            <a:r>
-              <a:rPr lang="en-US" sz="1200" i="1" dirty="0">
-                <a:solidFill>
-                  <a:srgbClr val="1C2833"/>
-                </a:solidFill>
-                <a:latin typeface="Arial" pitchFamily="34" charset="0"/>
-                <a:ea typeface="Arial" pitchFamily="34" charset="-122"/>
-                <a:cs typeface="Arial" pitchFamily="34" charset="-120"/>
-              </a:rPr>
-              <a:t>) and its scaled cousins (</a:t>
-            </a:r>
-            <a:pPr algn="l" indent="0" marL="0">
-              <a:lnSpc>
-                <a:spcPts val="1680"/>
-              </a:lnSpc>
-              <a:spcBef>
-                <a:spcPts val="300"/>
-              </a:spcBef>
-              <a:spcAft>
-                <a:spcPts val="300"/>
-              </a:spcAft>
-              <a:buNone/>
-            </a:pPr>
-            <a:r>
-              <a:rPr lang="en-US" sz="1200" dirty="0">
-                <a:solidFill>
-                  <a:srgbClr val="1C2833"/>
-                </a:solidFill>
-                <a:latin typeface="Arial" pitchFamily="34" charset="0"/>
-                <a:ea typeface="Arial" pitchFamily="34" charset="-122"/>
-                <a:cs typeface="Arial" pitchFamily="34" charset="-120"/>
-              </a:rPr>
-              <a:t>Anurūpyeṇa</a:t>
-            </a:r>
-            <a:pPr algn="l" indent="0" marL="0">
-              <a:lnSpc>
-                <a:spcPts val="1680"/>
-              </a:lnSpc>
-              <a:spcBef>
-                <a:spcPts val="300"/>
-              </a:spcBef>
-              <a:spcAft>
-                <a:spcPts val="300"/>
-              </a:spcAft>
-              <a:buNone/>
-            </a:pPr>
-            <a:r>
-              <a:rPr lang="en-US" sz="1200" i="1" dirty="0">
-                <a:solidFill>
-                  <a:srgbClr val="1C2833"/>
-                </a:solidFill>
-                <a:latin typeface="Arial" pitchFamily="34" charset="0"/>
-                <a:ea typeface="Arial" pitchFamily="34" charset="-122"/>
-                <a:cs typeface="Arial" pitchFamily="34" charset="-120"/>
-              </a:rPr>
-              <a:t> for ×12 to ×19) work because the multiplier is</a:t>
-            </a:r>
-            <a:pPr algn="l" indent="0" marL="0">
-              <a:lnSpc>
-                <a:spcPts val="1680"/>
-              </a:lnSpc>
-              <a:spcBef>
-                <a:spcPts val="300"/>
-              </a:spcBef>
-              <a:spcAft>
-                <a:spcPts val="300"/>
-              </a:spcAft>
-              <a:buNone/>
-            </a:pPr>
-            <a:r>
-              <a:rPr lang="en-US" sz="1200" dirty="0">
-                <a:solidFill>
-                  <a:srgbClr val="1C2833"/>
-                </a:solidFill>
-                <a:latin typeface="Arial" pitchFamily="34" charset="0"/>
-                <a:ea typeface="Arial" pitchFamily="34" charset="-122"/>
-                <a:cs typeface="Arial" pitchFamily="34" charset="-120"/>
-              </a:rPr>
-              <a:t>very close to 10</a:t>
-            </a:r>
-            <a:pPr algn="l" indent="0" marL="0">
-              <a:lnSpc>
-                <a:spcPts val="1680"/>
-              </a:lnSpc>
-              <a:spcBef>
-                <a:spcPts val="300"/>
-              </a:spcBef>
-              <a:spcAft>
-                <a:spcPts val="300"/>
-              </a:spcAft>
-              <a:buNone/>
-            </a:pPr>
-            <a:r>
-              <a:rPr lang="en-US" sz="1200" i="1" dirty="0">
-                <a:solidFill>
-                  <a:srgbClr val="1C2833"/>
-                </a:solidFill>
-                <a:latin typeface="Arial" pitchFamily="34" charset="0"/>
-                <a:ea typeface="Arial" pitchFamily="34" charset="-122"/>
-                <a:cs typeface="Arial" pitchFamily="34" charset="-120"/>
-              </a:rPr>
-              <a:t>. Specifically, the multiplier must be 10 +</a:t>
-            </a:r>
-            <a:pPr algn="l" indent="0" marL="0">
-              <a:lnSpc>
-                <a:spcPts val="1680"/>
-              </a:lnSpc>
-              <a:spcBef>
-                <a:spcPts val="300"/>
-              </a:spcBef>
-              <a:spcAft>
-                <a:spcPts val="300"/>
-              </a:spcAft>
-              <a:buNone/>
-            </a:pPr>
-            <a:r>
-              <a:rPr lang="en-US" sz="1200" dirty="0">
-                <a:solidFill>
-                  <a:srgbClr val="1C2833"/>
-                </a:solidFill>
-                <a:latin typeface="Arial" pitchFamily="34" charset="0"/>
-                <a:ea typeface="Arial" pitchFamily="34" charset="-122"/>
-                <a:cs typeface="Arial" pitchFamily="34" charset="-120"/>
-              </a:rPr>
-              <a:t>k</a:t>
-            </a:r>
-            <a:pPr algn="l" indent="0" marL="0">
-              <a:lnSpc>
-                <a:spcPts val="1680"/>
-              </a:lnSpc>
-              <a:spcBef>
-                <a:spcPts val="300"/>
-              </a:spcBef>
-              <a:spcAft>
-                <a:spcPts val="300"/>
-              </a:spcAft>
-              <a:buNone/>
-            </a:pPr>
-            <a:r>
-              <a:rPr lang="en-US" sz="1200" i="1" dirty="0">
-                <a:solidFill>
-                  <a:srgbClr val="1C2833"/>
-                </a:solidFill>
-                <a:latin typeface="Arial" pitchFamily="34" charset="0"/>
-                <a:ea typeface="Arial" pitchFamily="34" charset="-122"/>
-                <a:cs typeface="Arial" pitchFamily="34" charset="-120"/>
-              </a:rPr>
-              <a:t> where</a:t>
-            </a:r>
-            <a:pPr algn="l" indent="0" marL="0">
-              <a:lnSpc>
-                <a:spcPts val="1680"/>
-              </a:lnSpc>
-              <a:spcBef>
-                <a:spcPts val="300"/>
-              </a:spcBef>
-              <a:spcAft>
-                <a:spcPts val="300"/>
-              </a:spcAft>
-              <a:buNone/>
-            </a:pPr>
-            <a:r>
-              <a:rPr lang="en-US" sz="1200" dirty="0">
-                <a:solidFill>
-                  <a:srgbClr val="1C2833"/>
-                </a:solidFill>
-                <a:latin typeface="Arial" pitchFamily="34" charset="0"/>
-                <a:ea typeface="Arial" pitchFamily="34" charset="-122"/>
-                <a:cs typeface="Arial" pitchFamily="34" charset="-120"/>
-              </a:rPr>
-              <a:t>k</a:t>
-            </a:r>
-            <a:pPr algn="l" indent="0" marL="0">
-              <a:lnSpc>
-                <a:spcPts val="1680"/>
-              </a:lnSpc>
-              <a:spcBef>
-                <a:spcPts val="300"/>
-              </a:spcBef>
-              <a:spcAft>
-                <a:spcPts val="300"/>
-              </a:spcAft>
-              <a:buNone/>
-            </a:pPr>
-            <a:r>
-              <a:rPr lang="en-US" sz="1200" i="1" dirty="0">
-                <a:solidFill>
-                  <a:srgbClr val="1C2833"/>
-                </a:solidFill>
-                <a:latin typeface="Arial" pitchFamily="34" charset="0"/>
-                <a:ea typeface="Arial" pitchFamily="34" charset="-122"/>
-                <a:cs typeface="Arial" pitchFamily="34" charset="-120"/>
-              </a:rPr>
-              <a:t> is a single digit.</a:t>
-            </a:r>
-            <a:pPr algn="l" indent="0" marL="0">
-              <a:lnSpc>
-                <a:spcPts val="1680"/>
-              </a:lnSpc>
-              <a:spcBef>
-                <a:spcPts val="300"/>
-              </a:spcBef>
-              <a:spcAft>
-                <a:spcPts val="300"/>
-              </a:spcAft>
-              <a:buNone/>
-            </a:pPr>
-            <a:r>
-              <a:rPr lang="en-US" sz="1200" i="1" dirty="0">
-                <a:solidFill>
-                  <a:srgbClr val="1C2833"/>
-                </a:solidFill>
-                <a:latin typeface="Arial" pitchFamily="34" charset="0"/>
-                <a:ea typeface="Arial" pitchFamily="34" charset="-122"/>
-                <a:cs typeface="Arial" pitchFamily="34" charset="-120"/>
-              </a:rPr>
-              <a:t> &gt; &gt; For multipliers farther from 10 (×23, ×47, ×98), a DIFFERENT sūtra is the right tool — Tirthaji's</a:t>
-            </a:r>
-            <a:pPr algn="l" indent="0" marL="0">
-              <a:lnSpc>
-                <a:spcPts val="1680"/>
-              </a:lnSpc>
-              <a:spcBef>
-                <a:spcPts val="300"/>
-              </a:spcBef>
-              <a:spcAft>
-                <a:spcPts val="300"/>
-              </a:spcAft>
-              <a:buNone/>
-            </a:pPr>
-            <a:r>
-              <a:rPr lang="en-US" sz="1200" dirty="0">
-                <a:solidFill>
-                  <a:srgbClr val="1C2833"/>
-                </a:solidFill>
-                <a:latin typeface="Arial" pitchFamily="34" charset="0"/>
-                <a:ea typeface="Arial" pitchFamily="34" charset="-122"/>
-                <a:cs typeface="Arial" pitchFamily="34" charset="-120"/>
-              </a:rPr>
-              <a:t>Nikhilam</a:t>
-            </a:r>
-            <a:pPr algn="l" indent="0" marL="0">
-              <a:lnSpc>
-                <a:spcPts val="1680"/>
-              </a:lnSpc>
-              <a:spcBef>
-                <a:spcPts val="300"/>
-              </a:spcBef>
-              <a:spcAft>
-                <a:spcPts val="300"/>
-              </a:spcAft>
-              <a:buNone/>
-            </a:pPr>
-            <a:r>
-              <a:rPr lang="en-US" sz="1200" i="1" dirty="0">
-                <a:solidFill>
-                  <a:srgbClr val="1C2833"/>
-                </a:solidFill>
-                <a:latin typeface="Arial" pitchFamily="34" charset="0"/>
-                <a:ea typeface="Arial" pitchFamily="34" charset="-122"/>
-                <a:cs typeface="Arial" pitchFamily="34" charset="-120"/>
-              </a:rPr>
-              <a:t> ("all from 9, last from 10") for multipliers near 100, or</a:t>
-            </a:r>
-            <a:pPr algn="l" indent="0" marL="0">
-              <a:lnSpc>
-                <a:spcPts val="1680"/>
-              </a:lnSpc>
-              <a:spcBef>
-                <a:spcPts val="300"/>
-              </a:spcBef>
-              <a:spcAft>
-                <a:spcPts val="300"/>
-              </a:spcAft>
-              <a:buNone/>
-            </a:pPr>
-            <a:r>
-              <a:rPr lang="en-US" sz="1200" dirty="0">
-                <a:solidFill>
-                  <a:srgbClr val="1C2833"/>
-                </a:solidFill>
-                <a:latin typeface="Arial" pitchFamily="34" charset="0"/>
-                <a:ea typeface="Arial" pitchFamily="34" charset="-122"/>
-                <a:cs typeface="Arial" pitchFamily="34" charset="-120"/>
-              </a:rPr>
-              <a:t>Ūrdhva-tiryagbhyāṁ* ("vertically and crosswise") for general multiplication.</a:t>
-            </a:r>
-            <a:endParaRPr lang="en-US" sz="1200" dirty="0"/>
-          </a:p>
-        </p:txBody>
-      </p:sp>
-      <p:sp>
-        <p:nvSpPr>
-          <p:cNvPr id="15" name="Text 13"/>
-          <p:cNvSpPr/>
-          <p:nvPr/>
-        </p:nvSpPr>
-        <p:spPr>
-          <a:xfrm>
-            <a:off x="634901" y="4725144"/>
-            <a:ext cx="8102798" cy="487561"/>
-          </a:xfrm>
-          <a:prstGeom prst="rect">
-            <a:avLst/>
-          </a:prstGeom>
-          <a:noFill/>
-          <a:ln/>
-        </p:spPr>
-        <p:txBody>
-          <a:bodyPr wrap="square" lIns="0" tIns="0" rIns="0" bIns="0" rtlCol="0" anchor="t"/>
-          <a:lstStyle/>
-          <a:p>
-            <a:pPr algn="l" marL="342900" indent="-342900">
-              <a:lnSpc>
-                <a:spcPts val="1620"/>
-              </a:lnSpc>
-              <a:spcAft>
-                <a:spcPts val="300"/>
-              </a:spcAft>
-              <a:buSzPct val="100000"/>
-              <a:buChar char="•"/>
-            </a:pPr>
-            <a:r>
-              <a:rPr lang="en-US" sz="1200" b="1" dirty="0">
-                <a:solidFill>
-                  <a:srgbClr val="1C2833"/>
-                </a:solidFill>
-                <a:latin typeface="Arial" pitchFamily="34" charset="0"/>
-                <a:ea typeface="Arial" pitchFamily="34" charset="-122"/>
-                <a:cs typeface="Arial" pitchFamily="34" charset="-120"/>
-              </a:rPr>
-              <a:t>Connect to Module 9 / 11.</a:t>
-            </a:r>
-            <a:pPr algn="l" indent="0" marL="0">
-              <a:lnSpc>
-                <a:spcPts val="1620"/>
-              </a:lnSpc>
-              <a:spcAft>
-                <a:spcPts val="300"/>
-              </a:spcAft>
-              <a:buNone/>
-            </a:pPr>
-            <a:r>
-              <a:rPr lang="en-US" sz="1200" dirty="0">
-                <a:solidFill>
-                  <a:srgbClr val="1C2833"/>
-                </a:solidFill>
-                <a:latin typeface="Arial" pitchFamily="34" charset="0"/>
-                <a:ea typeface="Arial" pitchFamily="34" charset="-122"/>
-                <a:cs typeface="Arial" pitchFamily="34" charset="-120"/>
-              </a:rPr>
-              <a:t> Future modules will cover </a:t>
-            </a:r>
-            <a:pPr algn="l" indent="0" marL="0">
-              <a:lnSpc>
-                <a:spcPts val="1620"/>
-              </a:lnSpc>
-              <a:spcAft>
-                <a:spcPts val="300"/>
-              </a:spcAft>
-              <a:buNone/>
-            </a:pPr>
-            <a:r>
-              <a:rPr lang="en-US" sz="1200" i="1" dirty="0">
-                <a:solidFill>
-                  <a:srgbClr val="1C2833"/>
-                </a:solidFill>
-                <a:latin typeface="Arial" pitchFamily="34" charset="0"/>
-                <a:ea typeface="Arial" pitchFamily="34" charset="-122"/>
-                <a:cs typeface="Arial" pitchFamily="34" charset="-120"/>
-              </a:rPr>
-              <a:t>Nikhilam</a:t>
-            </a:r>
-            <a:pPr algn="l" indent="0" marL="0">
-              <a:lnSpc>
-                <a:spcPts val="1620"/>
-              </a:lnSpc>
-              <a:spcAft>
-                <a:spcPts val="300"/>
-              </a:spcAft>
-              <a:buNone/>
-            </a:pPr>
-            <a:r>
-              <a:rPr lang="en-US" sz="1200" dirty="0">
-                <a:solidFill>
-                  <a:srgbClr val="1C2833"/>
-                </a:solidFill>
-                <a:latin typeface="Arial" pitchFamily="34" charset="0"/>
-                <a:ea typeface="Arial" pitchFamily="34" charset="-122"/>
-                <a:cs typeface="Arial" pitchFamily="34" charset="-120"/>
-              </a:rPr>
-              <a:t> and </a:t>
-            </a:r>
-            <a:pPr algn="l" indent="0" marL="0">
-              <a:lnSpc>
-                <a:spcPts val="1620"/>
-              </a:lnSpc>
-              <a:spcAft>
-                <a:spcPts val="300"/>
-              </a:spcAft>
-              <a:buNone/>
-            </a:pPr>
-            <a:r>
-              <a:rPr lang="en-US" sz="1200" i="1" dirty="0">
-                <a:solidFill>
-                  <a:srgbClr val="1C2833"/>
-                </a:solidFill>
-                <a:latin typeface="Arial" pitchFamily="34" charset="0"/>
-                <a:ea typeface="Arial" pitchFamily="34" charset="-122"/>
-                <a:cs typeface="Arial" pitchFamily="34" charset="-120"/>
-              </a:rPr>
-              <a:t>Ūrdhva-tiryagbhyāṁ</a:t>
-            </a:r>
-            <a:pPr algn="l" indent="0" marL="0">
-              <a:lnSpc>
-                <a:spcPts val="1620"/>
-              </a:lnSpc>
-              <a:spcAft>
-                <a:spcPts val="300"/>
-              </a:spcAft>
-              <a:buNone/>
-            </a:pPr>
-            <a:r>
-              <a:rPr lang="en-US" sz="1200" dirty="0">
-                <a:solidFill>
-                  <a:srgbClr val="1C2833"/>
-                </a:solidFill>
-                <a:latin typeface="Arial" pitchFamily="34" charset="0"/>
-                <a:ea typeface="Arial" pitchFamily="34" charset="-122"/>
-                <a:cs typeface="Arial" pitchFamily="34" charset="-120"/>
-              </a:rPr>
-              <a:t> in depth. Today we just note their existence.</a:t>
-            </a:r>
-            <a:endParaRPr lang="en-US" sz="1200" dirty="0"/>
-          </a:p>
-        </p:txBody>
-      </p:sp>
-      <p:sp>
-        <p:nvSpPr>
-          <p:cNvPr id="16" name="Text 14"/>
-          <p:cNvSpPr/>
-          <p:nvPr/>
-        </p:nvSpPr>
-        <p:spPr>
-          <a:xfrm>
-            <a:off x="634901" y="5314206"/>
-            <a:ext cx="8102798" cy="693241"/>
-          </a:xfrm>
-          <a:prstGeom prst="rect">
-            <a:avLst/>
-          </a:prstGeom>
-          <a:noFill/>
-          <a:ln/>
-        </p:spPr>
-        <p:txBody>
-          <a:bodyPr wrap="square" lIns="0" tIns="0" rIns="0" bIns="0" rtlCol="0" anchor="t"/>
-          <a:lstStyle/>
-          <a:p>
-            <a:pPr algn="l" marL="342900" indent="-342900">
-              <a:lnSpc>
-                <a:spcPts val="1620"/>
-              </a:lnSpc>
-              <a:spcAft>
-                <a:spcPts val="300"/>
-              </a:spcAft>
-              <a:buSzPct val="100000"/>
-              <a:buChar char="•"/>
-            </a:pPr>
-            <a:r>
-              <a:rPr lang="en-US" sz="1200" b="1" dirty="0">
-                <a:solidFill>
-                  <a:srgbClr val="1C2833"/>
-                </a:solidFill>
-                <a:latin typeface="Arial" pitchFamily="34" charset="0"/>
-                <a:ea typeface="Arial" pitchFamily="34" charset="-122"/>
-                <a:cs typeface="Arial" pitchFamily="34" charset="-120"/>
-              </a:rPr>
-              <a:t>The bigger lesson.</a:t>
-            </a:r>
-            <a:pPr algn="l" indent="0" marL="0">
-              <a:lnSpc>
-                <a:spcPts val="1620"/>
-              </a:lnSpc>
-              <a:spcAft>
-                <a:spcPts val="300"/>
-              </a:spcAft>
-              <a:buNone/>
-            </a:pPr>
-            <a:r>
-              <a:rPr lang="en-US" sz="1200" dirty="0">
-                <a:solidFill>
-                  <a:srgbClr val="1C2833"/>
-                </a:solidFill>
-                <a:latin typeface="Arial" pitchFamily="34" charset="0"/>
-                <a:ea typeface="Arial" pitchFamily="34" charset="-122"/>
-                <a:cs typeface="Arial" pitchFamily="34" charset="-120"/>
-              </a:rPr>
-              <a:t> </a:t>
-            </a:r>
-            <a:pPr algn="l" indent="0" marL="0">
-              <a:lnSpc>
-                <a:spcPts val="1620"/>
-              </a:lnSpc>
-              <a:spcAft>
-                <a:spcPts val="300"/>
-              </a:spcAft>
-              <a:buNone/>
-            </a:pPr>
-            <a:r>
-              <a:rPr lang="en-US" sz="1200" i="1" dirty="0">
-                <a:solidFill>
-                  <a:srgbClr val="1C2833"/>
-                </a:solidFill>
-                <a:latin typeface="Arial" pitchFamily="34" charset="0"/>
-                <a:ea typeface="Arial" pitchFamily="34" charset="-122"/>
-                <a:cs typeface="Arial" pitchFamily="34" charset="-120"/>
-              </a:rPr>
-              <a:t>"Every mental-math shortcut has a domain. Knowing WHEN a trick applies is part of being a fluent mathematician. The standard long-multiplication algorithm always works; the shortcuts are faster only inside their domain."</a:t>
-            </a:r>
-            <a:endParaRPr lang="en-US" sz="1200" dirty="0"/>
-          </a:p>
-        </p:txBody>
-      </p:sp>
-      <p:sp>
-        <p:nvSpPr>
-          <p:cNvPr id="17" name="Text 15"/>
-          <p:cNvSpPr/>
-          <p:nvPr/>
-        </p:nvSpPr>
-        <p:spPr>
-          <a:xfrm>
-            <a:off x="406301" y="6172498"/>
+            <a:off x="406301" y="4434929"/>
             <a:ext cx="8498026" cy="213271"/>
           </a:xfrm>
           <a:prstGeom prst="rect">
@@ -5606,7 +7391,7 @@
                 <a:ea typeface="Georgia" pitchFamily="34" charset="-122"/>
                 <a:cs typeface="Georgia" pitchFamily="34" charset="-120"/>
               </a:rPr>
-              <a:t>Activity (15 min) — Comparison drill</a:t>
+              <a:t>Core (20 min) — Where the trick breaks down</a:t>
             </a:r>
             <a:endParaRPr lang="en-US" sz="1800" dirty="0"/>
           </a:p>
@@ -5620,8 +7405,8 @@
         </p:nvSpPr>
         <p:spPr>
           <a:xfrm>
-            <a:off x="406301" y="870942"/>
-            <a:ext cx="8498026" cy="426541"/>
+            <a:off x="634901" y="883593"/>
+            <a:ext cx="8102798" cy="281880"/>
           </a:xfrm>
           <a:prstGeom prst="rect">
             <a:avLst/>
@@ -5633,13 +7418,31 @@
           <a:bodyPr wrap="square" lIns="0" tIns="0" rIns="0" bIns="0" rtlCol="0" anchor="t"/>
           <a:lstStyle/>
           <a:p>
-            <a:pPr algn="l" indent="0" marL="0">
-              <a:lnSpc>
-                <a:spcPts val="1680"/>
-              </a:lnSpc>
-              <a:spcBef>
-                <a:spcPts val="300"/>
-              </a:spcBef>
+            <a:pPr algn="l" marL="342900" indent="-342900">
+              <a:lnSpc>
+                <a:spcPts val="1620"/>
+              </a:lnSpc>
+              <a:spcAft>
+                <a:spcPts val="300"/>
+              </a:spcAft>
+              <a:buSzPct val="100000"/>
+              <a:buChar char="•"/>
+            </a:pPr>
+            <a:r>
+              <a:rPr lang="en-US" sz="1200" b="1" dirty="0">
+                <a:solidFill>
+                  <a:srgbClr val="1C2833"/>
+                </a:solidFill>
+                <a:latin typeface="Arial" pitchFamily="34" charset="0"/>
+                <a:ea typeface="Arial" pitchFamily="34" charset="-122"/>
+                <a:cs typeface="Arial" pitchFamily="34" charset="-120"/>
+              </a:rPr>
+              <a:t>Try ×23.</a:t>
+            </a:r>
+            <a:pPr algn="l" indent="0" marL="0">
+              <a:lnSpc>
+                <a:spcPts val="1620"/>
+              </a:lnSpc>
               <a:spcAft>
                 <a:spcPts val="300"/>
               </a:spcAft>
@@ -5654,15 +7457,12 @@
                 <a:ea typeface="Arial" pitchFamily="34" charset="-122"/>
                 <a:cs typeface="Arial" pitchFamily="34" charset="-120"/>
               </a:rPr>
-              <a:t>– 8 problems. For each, decide </a:t>
-            </a:r>
-            <a:pPr algn="l" indent="0" marL="0">
-              <a:lnSpc>
-                <a:spcPts val="1680"/>
-              </a:lnSpc>
-              <a:spcBef>
-                <a:spcPts val="300"/>
-              </a:spcBef>
+              <a:t> </a:t>
+            </a:r>
+            <a:pPr algn="l" indent="0" marL="0">
+              <a:lnSpc>
+                <a:spcPts val="1620"/>
+              </a:lnSpc>
               <a:spcAft>
                 <a:spcPts val="300"/>
               </a:spcAft>
@@ -5677,30 +7477,7 @@
                 <a:ea typeface="Arial" pitchFamily="34" charset="-122"/>
                 <a:cs typeface="Arial" pitchFamily="34" charset="-120"/>
               </a:rPr>
-              <a:t>before</a:t>
-            </a:r>
-            <a:pPr algn="l" indent="0" marL="0">
-              <a:lnSpc>
-                <a:spcPts val="1680"/>
-              </a:lnSpc>
-              <a:spcBef>
-                <a:spcPts val="300"/>
-              </a:spcBef>
-              <a:spcAft>
-                <a:spcPts val="300"/>
-              </a:spcAft>
-              <a:buNone/>
-            </a:pPr>
-            <a:r>
-              <a:rPr lang="en-US" sz="1200" dirty="0">
-                <a:solidFill>
-                  <a:srgbClr val="1C2833"/>
-                </a:solidFill>
-                <a:latin typeface="Arial" pitchFamily="34" charset="0"/>
-                <a:ea typeface="Arial" pitchFamily="34" charset="-122"/>
-                <a:cs typeface="Arial" pitchFamily="34" charset="-120"/>
-              </a:rPr>
-              <a:t> solving: would you use (A) the ×11 family trick, (B) long multiplication, or (C) a different mental shortcut you can articulate?</a:t>
+              <a:t>"Let's try the same proportional pattern with multiplier 23 = 20 + 3."</a:t>
             </a:r>
             <a:endParaRPr lang="en-US" sz="1200" dirty="0"/>
           </a:p>
@@ -5714,61 +7491,8 @@
         </p:nvSpPr>
         <p:spPr>
           <a:xfrm>
-            <a:off x="406301" y="1386334"/>
-            <a:ext cx="8331398" cy="952202"/>
-          </a:xfrm>
-          <a:prstGeom prst="rect">
-            <a:avLst/>
-          </a:prstGeom>
-          <a:solidFill>
-            <a:srgbClr val="F4F8F9"/>
-          </a:solidFill>
-          <a:ln/>
-        </p:spPr>
-        <p:txBody>
-          <a:bodyPr wrap="square" rtlCol="0" anchor="ctr"/>
-          <a:lstStyle/>
-          <a:p>
-            <a:pPr indent="0" marL="0">
-              <a:buNone/>
-            </a:pPr>
-            <a:endParaRPr lang="en-US" dirty="0"/>
-          </a:p>
-        </p:txBody>
-      </p:sp>
-      <p:sp>
-        <p:nvSpPr>
-          <p:cNvPr id="6" name="Shape 4"/>
-          <p:cNvSpPr/>
-          <p:nvPr/>
-        </p:nvSpPr>
-        <p:spPr>
-          <a:xfrm>
-            <a:off x="430113" y="1386334"/>
-            <a:ext cx="0" cy="952202"/>
-          </a:xfrm>
-          <a:prstGeom prst="line">
-            <a:avLst/>
-          </a:prstGeom>
-          <a:noFill/>
-          <a:ln w="47625">
-            <a:solidFill>
-              <a:srgbClr val="277884"/>
-            </a:solidFill>
-            <a:prstDash val="solid"/>
-          </a:ln>
-        </p:spPr>
-      </p:sp>
-      <p:sp>
-        <p:nvSpPr>
-          <p:cNvPr id="7" name="Text 5"/>
-          <p:cNvSpPr/>
-          <p:nvPr/>
-        </p:nvSpPr>
-        <p:spPr>
-          <a:xfrm>
-            <a:off x="631627" y="1513284"/>
-            <a:ext cx="8086939" cy="174575"/>
+            <a:off x="634901" y="1266974"/>
+            <a:ext cx="8102798" cy="769441"/>
           </a:xfrm>
           <a:prstGeom prst="rect">
             <a:avLst/>
@@ -5780,185 +7504,15 @@
           <a:bodyPr wrap="square" lIns="0" tIns="0" rIns="0" bIns="0" rtlCol="0" anchor="t"/>
           <a:lstStyle/>
           <a:p>
-            <a:pPr algn="l" indent="0" marL="0">
-              <a:lnSpc>
-                <a:spcPts val="1375"/>
-              </a:lnSpc>
-              <a:buNone/>
-            </a:pPr>
-            <a:r>
-              <a:rPr lang="en-US" sz="1100" dirty="0">
-                <a:solidFill>
-                  <a:srgbClr val="1C2833"/>
-                </a:solidFill>
-                <a:latin typeface="Courier New" pitchFamily="34" charset="0"/>
-                <a:ea typeface="Courier New" pitchFamily="34" charset="-122"/>
-                <a:cs typeface="Courier New" pitchFamily="34" charset="-120"/>
-              </a:rPr>
-              <a:t>1. 67 × 11        5. 84 × 23</a:t>
-            </a:r>
-            <a:endParaRPr lang="en-US" sz="1100" dirty="0"/>
-          </a:p>
-        </p:txBody>
-      </p:sp>
-      <p:sp>
-        <p:nvSpPr>
-          <p:cNvPr id="8" name="Text 6"/>
-          <p:cNvSpPr/>
-          <p:nvPr/>
-        </p:nvSpPr>
-        <p:spPr>
-          <a:xfrm>
-            <a:off x="631627" y="1687860"/>
-            <a:ext cx="8086939" cy="174575"/>
-          </a:xfrm>
-          <a:prstGeom prst="rect">
-            <a:avLst/>
-          </a:prstGeom>
-          <a:noFill/>
-          <a:ln/>
-        </p:spPr>
-        <p:txBody>
-          <a:bodyPr wrap="square" lIns="0" tIns="0" rIns="0" bIns="0" rtlCol="0" anchor="t"/>
-          <a:lstStyle/>
-          <a:p>
-            <a:pPr algn="l" indent="0" marL="0">
-              <a:lnSpc>
-                <a:spcPts val="1375"/>
-              </a:lnSpc>
-              <a:buNone/>
-            </a:pPr>
-            <a:r>
-              <a:rPr lang="en-US" sz="1100" dirty="0">
-                <a:solidFill>
-                  <a:srgbClr val="1C2833"/>
-                </a:solidFill>
-                <a:latin typeface="Courier New" pitchFamily="34" charset="0"/>
-                <a:ea typeface="Courier New" pitchFamily="34" charset="-122"/>
-                <a:cs typeface="Courier New" pitchFamily="34" charset="-120"/>
-              </a:rPr>
-              <a:t>2. 47 × 13        6. 99 × 99</a:t>
-            </a:r>
-            <a:endParaRPr lang="en-US" sz="1100" dirty="0"/>
-          </a:p>
-        </p:txBody>
-      </p:sp>
-      <p:sp>
-        <p:nvSpPr>
-          <p:cNvPr id="9" name="Text 7"/>
-          <p:cNvSpPr/>
-          <p:nvPr/>
-        </p:nvSpPr>
-        <p:spPr>
-          <a:xfrm>
-            <a:off x="631627" y="1862435"/>
-            <a:ext cx="8086939" cy="174575"/>
-          </a:xfrm>
-          <a:prstGeom prst="rect">
-            <a:avLst/>
-          </a:prstGeom>
-          <a:noFill/>
-          <a:ln/>
-        </p:spPr>
-        <p:txBody>
-          <a:bodyPr wrap="square" lIns="0" tIns="0" rIns="0" bIns="0" rtlCol="0" anchor="t"/>
-          <a:lstStyle/>
-          <a:p>
-            <a:pPr algn="l" indent="0" marL="0">
-              <a:lnSpc>
-                <a:spcPts val="1375"/>
-              </a:lnSpc>
-              <a:buNone/>
-            </a:pPr>
-            <a:r>
-              <a:rPr lang="en-US" sz="1100" dirty="0">
-                <a:solidFill>
-                  <a:srgbClr val="1C2833"/>
-                </a:solidFill>
-                <a:latin typeface="Courier New" pitchFamily="34" charset="0"/>
-                <a:ea typeface="Courier New" pitchFamily="34" charset="-122"/>
-                <a:cs typeface="Courier New" pitchFamily="34" charset="-120"/>
-              </a:rPr>
-              <a:t>3. 56 × 19        7. 25 × 12</a:t>
-            </a:r>
-            <a:endParaRPr lang="en-US" sz="1100" dirty="0"/>
-          </a:p>
-        </p:txBody>
-      </p:sp>
-      <p:sp>
-        <p:nvSpPr>
-          <p:cNvPr id="10" name="Text 8"/>
-          <p:cNvSpPr/>
-          <p:nvPr/>
-        </p:nvSpPr>
-        <p:spPr>
-          <a:xfrm>
-            <a:off x="631627" y="2037011"/>
-            <a:ext cx="8086939" cy="174575"/>
-          </a:xfrm>
-          <a:prstGeom prst="rect">
-            <a:avLst/>
-          </a:prstGeom>
-          <a:noFill/>
-          <a:ln/>
-        </p:spPr>
-        <p:txBody>
-          <a:bodyPr wrap="square" lIns="0" tIns="0" rIns="0" bIns="0" rtlCol="0" anchor="t"/>
-          <a:lstStyle/>
-          <a:p>
-            <a:pPr algn="l" indent="0" marL="0">
-              <a:lnSpc>
-                <a:spcPts val="1375"/>
-              </a:lnSpc>
-              <a:buNone/>
-            </a:pPr>
-            <a:r>
-              <a:rPr lang="en-US" sz="1100" dirty="0">
-                <a:solidFill>
-                  <a:srgbClr val="1C2833"/>
-                </a:solidFill>
-                <a:latin typeface="Courier New" pitchFamily="34" charset="0"/>
-                <a:ea typeface="Courier New" pitchFamily="34" charset="-122"/>
-                <a:cs typeface="Courier New" pitchFamily="34" charset="-120"/>
-              </a:rPr>
-              <a:t>4. 38 × 47        8. 102 × 11</a:t>
-            </a:r>
-            <a:endParaRPr lang="en-US" sz="1100" dirty="0"/>
-          </a:p>
-        </p:txBody>
-      </p:sp>
-      <p:sp>
-        <p:nvSpPr>
-          <p:cNvPr id="11" name="Text 9"/>
-          <p:cNvSpPr/>
-          <p:nvPr/>
-        </p:nvSpPr>
-        <p:spPr>
-          <a:xfrm>
-            <a:off x="406301" y="2427387"/>
-            <a:ext cx="8498026" cy="213271"/>
-          </a:xfrm>
-          <a:prstGeom prst="rect">
-            <a:avLst/>
-          </a:prstGeom>
-          <a:noFill/>
-          <a:ln/>
-        </p:spPr>
-        <p:txBody>
-          <a:bodyPr wrap="square" lIns="0" tIns="0" rIns="0" bIns="0" rtlCol="0" anchor="t"/>
-          <a:lstStyle/>
-          <a:p>
-            <a:pPr algn="l" indent="0" marL="0">
-              <a:lnSpc>
-                <a:spcPts val="1680"/>
-              </a:lnSpc>
-              <a:spcBef>
-                <a:spcPts val="300"/>
-              </a:spcBef>
-              <a:spcAft>
-                <a:spcPts val="300"/>
-              </a:spcAft>
-              <a:buNone/>
+            <a:pPr algn="l" marL="342900" indent="-342900">
+              <a:lnSpc>
+                <a:spcPts val="1620"/>
+              </a:lnSpc>
+              <a:spcAft>
+                <a:spcPts val="300"/>
+              </a:spcAft>
+              <a:buSzPct val="100000"/>
+              <a:buChar char="•"/>
             </a:pPr>
             <a:r>
               <a:rPr lang="en-US" sz="1200" dirty="0">
@@ -5969,15 +7523,63 @@
                 <a:ea typeface="Arial" pitchFamily="34" charset="-122"/>
                 <a:cs typeface="Arial" pitchFamily="34" charset="-120"/>
               </a:rPr>
-              <a:t>– Pair work. Solve and discuss your method choice. – Answers and "best method" given on the back.</a:t>
+              <a:t>For 14 × 23, would the trick scale?</a:t>
             </a:r>
             <a:endParaRPr lang="en-US" sz="1200" dirty="0"/>
           </a:p>
-        </p:txBody>
-      </p:sp>
-      <p:sp>
-        <p:nvSpPr>
-          <p:cNvPr id="12" name="Text 10"/>
+          <a:p>
+            <a:pPr algn="l" marL="342900" indent="-342900">
+              <a:lnSpc>
+                <a:spcPts val="1620"/>
+              </a:lnSpc>
+              <a:spcAft>
+                <a:spcPts val="300"/>
+              </a:spcAft>
+              <a:buSzPct val="100000"/>
+              <a:buChar char="•"/>
+            </a:pPr>
+            <a:r>
+              <a:rPr lang="en-US" sz="1200" dirty="0">
+                <a:solidFill>
+                  <a:srgbClr val="1C2833"/>
+                </a:solidFill>
+                <a:latin typeface="Arial" pitchFamily="34" charset="0"/>
+                <a:ea typeface="Arial" pitchFamily="34" charset="-122"/>
+                <a:cs typeface="Arial" pitchFamily="34" charset="-120"/>
+              </a:rPr>
+              <a:t>(14)(20 + 3) = 280 + 42 = 322. Long way works.</a:t>
+            </a:r>
+            <a:endParaRPr lang="en-US" sz="1200" dirty="0"/>
+          </a:p>
+          <a:p>
+            <a:pPr algn="l" marL="342900" indent="-342900">
+              <a:lnSpc>
+                <a:spcPts val="1620"/>
+              </a:lnSpc>
+              <a:spcAft>
+                <a:spcPts val="300"/>
+              </a:spcAft>
+              <a:buSzPct val="100000"/>
+              <a:buChar char="•"/>
+            </a:pPr>
+            <a:r>
+              <a:rPr lang="en-US" sz="1200" dirty="0">
+                <a:solidFill>
+                  <a:srgbClr val="1C2833"/>
+                </a:solidFill>
+                <a:latin typeface="Arial" pitchFamily="34" charset="0"/>
+                <a:ea typeface="Arial" pitchFamily="34" charset="-122"/>
+                <a:cs typeface="Arial" pitchFamily="34" charset="-120"/>
+              </a:rPr>
+              <a:t>The "proportional middle" pattern doesn't extend cleanly past 19 because the multiplier has two non-trivial digits.</a:t>
+            </a:r>
+            <a:endParaRPr lang="en-US" sz="1200" dirty="0"/>
+          </a:p>
+        </p:txBody>
+      </p:sp>
+      <p:sp>
+        <p:nvSpPr>
+          <p:cNvPr id="6" name="Text 4"/>
           <p:cNvSpPr/>
           <p:nvPr/>
         </p:nvSpPr>
@@ -6127,7 +7729,7 @@
                 <a:ea typeface="Georgia" pitchFamily="34" charset="-122"/>
                 <a:cs typeface="Georgia" pitchFamily="34" charset="-120"/>
               </a:rPr>
-              <a:t>Wrap-up (5 min)</a:t>
+              <a:t>Core (20 min) — Where the trick breaks down (cont.)</a:t>
             </a:r>
             <a:endParaRPr lang="en-US" sz="1800" dirty="0"/>
           </a:p>
@@ -6141,8 +7743,8 @@
         </p:nvSpPr>
         <p:spPr>
           <a:xfrm>
-            <a:off x="406301" y="870942"/>
-            <a:ext cx="8498026" cy="639812"/>
+            <a:off x="634901" y="883593"/>
+            <a:ext cx="8102798" cy="487561"/>
           </a:xfrm>
           <a:prstGeom prst="rect">
             <a:avLst/>
@@ -6154,13 +7756,31 @@
           <a:bodyPr wrap="square" lIns="0" tIns="0" rIns="0" bIns="0" rtlCol="0" anchor="t"/>
           <a:lstStyle/>
           <a:p>
-            <a:pPr algn="l" indent="0" marL="0">
-              <a:lnSpc>
-                <a:spcPts val="1680"/>
-              </a:lnSpc>
-              <a:spcBef>
-                <a:spcPts val="300"/>
-              </a:spcBef>
+            <a:pPr algn="l" marL="342900" indent="-342900">
+              <a:lnSpc>
+                <a:spcPts val="1620"/>
+              </a:lnSpc>
+              <a:spcAft>
+                <a:spcPts val="300"/>
+              </a:spcAft>
+              <a:buSzPct val="100000"/>
+              <a:buChar char="•"/>
+            </a:pPr>
+            <a:r>
+              <a:rPr lang="en-US" sz="1200" b="1" dirty="0">
+                <a:solidFill>
+                  <a:srgbClr val="1C2833"/>
+                </a:solidFill>
+                <a:latin typeface="Arial" pitchFamily="34" charset="0"/>
+                <a:ea typeface="Arial" pitchFamily="34" charset="-122"/>
+                <a:cs typeface="Arial" pitchFamily="34" charset="-120"/>
+              </a:rPr>
+              <a:t>Why?</a:t>
+            </a:r>
+            <a:pPr algn="l" indent="0" marL="0">
+              <a:lnSpc>
+                <a:spcPts val="1620"/>
+              </a:lnSpc>
               <a:spcAft>
                 <a:spcPts val="300"/>
               </a:spcAft>
@@ -6175,15 +7795,12 @@
                 <a:ea typeface="Arial" pitchFamily="34" charset="-122"/>
                 <a:cs typeface="Arial" pitchFamily="34" charset="-120"/>
               </a:rPr>
-              <a:t>– Class compiles "the ×11 family domain": </a:t>
-            </a:r>
-            <a:pPr algn="l" indent="0" marL="0">
-              <a:lnSpc>
-                <a:spcPts val="1680"/>
-              </a:lnSpc>
-              <a:spcBef>
-                <a:spcPts val="300"/>
-              </a:spcBef>
+              <a:t> Recall the identity: ×(10 + </a:t>
+            </a:r>
+            <a:pPr algn="l" indent="0" marL="0">
+              <a:lnSpc>
+                <a:spcPts val="1620"/>
+              </a:lnSpc>
               <a:spcAft>
                 <a:spcPts val="300"/>
               </a:spcAft>
@@ -6198,15 +7815,12 @@
                 <a:ea typeface="Arial" pitchFamily="34" charset="-122"/>
                 <a:cs typeface="Arial" pitchFamily="34" charset="-120"/>
               </a:rPr>
-              <a:t>all 2-digit numbers × (11, 12, 13, …, 19)</a:t>
-            </a:r>
-            <a:pPr algn="l" indent="0" marL="0">
-              <a:lnSpc>
-                <a:spcPts val="1680"/>
-              </a:lnSpc>
-              <a:spcBef>
-                <a:spcPts val="300"/>
-              </a:spcBef>
+              <a:t>k</a:t>
+            </a:r>
+            <a:pPr algn="l" indent="0" marL="0">
+              <a:lnSpc>
+                <a:spcPts val="1620"/>
+              </a:lnSpc>
               <a:spcAft>
                 <a:spcPts val="300"/>
               </a:spcAft>
@@ -6221,15 +7835,12 @@
                 <a:ea typeface="Arial" pitchFamily="34" charset="-122"/>
                 <a:cs typeface="Arial" pitchFamily="34" charset="-120"/>
               </a:rPr>
-              <a:t> — about 90 × 9 = 810 distinct problems. That's a significant mental-math territory. – Preview Day 8: </a:t>
-            </a:r>
-            <a:pPr algn="l" indent="0" marL="0">
-              <a:lnSpc>
-                <a:spcPts val="1680"/>
-              </a:lnSpc>
-              <a:spcBef>
-                <a:spcPts val="300"/>
-              </a:spcBef>
+              <a:t>) → 100</a:t>
+            </a:r>
+            <a:pPr algn="l" indent="0" marL="0">
+              <a:lnSpc>
+                <a:spcPts val="1620"/>
+              </a:lnSpc>
               <a:spcAft>
                 <a:spcPts val="300"/>
               </a:spcAft>
@@ -6244,7 +7855,187 @@
                 <a:ea typeface="Arial" pitchFamily="34" charset="-122"/>
                 <a:cs typeface="Arial" pitchFamily="34" charset="-120"/>
               </a:rPr>
-              <a:t>"Tomorrow — where do these 16 sūtras come from? The honest history."</a:t>
+              <a:t>a</a:t>
+            </a:r>
+            <a:pPr algn="l" indent="0" marL="0">
+              <a:lnSpc>
+                <a:spcPts val="1620"/>
+              </a:lnSpc>
+              <a:spcAft>
+                <a:spcPts val="300"/>
+              </a:spcAft>
+              <a:buNone/>
+            </a:pPr>
+            <a:r>
+              <a:rPr lang="en-US" sz="1200" dirty="0">
+                <a:solidFill>
+                  <a:srgbClr val="1C2833"/>
+                </a:solidFill>
+                <a:latin typeface="Arial" pitchFamily="34" charset="0"/>
+                <a:ea typeface="Arial" pitchFamily="34" charset="-122"/>
+                <a:cs typeface="Arial" pitchFamily="34" charset="-120"/>
+              </a:rPr>
+              <a:t> + 10(</a:t>
+            </a:r>
+            <a:pPr algn="l" indent="0" marL="0">
+              <a:lnSpc>
+                <a:spcPts val="1620"/>
+              </a:lnSpc>
+              <a:spcAft>
+                <a:spcPts val="300"/>
+              </a:spcAft>
+              <a:buNone/>
+            </a:pPr>
+            <a:r>
+              <a:rPr lang="en-US" sz="1200" i="1" dirty="0">
+                <a:solidFill>
+                  <a:srgbClr val="1C2833"/>
+                </a:solidFill>
+                <a:latin typeface="Arial" pitchFamily="34" charset="0"/>
+                <a:ea typeface="Arial" pitchFamily="34" charset="-122"/>
+                <a:cs typeface="Arial" pitchFamily="34" charset="-120"/>
+              </a:rPr>
+              <a:t>ak</a:t>
+            </a:r>
+            <a:pPr algn="l" indent="0" marL="0">
+              <a:lnSpc>
+                <a:spcPts val="1620"/>
+              </a:lnSpc>
+              <a:spcAft>
+                <a:spcPts val="300"/>
+              </a:spcAft>
+              <a:buNone/>
+            </a:pPr>
+            <a:r>
+              <a:rPr lang="en-US" sz="1200" dirty="0">
+                <a:solidFill>
+                  <a:srgbClr val="1C2833"/>
+                </a:solidFill>
+                <a:latin typeface="Arial" pitchFamily="34" charset="0"/>
+                <a:ea typeface="Arial" pitchFamily="34" charset="-122"/>
+                <a:cs typeface="Arial" pitchFamily="34" charset="-120"/>
+              </a:rPr>
+              <a:t> + </a:t>
+            </a:r>
+            <a:pPr algn="l" indent="0" marL="0">
+              <a:lnSpc>
+                <a:spcPts val="1620"/>
+              </a:lnSpc>
+              <a:spcAft>
+                <a:spcPts val="300"/>
+              </a:spcAft>
+              <a:buNone/>
+            </a:pPr>
+            <a:r>
+              <a:rPr lang="en-US" sz="1200" i="1" dirty="0">
+                <a:solidFill>
+                  <a:srgbClr val="1C2833"/>
+                </a:solidFill>
+                <a:latin typeface="Arial" pitchFamily="34" charset="0"/>
+                <a:ea typeface="Arial" pitchFamily="34" charset="-122"/>
+                <a:cs typeface="Arial" pitchFamily="34" charset="-120"/>
+              </a:rPr>
+              <a:t>b</a:t>
+            </a:r>
+            <a:pPr algn="l" indent="0" marL="0">
+              <a:lnSpc>
+                <a:spcPts val="1620"/>
+              </a:lnSpc>
+              <a:spcAft>
+                <a:spcPts val="300"/>
+              </a:spcAft>
+              <a:buNone/>
+            </a:pPr>
+            <a:r>
+              <a:rPr lang="en-US" sz="1200" dirty="0">
+                <a:solidFill>
+                  <a:srgbClr val="1C2833"/>
+                </a:solidFill>
+                <a:latin typeface="Arial" pitchFamily="34" charset="0"/>
+                <a:ea typeface="Arial" pitchFamily="34" charset="-122"/>
+                <a:cs typeface="Arial" pitchFamily="34" charset="-120"/>
+              </a:rPr>
+              <a:t>) + </a:t>
+            </a:r>
+            <a:pPr algn="l" indent="0" marL="0">
+              <a:lnSpc>
+                <a:spcPts val="1620"/>
+              </a:lnSpc>
+              <a:spcAft>
+                <a:spcPts val="300"/>
+              </a:spcAft>
+              <a:buNone/>
+            </a:pPr>
+            <a:r>
+              <a:rPr lang="en-US" sz="1200" i="1" dirty="0">
+                <a:solidFill>
+                  <a:srgbClr val="1C2833"/>
+                </a:solidFill>
+                <a:latin typeface="Arial" pitchFamily="34" charset="0"/>
+                <a:ea typeface="Arial" pitchFamily="34" charset="-122"/>
+                <a:cs typeface="Arial" pitchFamily="34" charset="-120"/>
+              </a:rPr>
+              <a:t>bk</a:t>
+            </a:r>
+            <a:pPr algn="l" indent="0" marL="0">
+              <a:lnSpc>
+                <a:spcPts val="1620"/>
+              </a:lnSpc>
+              <a:spcAft>
+                <a:spcPts val="300"/>
+              </a:spcAft>
+              <a:buNone/>
+            </a:pPr>
+            <a:r>
+              <a:rPr lang="en-US" sz="1200" dirty="0">
+                <a:solidFill>
+                  <a:srgbClr val="1C2833"/>
+                </a:solidFill>
+                <a:latin typeface="Arial" pitchFamily="34" charset="0"/>
+                <a:ea typeface="Arial" pitchFamily="34" charset="-122"/>
+                <a:cs typeface="Arial" pitchFamily="34" charset="-120"/>
+              </a:rPr>
+              <a:t>. Clean because the "tens" part of the multiplier is </a:t>
+            </a:r>
+            <a:pPr algn="l" indent="0" marL="0">
+              <a:lnSpc>
+                <a:spcPts val="1620"/>
+              </a:lnSpc>
+              <a:spcAft>
+                <a:spcPts val="300"/>
+              </a:spcAft>
+              <a:buNone/>
+            </a:pPr>
+            <a:r>
+              <a:rPr lang="en-US" sz="1200" b="1" dirty="0">
+                <a:solidFill>
+                  <a:srgbClr val="1C2833"/>
+                </a:solidFill>
+                <a:latin typeface="Arial" pitchFamily="34" charset="0"/>
+                <a:ea typeface="Arial" pitchFamily="34" charset="-122"/>
+                <a:cs typeface="Arial" pitchFamily="34" charset="-120"/>
+              </a:rPr>
+              <a:t>just 1</a:t>
+            </a:r>
+            <a:pPr algn="l" indent="0" marL="0">
+              <a:lnSpc>
+                <a:spcPts val="1620"/>
+              </a:lnSpc>
+              <a:spcAft>
+                <a:spcPts val="300"/>
+              </a:spcAft>
+              <a:buNone/>
+            </a:pPr>
+            <a:r>
+              <a:rPr lang="en-US" sz="1200" dirty="0">
+                <a:solidFill>
+                  <a:srgbClr val="1C2833"/>
+                </a:solidFill>
+                <a:latin typeface="Arial" pitchFamily="34" charset="0"/>
+                <a:ea typeface="Arial" pitchFamily="34" charset="-122"/>
+                <a:cs typeface="Arial" pitchFamily="34" charset="-120"/>
+              </a:rPr>
+              <a:t>. For ×23, the algebra is:</a:t>
             </a:r>
             <a:endParaRPr lang="en-US" sz="1200" dirty="0"/>
           </a:p>
@@ -6402,7 +8193,7 @@
                 <a:ea typeface="Georgia" pitchFamily="34" charset="-122"/>
                 <a:cs typeface="Georgia" pitchFamily="34" charset="-120"/>
               </a:rPr>
-              <a:t>Student-facing content</a:t>
+              <a:t>Core (20 min) — Where the trick breaks down (cont.)</a:t>
             </a:r>
             <a:endParaRPr lang="en-US" sz="1800" dirty="0"/>
           </a:p>
@@ -6417,7 +8208,7 @@
         <p:spPr>
           <a:xfrm>
             <a:off x="406301" y="883593"/>
-            <a:ext cx="8331398" cy="2112169"/>
+            <a:ext cx="8331398" cy="952202"/>
           </a:xfrm>
           <a:prstGeom prst="rect">
             <a:avLst/>
@@ -6446,16 +8237,16 @@
         </p:nvSpPr>
         <p:spPr>
           <a:xfrm>
-            <a:off x="434876" y="883593"/>
-            <a:ext cx="0" cy="2112169"/>
+            <a:off x="430113" y="883593"/>
+            <a:ext cx="0" cy="952202"/>
           </a:xfrm>
           <a:prstGeom prst="line">
             <a:avLst/>
           </a:prstGeom>
           <a:noFill/>
-          <a:ln w="57150">
+          <a:ln w="47625">
             <a:solidFill>
-              <a:srgbClr val="FE4447"/>
+              <a:srgbClr val="277884"/>
             </a:solidFill>
             <a:prstDash val="solid"/>
           </a:ln>
@@ -6469,8 +8260,8 @@
         </p:nvSpPr>
         <p:spPr>
           <a:xfrm>
-            <a:off x="692051" y="1074093"/>
-            <a:ext cx="7973389" cy="230981"/>
+            <a:off x="631627" y="1010543"/>
+            <a:ext cx="8086939" cy="174575"/>
           </a:xfrm>
           <a:prstGeom prst="rect">
             <a:avLst/>
@@ -6484,28 +8275,22 @@
           <a:p>
             <a:pPr algn="l" indent="0" marL="0">
               <a:lnSpc>
-                <a:spcPts val="1820"/>
-              </a:lnSpc>
-              <a:spcBef>
-                <a:spcPts val="300"/>
-              </a:spcBef>
-              <a:spcAft>
-                <a:spcPts val="300"/>
-              </a:spcAft>
-              <a:buNone/>
-            </a:pPr>
-            <a:r>
-              <a:rPr lang="en-US" sz="1300" b="1" i="1" dirty="0">
-                <a:solidFill>
-                  <a:srgbClr val="1C2833"/>
-                </a:solidFill>
-                <a:latin typeface="Georgia" pitchFamily="34" charset="0"/>
-                <a:ea typeface="Georgia" pitchFamily="34" charset="-122"/>
-                <a:cs typeface="Georgia" pitchFamily="34" charset="-120"/>
-              </a:rPr>
-              <a:t>The domain of the ×11 trick</a:t>
-            </a:r>
-            <a:endParaRPr lang="en-US" sz="1300" dirty="0"/>
+                <a:spcPts val="1375"/>
+              </a:lnSpc>
+              <a:buNone/>
+            </a:pPr>
+            <a:r>
+              <a:rPr lang="en-US" sz="1100" dirty="0">
+                <a:solidFill>
+                  <a:srgbClr val="1C2833"/>
+                </a:solidFill>
+                <a:latin typeface="Courier New" pitchFamily="34" charset="0"/>
+                <a:ea typeface="Courier New" pitchFamily="34" charset="-122"/>
+                <a:cs typeface="Courier New" pitchFamily="34" charset="-120"/>
+              </a:rPr>
+              <a:t>(10a + b)(20 + 3)</a:t>
+            </a:r>
+            <a:endParaRPr lang="en-US" sz="1100" dirty="0"/>
           </a:p>
         </p:txBody>
       </p:sp>
@@ -6517,8 +8302,8 @@
         </p:nvSpPr>
         <p:spPr>
           <a:xfrm>
-            <a:off x="692051" y="1343174"/>
-            <a:ext cx="7973389" cy="461963"/>
+            <a:off x="631627" y="1185118"/>
+            <a:ext cx="8086939" cy="174575"/>
           </a:xfrm>
           <a:prstGeom prst="rect">
             <a:avLst/>
@@ -6532,120 +8317,22 @@
           <a:p>
             <a:pPr algn="l" indent="0" marL="0">
               <a:lnSpc>
-                <a:spcPts val="1820"/>
-              </a:lnSpc>
-              <a:spcBef>
-                <a:spcPts val="300"/>
-              </a:spcBef>
-              <a:spcAft>
-                <a:spcPts val="300"/>
-              </a:spcAft>
-              <a:buNone/>
-            </a:pPr>
-            <a:r>
-              <a:rPr lang="en-US" sz="1300" dirty="0">
-                <a:solidFill>
-                  <a:srgbClr val="1C2833"/>
-                </a:solidFill>
-                <a:latin typeface="Georgia" pitchFamily="34" charset="0"/>
-                <a:ea typeface="Georgia" pitchFamily="34" charset="-122"/>
-                <a:cs typeface="Georgia" pitchFamily="34" charset="-120"/>
-              </a:rPr>
-              <a:t>The "split and add" trick works for multipliers of the form *</a:t>
-            </a:r>
-            <a:pPr algn="l" indent="0" marL="0">
-              <a:lnSpc>
-                <a:spcPts val="1820"/>
-              </a:lnSpc>
-              <a:spcBef>
-                <a:spcPts val="300"/>
-              </a:spcBef>
-              <a:spcAft>
-                <a:spcPts val="300"/>
-              </a:spcAft>
-              <a:buNone/>
-            </a:pPr>
-            <a:r>
-              <a:rPr lang="en-US" sz="1300" i="1" dirty="0">
-                <a:solidFill>
-                  <a:srgbClr val="1C2833"/>
-                </a:solidFill>
-                <a:latin typeface="Georgia" pitchFamily="34" charset="0"/>
-                <a:ea typeface="Georgia" pitchFamily="34" charset="-122"/>
-                <a:cs typeface="Georgia" pitchFamily="34" charset="-120"/>
-              </a:rPr>
-              <a:t>10 +</a:t>
-            </a:r>
-            <a:pPr algn="l" indent="0" marL="0">
-              <a:lnSpc>
-                <a:spcPts val="1820"/>
-              </a:lnSpc>
-              <a:spcBef>
-                <a:spcPts val="300"/>
-              </a:spcBef>
-              <a:spcAft>
-                <a:spcPts val="300"/>
-              </a:spcAft>
-              <a:buNone/>
-            </a:pPr>
-            <a:r>
-              <a:rPr lang="en-US" sz="1300" dirty="0">
-                <a:solidFill>
-                  <a:srgbClr val="1C2833"/>
-                </a:solidFill>
-                <a:latin typeface="Georgia" pitchFamily="34" charset="0"/>
-                <a:ea typeface="Georgia" pitchFamily="34" charset="-122"/>
-                <a:cs typeface="Georgia" pitchFamily="34" charset="-120"/>
-              </a:rPr>
-              <a:t>k**</a:t>
-            </a:r>
-            <a:pPr algn="l" indent="0" marL="0">
-              <a:lnSpc>
-                <a:spcPts val="1820"/>
-              </a:lnSpc>
-              <a:spcBef>
-                <a:spcPts val="300"/>
-              </a:spcBef>
-              <a:spcAft>
-                <a:spcPts val="300"/>
-              </a:spcAft>
-              <a:buNone/>
-            </a:pPr>
-            <a:r>
-              <a:rPr lang="en-US" sz="1300" i="1" dirty="0">
-                <a:solidFill>
-                  <a:srgbClr val="1C2833"/>
-                </a:solidFill>
-                <a:latin typeface="Georgia" pitchFamily="34" charset="0"/>
-                <a:ea typeface="Georgia" pitchFamily="34" charset="-122"/>
-                <a:cs typeface="Georgia" pitchFamily="34" charset="-120"/>
-              </a:rPr>
-              <a:t> where</a:t>
-            </a:r>
-            <a:pPr algn="l" indent="0" marL="0">
-              <a:lnSpc>
-                <a:spcPts val="1820"/>
-              </a:lnSpc>
-              <a:spcBef>
-                <a:spcPts val="300"/>
-              </a:spcBef>
-              <a:spcAft>
-                <a:spcPts val="300"/>
-              </a:spcAft>
-              <a:buNone/>
-            </a:pPr>
-            <a:r>
-              <a:rPr lang="en-US" sz="1300" dirty="0">
-                <a:solidFill>
-                  <a:srgbClr val="1C2833"/>
-                </a:solidFill>
-                <a:latin typeface="Georgia" pitchFamily="34" charset="0"/>
-                <a:ea typeface="Georgia" pitchFamily="34" charset="-122"/>
-                <a:cs typeface="Georgia" pitchFamily="34" charset="-120"/>
-              </a:rPr>
-              <a:t>k* is a single digit (so ×11 through ×19).</a:t>
-            </a:r>
-            <a:endParaRPr lang="en-US" sz="1300" dirty="0"/>
+                <a:spcPts val="1375"/>
+              </a:lnSpc>
+              <a:buNone/>
+            </a:pPr>
+            <a:r>
+              <a:rPr lang="en-US" sz="1100" dirty="0">
+                <a:solidFill>
+                  <a:srgbClr val="1C2833"/>
+                </a:solidFill>
+                <a:latin typeface="Courier New" pitchFamily="34" charset="0"/>
+                <a:ea typeface="Courier New" pitchFamily="34" charset="-122"/>
+                <a:cs typeface="Courier New" pitchFamily="34" charset="-120"/>
+              </a:rPr>
+              <a:t>= 200a + 20b + 30a + 3b</a:t>
+            </a:r>
+            <a:endParaRPr lang="en-US" sz="1100" dirty="0"/>
           </a:p>
         </p:txBody>
       </p:sp>
@@ -6657,8 +8344,8 @@
         </p:nvSpPr>
         <p:spPr>
           <a:xfrm>
-            <a:off x="692051" y="1843236"/>
-            <a:ext cx="7973389" cy="692944"/>
+            <a:off x="631627" y="1359694"/>
+            <a:ext cx="8086939" cy="174575"/>
           </a:xfrm>
           <a:prstGeom prst="rect">
             <a:avLst/>
@@ -6672,120 +8359,22 @@
           <a:p>
             <a:pPr algn="l" indent="0" marL="0">
               <a:lnSpc>
-                <a:spcPts val="1820"/>
-              </a:lnSpc>
-              <a:spcBef>
-                <a:spcPts val="300"/>
-              </a:spcBef>
-              <a:spcAft>
-                <a:spcPts val="300"/>
-              </a:spcAft>
-              <a:buNone/>
-            </a:pPr>
-            <a:r>
-              <a:rPr lang="en-US" sz="1300" dirty="0">
-                <a:solidFill>
-                  <a:srgbClr val="1C2833"/>
-                </a:solidFill>
-                <a:latin typeface="Georgia" pitchFamily="34" charset="0"/>
-                <a:ea typeface="Georgia" pitchFamily="34" charset="-122"/>
-                <a:cs typeface="Georgia" pitchFamily="34" charset="-120"/>
-              </a:rPr>
-              <a:t>For other multipliers, use: - Long multiplication (always works). - </a:t>
-            </a:r>
-            <a:pPr algn="l" indent="0" marL="0">
-              <a:lnSpc>
-                <a:spcPts val="1820"/>
-              </a:lnSpc>
-              <a:spcBef>
-                <a:spcPts val="300"/>
-              </a:spcBef>
-              <a:spcAft>
-                <a:spcPts val="300"/>
-              </a:spcAft>
-              <a:buNone/>
-            </a:pPr>
-            <a:r>
-              <a:rPr lang="en-US" sz="1300" i="1" dirty="0">
-                <a:solidFill>
-                  <a:srgbClr val="1C2833"/>
-                </a:solidFill>
-                <a:latin typeface="Georgia" pitchFamily="34" charset="0"/>
-                <a:ea typeface="Georgia" pitchFamily="34" charset="-122"/>
-                <a:cs typeface="Georgia" pitchFamily="34" charset="-120"/>
-              </a:rPr>
-              <a:t>Nikhilam</a:t>
-            </a:r>
-            <a:pPr algn="l" indent="0" marL="0">
-              <a:lnSpc>
-                <a:spcPts val="1820"/>
-              </a:lnSpc>
-              <a:spcBef>
-                <a:spcPts val="300"/>
-              </a:spcBef>
-              <a:spcAft>
-                <a:spcPts val="300"/>
-              </a:spcAft>
-              <a:buNone/>
-            </a:pPr>
-            <a:r>
-              <a:rPr lang="en-US" sz="1300" dirty="0">
-                <a:solidFill>
-                  <a:srgbClr val="1C2833"/>
-                </a:solidFill>
-                <a:latin typeface="Georgia" pitchFamily="34" charset="0"/>
-                <a:ea typeface="Georgia" pitchFamily="34" charset="-122"/>
-                <a:cs typeface="Georgia" pitchFamily="34" charset="-120"/>
-              </a:rPr>
-              <a:t> "all from 9, last from 10" — when both numbers are near 100 (e.g. 98 × 97). - </a:t>
-            </a:r>
-            <a:pPr algn="l" indent="0" marL="0">
-              <a:lnSpc>
-                <a:spcPts val="1820"/>
-              </a:lnSpc>
-              <a:spcBef>
-                <a:spcPts val="300"/>
-              </a:spcBef>
-              <a:spcAft>
-                <a:spcPts val="300"/>
-              </a:spcAft>
-              <a:buNone/>
-            </a:pPr>
-            <a:r>
-              <a:rPr lang="en-US" sz="1300" i="1" dirty="0">
-                <a:solidFill>
-                  <a:srgbClr val="1C2833"/>
-                </a:solidFill>
-                <a:latin typeface="Georgia" pitchFamily="34" charset="0"/>
-                <a:ea typeface="Georgia" pitchFamily="34" charset="-122"/>
-                <a:cs typeface="Georgia" pitchFamily="34" charset="-120"/>
-              </a:rPr>
-              <a:t>Ūrdhva-tiryagbhyāṁ</a:t>
-            </a:r>
-            <a:pPr algn="l" indent="0" marL="0">
-              <a:lnSpc>
-                <a:spcPts val="1820"/>
-              </a:lnSpc>
-              <a:spcBef>
-                <a:spcPts val="300"/>
-              </a:spcBef>
-              <a:spcAft>
-                <a:spcPts val="300"/>
-              </a:spcAft>
-              <a:buNone/>
-            </a:pPr>
-            <a:r>
-              <a:rPr lang="en-US" sz="1300" dirty="0">
-                <a:solidFill>
-                  <a:srgbClr val="1C2833"/>
-                </a:solidFill>
-                <a:latin typeface="Georgia" pitchFamily="34" charset="0"/>
-                <a:ea typeface="Georgia" pitchFamily="34" charset="-122"/>
-                <a:cs typeface="Georgia" pitchFamily="34" charset="-120"/>
-              </a:rPr>
-              <a:t> "vertically and crosswise" — general multiplication.</a:t>
-            </a:r>
-            <a:endParaRPr lang="en-US" sz="1300" dirty="0"/>
+                <a:spcPts val="1375"/>
+              </a:lnSpc>
+              <a:buNone/>
+            </a:pPr>
+            <a:r>
+              <a:rPr lang="en-US" sz="1100" dirty="0">
+                <a:solidFill>
+                  <a:srgbClr val="1C2833"/>
+                </a:solidFill>
+                <a:latin typeface="Courier New" pitchFamily="34" charset="0"/>
+                <a:ea typeface="Courier New" pitchFamily="34" charset="-122"/>
+                <a:cs typeface="Courier New" pitchFamily="34" charset="-120"/>
+              </a:rPr>
+              <a:t>= 200a + 30a + 20b + 3b</a:t>
+            </a:r>
+            <a:endParaRPr lang="en-US" sz="1100" dirty="0"/>
           </a:p>
         </p:txBody>
       </p:sp>
@@ -6797,8 +8386,8 @@
         </p:nvSpPr>
         <p:spPr>
           <a:xfrm>
-            <a:off x="692051" y="2574280"/>
-            <a:ext cx="7973389" cy="230981"/>
+            <a:off x="631627" y="1534269"/>
+            <a:ext cx="8086939" cy="174575"/>
           </a:xfrm>
           <a:prstGeom prst="rect">
             <a:avLst/>
@@ -6812,126 +8401,74 @@
           <a:p>
             <a:pPr algn="l" indent="0" marL="0">
               <a:lnSpc>
-                <a:spcPts val="1820"/>
-              </a:lnSpc>
-              <a:spcBef>
-                <a:spcPts val="300"/>
-              </a:spcBef>
-              <a:spcAft>
-                <a:spcPts val="300"/>
-              </a:spcAft>
-              <a:buNone/>
-            </a:pPr>
-            <a:r>
-              <a:rPr lang="en-US" sz="1300" dirty="0">
-                <a:solidFill>
-                  <a:srgbClr val="1C2833"/>
-                </a:solidFill>
-                <a:latin typeface="Georgia" pitchFamily="34" charset="0"/>
-                <a:ea typeface="Georgia" pitchFamily="34" charset="-122"/>
-                <a:cs typeface="Georgia" pitchFamily="34" charset="-120"/>
-              </a:rPr>
-              <a:t>Knowing </a:t>
-            </a:r>
-            <a:pPr algn="l" indent="0" marL="0">
-              <a:lnSpc>
-                <a:spcPts val="1820"/>
-              </a:lnSpc>
-              <a:spcBef>
-                <a:spcPts val="300"/>
-              </a:spcBef>
-              <a:spcAft>
-                <a:spcPts val="300"/>
-              </a:spcAft>
-              <a:buNone/>
-            </a:pPr>
-            <a:r>
-              <a:rPr lang="en-US" sz="1300" b="1" i="1" dirty="0">
-                <a:solidFill>
-                  <a:srgbClr val="1C2833"/>
-                </a:solidFill>
-                <a:latin typeface="Georgia" pitchFamily="34" charset="0"/>
-                <a:ea typeface="Georgia" pitchFamily="34" charset="-122"/>
-                <a:cs typeface="Georgia" pitchFamily="34" charset="-120"/>
-              </a:rPr>
-              <a:t>when to use</a:t>
-            </a:r>
-            <a:pPr algn="l" indent="0" marL="0">
-              <a:lnSpc>
-                <a:spcPts val="1820"/>
-              </a:lnSpc>
-              <a:spcBef>
-                <a:spcPts val="300"/>
-              </a:spcBef>
-              <a:spcAft>
-                <a:spcPts val="300"/>
-              </a:spcAft>
-              <a:buNone/>
-            </a:pPr>
-            <a:r>
-              <a:rPr lang="en-US" sz="1300" dirty="0">
-                <a:solidFill>
-                  <a:srgbClr val="1C2833"/>
-                </a:solidFill>
-                <a:latin typeface="Georgia" pitchFamily="34" charset="0"/>
-                <a:ea typeface="Georgia" pitchFamily="34" charset="-122"/>
-                <a:cs typeface="Georgia" pitchFamily="34" charset="-120"/>
-              </a:rPr>
-              <a:t> a trick is as important as knowing </a:t>
-            </a:r>
-            <a:pPr algn="l" indent="0" marL="0">
-              <a:lnSpc>
-                <a:spcPts val="1820"/>
-              </a:lnSpc>
-              <a:spcBef>
-                <a:spcPts val="300"/>
-              </a:spcBef>
-              <a:spcAft>
-                <a:spcPts val="300"/>
-              </a:spcAft>
-              <a:buNone/>
-            </a:pPr>
-            <a:r>
-              <a:rPr lang="en-US" sz="1300" b="1" i="1" dirty="0">
-                <a:solidFill>
-                  <a:srgbClr val="1C2833"/>
-                </a:solidFill>
-                <a:latin typeface="Georgia" pitchFamily="34" charset="0"/>
-                <a:ea typeface="Georgia" pitchFamily="34" charset="-122"/>
-                <a:cs typeface="Georgia" pitchFamily="34" charset="-120"/>
-              </a:rPr>
-              <a:t>how</a:t>
-            </a:r>
-            <a:pPr algn="l" indent="0" marL="0">
-              <a:lnSpc>
-                <a:spcPts val="1820"/>
-              </a:lnSpc>
-              <a:spcBef>
-                <a:spcPts val="300"/>
-              </a:spcBef>
-              <a:spcAft>
-                <a:spcPts val="300"/>
-              </a:spcAft>
-              <a:buNone/>
-            </a:pPr>
-            <a:r>
-              <a:rPr lang="en-US" sz="1300" dirty="0">
-                <a:solidFill>
-                  <a:srgbClr val="1C2833"/>
-                </a:solidFill>
-                <a:latin typeface="Georgia" pitchFamily="34" charset="0"/>
-                <a:ea typeface="Georgia" pitchFamily="34" charset="-122"/>
-                <a:cs typeface="Georgia" pitchFamily="34" charset="-120"/>
-              </a:rPr>
-              <a:t>.</a:t>
-            </a:r>
-            <a:endParaRPr lang="en-US" sz="1300" dirty="0"/>
+                <a:spcPts val="1375"/>
+              </a:lnSpc>
+              <a:buNone/>
+            </a:pPr>
+            <a:r>
+              <a:rPr lang="en-US" sz="1100" dirty="0">
+                <a:solidFill>
+                  <a:srgbClr val="1C2833"/>
+                </a:solidFill>
+                <a:latin typeface="Courier New" pitchFamily="34" charset="0"/>
+                <a:ea typeface="Courier New" pitchFamily="34" charset="-122"/>
+                <a:cs typeface="Courier New" pitchFamily="34" charset="-120"/>
+              </a:rPr>
+              <a:t>= (100·2 + 100·0 + ...) — no longer a tidy "outer-stays, inner-sums" pattern.</a:t>
+            </a:r>
+            <a:endParaRPr lang="en-US" sz="1100" dirty="0"/>
           </a:p>
         </p:txBody>
       </p:sp>
       <p:sp>
         <p:nvSpPr>
           <p:cNvPr id="10" name="Text 8"/>
+          <p:cNvSpPr/>
+          <p:nvPr/>
+        </p:nvSpPr>
+        <p:spPr>
+          <a:xfrm>
+            <a:off x="634901" y="1937296"/>
+            <a:ext cx="8102798" cy="281880"/>
+          </a:xfrm>
+          <a:prstGeom prst="rect">
+            <a:avLst/>
+          </a:prstGeom>
+          <a:noFill/>
+          <a:ln/>
+        </p:spPr>
+        <p:txBody>
+          <a:bodyPr wrap="square" lIns="0" tIns="0" rIns="0" bIns="0" rtlCol="0" anchor="t"/>
+          <a:lstStyle/>
+          <a:p>
+            <a:pPr algn="l" marL="342900" indent="-342900">
+              <a:lnSpc>
+                <a:spcPts val="1620"/>
+              </a:lnSpc>
+              <a:spcAft>
+                <a:spcPts val="300"/>
+              </a:spcAft>
+              <a:buSzPct val="100000"/>
+              <a:buChar char="•"/>
+            </a:pPr>
+            <a:r>
+              <a:rPr lang="en-US" sz="1200" b="1" dirty="0">
+                <a:solidFill>
+                  <a:srgbClr val="1C2833"/>
+                </a:solidFill>
+                <a:latin typeface="Arial" pitchFamily="34" charset="0"/>
+                <a:ea typeface="Arial" pitchFamily="34" charset="-122"/>
+                <a:cs typeface="Arial" pitchFamily="34" charset="-120"/>
+              </a:rPr>
+              <a:t>The honest summary.</a:t>
+            </a:r>
+            <a:endParaRPr lang="en-US" sz="1200" dirty="0"/>
+          </a:p>
+        </p:txBody>
+      </p:sp>
+      <p:sp>
+        <p:nvSpPr>
+          <p:cNvPr id="11" name="Text 9"/>
           <p:cNvSpPr/>
           <p:nvPr/>
         </p:nvSpPr>
@@ -7081,7 +8618,7 @@
                 <a:ea typeface="Georgia" pitchFamily="34" charset="-122"/>
                 <a:cs typeface="Georgia" pitchFamily="34" charset="-120"/>
               </a:rPr>
-              <a:t>Homework</a:t>
+              <a:t>Core (20 min) — Where the trick breaks down (cont.)</a:t>
             </a:r>
             <a:endParaRPr lang="en-US" sz="1800" dirty="0"/>
           </a:p>
@@ -7095,8 +8632,61 @@
         </p:nvSpPr>
         <p:spPr>
           <a:xfrm>
-            <a:off x="406301" y="870942"/>
-            <a:ext cx="8498026" cy="426541"/>
+            <a:off x="406301" y="883593"/>
+            <a:ext cx="8331398" cy="1574006"/>
+          </a:xfrm>
+          <a:prstGeom prst="rect">
+            <a:avLst/>
+          </a:prstGeom>
+          <a:solidFill>
+            <a:srgbClr val="F4F8F9"/>
+          </a:solidFill>
+          <a:ln/>
+        </p:spPr>
+        <p:txBody>
+          <a:bodyPr wrap="square" rtlCol="0" anchor="ctr"/>
+          <a:lstStyle/>
+          <a:p>
+            <a:pPr indent="0" marL="0">
+              <a:buNone/>
+            </a:pPr>
+            <a:endParaRPr lang="en-US" dirty="0"/>
+          </a:p>
+        </p:txBody>
+      </p:sp>
+      <p:sp>
+        <p:nvSpPr>
+          <p:cNvPr id="5" name="Shape 3"/>
+          <p:cNvSpPr/>
+          <p:nvPr/>
+        </p:nvSpPr>
+        <p:spPr>
+          <a:xfrm>
+            <a:off x="434876" y="883593"/>
+            <a:ext cx="0" cy="1574006"/>
+          </a:xfrm>
+          <a:prstGeom prst="line">
+            <a:avLst/>
+          </a:prstGeom>
+          <a:noFill/>
+          <a:ln w="57150">
+            <a:solidFill>
+              <a:srgbClr val="FE4447"/>
+            </a:solidFill>
+            <a:prstDash val="solid"/>
+          </a:ln>
+        </p:spPr>
+      </p:sp>
+      <p:sp>
+        <p:nvSpPr>
+          <p:cNvPr id="6" name="Text 4"/>
+          <p:cNvSpPr/>
+          <p:nvPr/>
+        </p:nvSpPr>
+        <p:spPr>
+          <a:xfrm>
+            <a:off x="692051" y="1074093"/>
+            <a:ext cx="7973389" cy="461963"/>
           </a:xfrm>
           <a:prstGeom prst="rect">
             <a:avLst/>
@@ -7110,7 +8700,7 @@
           <a:p>
             <a:pPr algn="l" indent="0" marL="0">
               <a:lnSpc>
-                <a:spcPts val="1680"/>
+                <a:spcPts val="1820"/>
               </a:lnSpc>
               <a:spcBef>
                 <a:spcPts val="300"/>
@@ -7121,19 +8711,19 @@
               <a:buNone/>
             </a:pPr>
             <a:r>
-              <a:rPr lang="en-US" sz="1200" dirty="0">
-                <a:solidFill>
-                  <a:srgbClr val="1C2833"/>
-                </a:solidFill>
-                <a:latin typeface="Arial" pitchFamily="34" charset="0"/>
-                <a:ea typeface="Arial" pitchFamily="34" charset="-122"/>
-                <a:cs typeface="Arial" pitchFamily="34" charset="-120"/>
-              </a:rPr>
-              <a:t>– Find any 3 multiplication problems in your homework or a textbook. For each, decide which method (×11 family / long / other) you'd use and </a:t>
-            </a:r>
-            <a:pPr algn="l" indent="0" marL="0">
-              <a:lnSpc>
-                <a:spcPts val="1680"/>
+              <a:rPr lang="en-US" sz="1300" dirty="0">
+                <a:solidFill>
+                  <a:srgbClr val="1C2833"/>
+                </a:solidFill>
+                <a:latin typeface="Georgia" pitchFamily="34" charset="0"/>
+                <a:ea typeface="Georgia" pitchFamily="34" charset="-122"/>
+                <a:cs typeface="Georgia" pitchFamily="34" charset="-120"/>
+              </a:rPr>
+              <a:t>*</a:t>
+            </a:r>
+            <a:pPr algn="l" indent="0" marL="0">
+              <a:lnSpc>
+                <a:spcPts val="1820"/>
               </a:lnSpc>
               <a:spcBef>
                 <a:spcPts val="300"/>
@@ -7144,19 +8734,19 @@
               <a:buNone/>
             </a:pPr>
             <a:r>
-              <a:rPr lang="en-US" sz="1200" b="1" dirty="0">
-                <a:solidFill>
-                  <a:srgbClr val="1C2833"/>
-                </a:solidFill>
-                <a:latin typeface="Arial" pitchFamily="34" charset="0"/>
-                <a:ea typeface="Arial" pitchFamily="34" charset="-122"/>
-                <a:cs typeface="Arial" pitchFamily="34" charset="-120"/>
-              </a:rPr>
-              <a:t>why</a:t>
-            </a:r>
-            <a:pPr algn="l" indent="0" marL="0">
-              <a:lnSpc>
-                <a:spcPts val="1680"/>
+              <a:rPr lang="en-US" sz="1300" i="1" dirty="0">
+                <a:solidFill>
+                  <a:srgbClr val="1C2833"/>
+                </a:solidFill>
+                <a:latin typeface="Georgia" pitchFamily="34" charset="0"/>
+                <a:ea typeface="Georgia" pitchFamily="34" charset="-122"/>
+                <a:cs typeface="Georgia" pitchFamily="34" charset="-120"/>
+              </a:rPr>
+              <a:t>The ×11 trick (</a:t>
+            </a:r>
+            <a:pPr algn="l" indent="0" marL="0">
+              <a:lnSpc>
+                <a:spcPts val="1820"/>
               </a:lnSpc>
               <a:spcBef>
                 <a:spcPts val="300"/>
@@ -7167,23 +8757,393 @@
               <a:buNone/>
             </a:pPr>
             <a:r>
-              <a:rPr lang="en-US" sz="1200" dirty="0">
-                <a:solidFill>
-                  <a:srgbClr val="1C2833"/>
-                </a:solidFill>
-                <a:latin typeface="Arial" pitchFamily="34" charset="0"/>
-                <a:ea typeface="Arial" pitchFamily="34" charset="-122"/>
-                <a:cs typeface="Arial" pitchFamily="34" charset="-120"/>
-              </a:rPr>
-              <a:t>. Write 1 sentence of justification per problem.</a:t>
-            </a:r>
-            <a:endParaRPr lang="en-US" sz="1200" dirty="0"/>
-          </a:p>
-        </p:txBody>
-      </p:sp>
-      <p:sp>
-        <p:nvSpPr>
-          <p:cNvPr id="5" name="Text 3"/>
+              <a:rPr lang="en-US" sz="1300" dirty="0">
+                <a:solidFill>
+                  <a:srgbClr val="1C2833"/>
+                </a:solidFill>
+                <a:latin typeface="Georgia" pitchFamily="34" charset="0"/>
+                <a:ea typeface="Georgia" pitchFamily="34" charset="-122"/>
+                <a:cs typeface="Georgia" pitchFamily="34" charset="-120"/>
+              </a:rPr>
+              <a:t>Ekādhikena Pūrveṇa</a:t>
+            </a:r>
+            <a:pPr algn="l" indent="0" marL="0">
+              <a:lnSpc>
+                <a:spcPts val="1820"/>
+              </a:lnSpc>
+              <a:spcBef>
+                <a:spcPts val="300"/>
+              </a:spcBef>
+              <a:spcAft>
+                <a:spcPts val="300"/>
+              </a:spcAft>
+              <a:buNone/>
+            </a:pPr>
+            <a:r>
+              <a:rPr lang="en-US" sz="1300" i="1" dirty="0">
+                <a:solidFill>
+                  <a:srgbClr val="1C2833"/>
+                </a:solidFill>
+                <a:latin typeface="Georgia" pitchFamily="34" charset="0"/>
+                <a:ea typeface="Georgia" pitchFamily="34" charset="-122"/>
+                <a:cs typeface="Georgia" pitchFamily="34" charset="-120"/>
+              </a:rPr>
+              <a:t>) and its scaled cousins (</a:t>
+            </a:r>
+            <a:pPr algn="l" indent="0" marL="0">
+              <a:lnSpc>
+                <a:spcPts val="1820"/>
+              </a:lnSpc>
+              <a:spcBef>
+                <a:spcPts val="300"/>
+              </a:spcBef>
+              <a:spcAft>
+                <a:spcPts val="300"/>
+              </a:spcAft>
+              <a:buNone/>
+            </a:pPr>
+            <a:r>
+              <a:rPr lang="en-US" sz="1300" dirty="0">
+                <a:solidFill>
+                  <a:srgbClr val="1C2833"/>
+                </a:solidFill>
+                <a:latin typeface="Georgia" pitchFamily="34" charset="0"/>
+                <a:ea typeface="Georgia" pitchFamily="34" charset="-122"/>
+                <a:cs typeface="Georgia" pitchFamily="34" charset="-120"/>
+              </a:rPr>
+              <a:t>Anurūpyeṇa</a:t>
+            </a:r>
+            <a:pPr algn="l" indent="0" marL="0">
+              <a:lnSpc>
+                <a:spcPts val="1820"/>
+              </a:lnSpc>
+              <a:spcBef>
+                <a:spcPts val="300"/>
+              </a:spcBef>
+              <a:spcAft>
+                <a:spcPts val="300"/>
+              </a:spcAft>
+              <a:buNone/>
+            </a:pPr>
+            <a:r>
+              <a:rPr lang="en-US" sz="1300" i="1" dirty="0">
+                <a:solidFill>
+                  <a:srgbClr val="1C2833"/>
+                </a:solidFill>
+                <a:latin typeface="Georgia" pitchFamily="34" charset="0"/>
+                <a:ea typeface="Georgia" pitchFamily="34" charset="-122"/>
+                <a:cs typeface="Georgia" pitchFamily="34" charset="-120"/>
+              </a:rPr>
+              <a:t> for ×12 to ×19) work because the multiplier is</a:t>
+            </a:r>
+            <a:pPr algn="l" indent="0" marL="0">
+              <a:lnSpc>
+                <a:spcPts val="1820"/>
+              </a:lnSpc>
+              <a:spcBef>
+                <a:spcPts val="300"/>
+              </a:spcBef>
+              <a:spcAft>
+                <a:spcPts val="300"/>
+              </a:spcAft>
+              <a:buNone/>
+            </a:pPr>
+            <a:r>
+              <a:rPr lang="en-US" sz="1300" dirty="0">
+                <a:solidFill>
+                  <a:srgbClr val="1C2833"/>
+                </a:solidFill>
+                <a:latin typeface="Georgia" pitchFamily="34" charset="0"/>
+                <a:ea typeface="Georgia" pitchFamily="34" charset="-122"/>
+                <a:cs typeface="Georgia" pitchFamily="34" charset="-120"/>
+              </a:rPr>
+              <a:t>very close to 10</a:t>
+            </a:r>
+            <a:pPr algn="l" indent="0" marL="0">
+              <a:lnSpc>
+                <a:spcPts val="1820"/>
+              </a:lnSpc>
+              <a:spcBef>
+                <a:spcPts val="300"/>
+              </a:spcBef>
+              <a:spcAft>
+                <a:spcPts val="300"/>
+              </a:spcAft>
+              <a:buNone/>
+            </a:pPr>
+            <a:r>
+              <a:rPr lang="en-US" sz="1300" i="1" dirty="0">
+                <a:solidFill>
+                  <a:srgbClr val="1C2833"/>
+                </a:solidFill>
+                <a:latin typeface="Georgia" pitchFamily="34" charset="0"/>
+                <a:ea typeface="Georgia" pitchFamily="34" charset="-122"/>
+                <a:cs typeface="Georgia" pitchFamily="34" charset="-120"/>
+              </a:rPr>
+              <a:t>. Specifically, the multiplier must be 10 +</a:t>
+            </a:r>
+            <a:pPr algn="l" indent="0" marL="0">
+              <a:lnSpc>
+                <a:spcPts val="1820"/>
+              </a:lnSpc>
+              <a:spcBef>
+                <a:spcPts val="300"/>
+              </a:spcBef>
+              <a:spcAft>
+                <a:spcPts val="300"/>
+              </a:spcAft>
+              <a:buNone/>
+            </a:pPr>
+            <a:r>
+              <a:rPr lang="en-US" sz="1300" dirty="0">
+                <a:solidFill>
+                  <a:srgbClr val="1C2833"/>
+                </a:solidFill>
+                <a:latin typeface="Georgia" pitchFamily="34" charset="0"/>
+                <a:ea typeface="Georgia" pitchFamily="34" charset="-122"/>
+                <a:cs typeface="Georgia" pitchFamily="34" charset="-120"/>
+              </a:rPr>
+              <a:t>k</a:t>
+            </a:r>
+            <a:pPr algn="l" indent="0" marL="0">
+              <a:lnSpc>
+                <a:spcPts val="1820"/>
+              </a:lnSpc>
+              <a:spcBef>
+                <a:spcPts val="300"/>
+              </a:spcBef>
+              <a:spcAft>
+                <a:spcPts val="300"/>
+              </a:spcAft>
+              <a:buNone/>
+            </a:pPr>
+            <a:r>
+              <a:rPr lang="en-US" sz="1300" i="1" dirty="0">
+                <a:solidFill>
+                  <a:srgbClr val="1C2833"/>
+                </a:solidFill>
+                <a:latin typeface="Georgia" pitchFamily="34" charset="0"/>
+                <a:ea typeface="Georgia" pitchFamily="34" charset="-122"/>
+                <a:cs typeface="Georgia" pitchFamily="34" charset="-120"/>
+              </a:rPr>
+              <a:t> where</a:t>
+            </a:r>
+            <a:pPr algn="l" indent="0" marL="0">
+              <a:lnSpc>
+                <a:spcPts val="1820"/>
+              </a:lnSpc>
+              <a:spcBef>
+                <a:spcPts val="300"/>
+              </a:spcBef>
+              <a:spcAft>
+                <a:spcPts val="300"/>
+              </a:spcAft>
+              <a:buNone/>
+            </a:pPr>
+            <a:r>
+              <a:rPr lang="en-US" sz="1300" dirty="0">
+                <a:solidFill>
+                  <a:srgbClr val="1C2833"/>
+                </a:solidFill>
+                <a:latin typeface="Georgia" pitchFamily="34" charset="0"/>
+                <a:ea typeface="Georgia" pitchFamily="34" charset="-122"/>
+                <a:cs typeface="Georgia" pitchFamily="34" charset="-120"/>
+              </a:rPr>
+              <a:t>k</a:t>
+            </a:r>
+            <a:pPr algn="l" indent="0" marL="0">
+              <a:lnSpc>
+                <a:spcPts val="1820"/>
+              </a:lnSpc>
+              <a:spcBef>
+                <a:spcPts val="300"/>
+              </a:spcBef>
+              <a:spcAft>
+                <a:spcPts val="300"/>
+              </a:spcAft>
+              <a:buNone/>
+            </a:pPr>
+            <a:r>
+              <a:rPr lang="en-US" sz="1300" i="1" dirty="0">
+                <a:solidFill>
+                  <a:srgbClr val="1C2833"/>
+                </a:solidFill>
+                <a:latin typeface="Georgia" pitchFamily="34" charset="0"/>
+                <a:ea typeface="Georgia" pitchFamily="34" charset="-122"/>
+                <a:cs typeface="Georgia" pitchFamily="34" charset="-120"/>
+              </a:rPr>
+              <a:t> is a single digit.</a:t>
+            </a:r>
+            <a:pPr algn="l" indent="0" marL="0">
+              <a:lnSpc>
+                <a:spcPts val="1820"/>
+              </a:lnSpc>
+              <a:spcBef>
+                <a:spcPts val="300"/>
+              </a:spcBef>
+              <a:spcAft>
+                <a:spcPts val="300"/>
+              </a:spcAft>
+              <a:buNone/>
+            </a:pPr>
+            <a:r>
+              <a:rPr lang="en-US" sz="1300" dirty="0">
+                <a:solidFill>
+                  <a:srgbClr val="1C2833"/>
+                </a:solidFill>
+                <a:latin typeface="Georgia" pitchFamily="34" charset="0"/>
+                <a:ea typeface="Georgia" pitchFamily="34" charset="-122"/>
+                <a:cs typeface="Georgia" pitchFamily="34" charset="-120"/>
+              </a:rPr>
+              <a:t>*</a:t>
+            </a:r>
+            <a:endParaRPr lang="en-US" sz="1300" dirty="0"/>
+          </a:p>
+        </p:txBody>
+      </p:sp>
+      <p:sp>
+        <p:nvSpPr>
+          <p:cNvPr id="7" name="Text 5"/>
+          <p:cNvSpPr/>
+          <p:nvPr/>
+        </p:nvSpPr>
+        <p:spPr>
+          <a:xfrm>
+            <a:off x="692051" y="1574155"/>
+            <a:ext cx="7973389" cy="692944"/>
+          </a:xfrm>
+          <a:prstGeom prst="rect">
+            <a:avLst/>
+          </a:prstGeom>
+          <a:noFill/>
+          <a:ln/>
+        </p:spPr>
+        <p:txBody>
+          <a:bodyPr wrap="square" lIns="0" tIns="0" rIns="0" bIns="0" rtlCol="0" anchor="t"/>
+          <a:lstStyle/>
+          <a:p>
+            <a:pPr algn="l" indent="0" marL="0">
+              <a:lnSpc>
+                <a:spcPts val="1820"/>
+              </a:lnSpc>
+              <a:spcBef>
+                <a:spcPts val="300"/>
+              </a:spcBef>
+              <a:spcAft>
+                <a:spcPts val="300"/>
+              </a:spcAft>
+              <a:buNone/>
+            </a:pPr>
+            <a:r>
+              <a:rPr lang="en-US" sz="1300" dirty="0">
+                <a:solidFill>
+                  <a:srgbClr val="1C2833"/>
+                </a:solidFill>
+                <a:latin typeface="Georgia" pitchFamily="34" charset="0"/>
+                <a:ea typeface="Georgia" pitchFamily="34" charset="-122"/>
+                <a:cs typeface="Georgia" pitchFamily="34" charset="-120"/>
+              </a:rPr>
+              <a:t>For multipliers farther from 10 (×23, ×47, ×98), a DIFFERENT sūtra is the right tool — Tirthaji's </a:t>
+            </a:r>
+            <a:pPr algn="l" indent="0" marL="0">
+              <a:lnSpc>
+                <a:spcPts val="1820"/>
+              </a:lnSpc>
+              <a:spcBef>
+                <a:spcPts val="300"/>
+              </a:spcBef>
+              <a:spcAft>
+                <a:spcPts val="300"/>
+              </a:spcAft>
+              <a:buNone/>
+            </a:pPr>
+            <a:r>
+              <a:rPr lang="en-US" sz="1300" i="1" dirty="0">
+                <a:solidFill>
+                  <a:srgbClr val="1C2833"/>
+                </a:solidFill>
+                <a:latin typeface="Georgia" pitchFamily="34" charset="0"/>
+                <a:ea typeface="Georgia" pitchFamily="34" charset="-122"/>
+                <a:cs typeface="Georgia" pitchFamily="34" charset="-120"/>
+              </a:rPr>
+              <a:t>Nikhilam</a:t>
+            </a:r>
+            <a:pPr algn="l" indent="0" marL="0">
+              <a:lnSpc>
+                <a:spcPts val="1820"/>
+              </a:lnSpc>
+              <a:spcBef>
+                <a:spcPts val="300"/>
+              </a:spcBef>
+              <a:spcAft>
+                <a:spcPts val="300"/>
+              </a:spcAft>
+              <a:buNone/>
+            </a:pPr>
+            <a:r>
+              <a:rPr lang="en-US" sz="1300" dirty="0">
+                <a:solidFill>
+                  <a:srgbClr val="1C2833"/>
+                </a:solidFill>
+                <a:latin typeface="Georgia" pitchFamily="34" charset="0"/>
+                <a:ea typeface="Georgia" pitchFamily="34" charset="-122"/>
+                <a:cs typeface="Georgia" pitchFamily="34" charset="-120"/>
+              </a:rPr>
+              <a:t> ("all from 9, last from 10") for multipliers near 100, or </a:t>
+            </a:r>
+            <a:pPr algn="l" indent="0" marL="0">
+              <a:lnSpc>
+                <a:spcPts val="1820"/>
+              </a:lnSpc>
+              <a:spcBef>
+                <a:spcPts val="300"/>
+              </a:spcBef>
+              <a:spcAft>
+                <a:spcPts val="300"/>
+              </a:spcAft>
+              <a:buNone/>
+            </a:pPr>
+            <a:r>
+              <a:rPr lang="en-US" sz="1300" i="1" dirty="0">
+                <a:solidFill>
+                  <a:srgbClr val="1C2833"/>
+                </a:solidFill>
+                <a:latin typeface="Georgia" pitchFamily="34" charset="0"/>
+                <a:ea typeface="Georgia" pitchFamily="34" charset="-122"/>
+                <a:cs typeface="Georgia" pitchFamily="34" charset="-120"/>
+              </a:rPr>
+              <a:t>Ūrdhva-tiryagbhyāṁ</a:t>
+            </a:r>
+            <a:pPr algn="l" indent="0" marL="0">
+              <a:lnSpc>
+                <a:spcPts val="1820"/>
+              </a:lnSpc>
+              <a:spcBef>
+                <a:spcPts val="300"/>
+              </a:spcBef>
+              <a:spcAft>
+                <a:spcPts val="300"/>
+              </a:spcAft>
+              <a:buNone/>
+            </a:pPr>
+            <a:r>
+              <a:rPr lang="en-US" sz="1300" dirty="0">
+                <a:solidFill>
+                  <a:srgbClr val="1C2833"/>
+                </a:solidFill>
+                <a:latin typeface="Georgia" pitchFamily="34" charset="0"/>
+                <a:ea typeface="Georgia" pitchFamily="34" charset="-122"/>
+                <a:cs typeface="Georgia" pitchFamily="34" charset="-120"/>
+              </a:rPr>
+              <a:t> ("vertically and crosswise") for general multiplication.</a:t>
+            </a:r>
+            <a:endParaRPr lang="en-US" sz="1300" dirty="0"/>
+          </a:p>
+        </p:txBody>
+      </p:sp>
+      <p:sp>
+        <p:nvSpPr>
+          <p:cNvPr id="8" name="Text 6"/>
           <p:cNvSpPr/>
           <p:nvPr/>
         </p:nvSpPr>
